--- a/design/malaysia-study-live/IM말레이시아_입학안내문_2027_완성본.pptx
+++ b/design/malaysia-study-live/IM말레이시아_입학안내문_2027_완성본.pptx
@@ -1584,7 +1584,7 @@
           <a:p>
             <a:r>
               <a:rPr lang="en-US" dirty="0"/>
-              <a:t>학부모가 실제로 알고 싶은 숫자는 마지막 행입니다. 여기부터 읽으셔도 됩니다. 입학비가 1회라는 점을 꼭 짚으십시오.</a:t>
+              <a:t>"1년차 소계 (입학비 제외)" 행을 먼저 보여 주십시오. 입학비를 빼면 1년차가 2년차보다 싸다는 것이 바로 보입니다. 마지막 행이 학부모가 실제로 알고 싶은 숫자입니다.</a:t>
             </a:r>
             <a:endParaRPr lang="en-US" dirty="0"/>
           </a:p>
@@ -6196,7 +6196,7 @@
                 <a:ea typeface="맑은 고딕" pitchFamily="34" charset="-122"/>
                 <a:cs typeface="맑은 고딕" pitchFamily="34" charset="-120"/>
               </a:rPr>
-              <a:t>MUFY 1년 (선웨이 칼리지)</a:t>
+              <a:t>MUFY — 파운데이션 1년</a:t>
             </a:r>
             <a:endParaRPr lang="en-US" sz="1200" dirty="0"/>
           </a:p>
@@ -6216,7 +6216,7 @@
                 <a:ea typeface="맑은 고딕" pitchFamily="34" charset="-122"/>
                 <a:cs typeface="맑은 고딕" pitchFamily="34" charset="-120"/>
               </a:rPr>
-              <a:t>또는 Diploma of Business 2년</a:t>
+              <a:t>(선웨이 칼리지에서 이수)</a:t>
             </a:r>
             <a:endParaRPr lang="en-US" sz="1200" dirty="0"/>
           </a:p>
@@ -6323,26 +6323,6 @@
                 <a:cs typeface="맑은 고딕" pitchFamily="34" charset="-120"/>
               </a:rPr>
               <a:t>학부 1학년</a:t>
-            </a:r>
-            <a:endParaRPr lang="en-US" sz="1200" dirty="0"/>
-          </a:p>
-          <a:p>
-            <a:pPr algn="l" indent="0" marL="0">
-              <a:lnSpc>
-                <a:spcPct val="130000"/>
-              </a:lnSpc>
-              <a:buNone/>
-            </a:pPr>
-            <a:r>
-              <a:rPr lang="en-US" sz="1200" b="1" dirty="0">
-                <a:solidFill>
-                  <a:srgbClr val="FFFFFF"/>
-                </a:solidFill>
-                <a:latin typeface="맑은 고딕" pitchFamily="34" charset="0"/>
-                <a:ea typeface="맑은 고딕" pitchFamily="34" charset="-122"/>
-                <a:cs typeface="맑은 고딕" pitchFamily="34" charset="-120"/>
-              </a:rPr>
-              <a:t>(디플로마는 2학년)</a:t>
             </a:r>
             <a:endParaRPr lang="en-US" sz="1200" dirty="0"/>
           </a:p>
@@ -7518,7 +7498,7 @@
                 <a:ea typeface="맑은 고딕" pitchFamily="34" charset="-122"/>
                 <a:cs typeface="맑은 고딕" pitchFamily="34" charset="-120"/>
               </a:rPr>
-              <a:t>고정</a:t>
+              <a:t>공학 4년</a:t>
             </a:r>
             <a:endParaRPr lang="en-US" sz="2200" dirty="0"/>
           </a:p>
@@ -7560,7 +7540,7 @@
                 <a:ea typeface="맑은 고딕" pitchFamily="34" charset="-122"/>
                 <a:cs typeface="맑은 고딕" pitchFamily="34" charset="-120"/>
               </a:rPr>
-              <a:t>학비 인상 없음</a:t>
+              <a:t>MEng · RM 67,000/년</a:t>
             </a:r>
             <a:endParaRPr lang="en-US" sz="1050" dirty="0"/>
           </a:p>
@@ -9187,7 +9167,7 @@
                 <a:ea typeface="맑은 고딕" pitchFamily="34" charset="-122"/>
                 <a:cs typeface="맑은 고딕" pitchFamily="34" charset="-120"/>
               </a:rPr>
-              <a:t>출처: UNM 브로셔 p.5 · p.9 · p.18  |  Pre-Sessional English 10주 RM 8,000 / 20주 RM 13,000 / 30주 RM 20,000 (국제학생)</a:t>
+              <a:t>출처: UNM 브로셔 p.5 · p.9 · p.18 · 공학 학과 페이지  |  공학은 석사통합(MEng) 4년이며 2+2 / 3+1로 영국 이동  |  학비 고정 · Pre-Sessional English 10주 RM 8,000 / 20주 RM 13,000 / 30주 RM 20,000</a:t>
             </a:r>
             <a:endParaRPr lang="en-US" sz="900" dirty="0"/>
           </a:p>
@@ -11243,7 +11223,7 @@
                 <a:ea typeface="맑은 고딕" pitchFamily="34" charset="-122"/>
                 <a:cs typeface="맑은 고딕" pitchFamily="34" charset="-120"/>
               </a:rPr>
-              <a:t>모나쉬 입학처 안내가 맞았습니다</a:t>
+              <a:t>모나쉬 입학처 안내가 맞았습니다  —  다만 실제 지원 기준은 평균 90점 이상입니다</a:t>
             </a:r>
             <a:endParaRPr lang="en-US" sz="1300" dirty="0"/>
           </a:p>
@@ -11285,7 +11265,7 @@
                 <a:ea typeface="맑은 고딕" pitchFamily="34" charset="-122"/>
                 <a:cs typeface="맑은 고딕" pitchFamily="34" charset="-120"/>
               </a:rPr>
-              <a:t>"검정고시는 계열 상관없이 무조건 파운데이션"이라는 안내는 프로스펙터스와 일치합니다. 검정고시가 호주 12학년이 아니라 11학년 수준으로 분류되기 때문입니다. 같은 표에 말레이시아 SPM, O-Level, 캐나다 OSSD가 함께 있습니다.</a:t>
+              <a:t>"검정고시는 계열 상관없이 무조건 파운데이션"이라는 안내는 프로스펙터스와 일치합니다. 검정고시가 호주 12학년이 아니라 11학년 수준으로 분류되기 때문입니다. 공시된 최소 기준은 60%지만 파운데이션은 선발 과정이므로, 모나쉬·노팅엄 모두 평균 90점 이상을 보셔야 합니다.</a:t>
             </a:r>
             <a:endParaRPr lang="en-US" sz="1200" dirty="0"/>
           </a:p>
@@ -16295,7 +16275,7 @@
                           <a:ea typeface="맑은 고딕" pitchFamily="34" charset="-122"/>
                           <a:cs typeface="맑은 고딕" pitchFamily="34" charset="-120"/>
                         </a:rPr>
-                        <a:t>52,000 ~ 57,000</a:t>
+                        <a:t>52,000 ~ 57,000 (공학 MEng 67,000)</a:t>
                       </a:r>
                       <a:endParaRPr lang="en-US" sz="1200" dirty="0">
                         <a:latin typeface="맑은 고딕" charset="0"/>
@@ -16363,7 +16343,7 @@
                           <a:ea typeface="맑은 고딕" pitchFamily="34" charset="-122"/>
                           <a:cs typeface="맑은 고딕" pitchFamily="34" charset="-120"/>
                         </a:rPr>
-                        <a:t>1,760만 ~ 1,930만</a:t>
+                        <a:t>1,760만 ~ 2,270만</a:t>
                       </a:r>
                       <a:endParaRPr lang="en-US" sz="1200" dirty="0">
                         <a:latin typeface="맑은 고딕" charset="0"/>
@@ -16923,7 +16903,7 @@
                 <a:gridCol w="2743200"/>
                 <a:gridCol w="2773375"/>
               </a:tblGrid>
-              <a:tr h="420624">
+              <a:tr h="402336">
                 <a:tc>
                   <a:txBody>
                     <a:bodyPr/>
@@ -17197,7 +17177,7 @@
                   </a:tcPr>
                 </a:tc>
               </a:tr>
-              <a:tr h="420624">
+              <a:tr h="402336">
                 <a:tc>
                   <a:txBody>
                     <a:bodyPr/>
@@ -17471,7 +17451,7 @@
                   </a:tcPr>
                 </a:tc>
               </a:tr>
-              <a:tr h="420624">
+              <a:tr h="402336">
                 <a:tc>
                   <a:txBody>
                     <a:bodyPr/>
@@ -17745,7 +17725,7 @@
                   </a:tcPr>
                 </a:tc>
               </a:tr>
-              <a:tr h="420624">
+              <a:tr h="402336">
                 <a:tc>
                   <a:txBody>
                     <a:bodyPr/>
@@ -18019,7 +17999,7 @@
                   </a:tcPr>
                 </a:tc>
               </a:tr>
-              <a:tr h="420624">
+              <a:tr h="402336">
                 <a:tc>
                   <a:txBody>
                     <a:bodyPr/>
@@ -18293,7 +18273,7 @@
                   </a:tcPr>
                 </a:tc>
               </a:tr>
-              <a:tr h="420624">
+              <a:tr h="402336">
                 <a:tc>
                   <a:txBody>
                     <a:bodyPr/>
@@ -18567,7 +18547,7 @@
                   </a:tcPr>
                 </a:tc>
               </a:tr>
-              <a:tr h="420624">
+              <a:tr h="402336">
                 <a:tc>
                   <a:txBody>
                     <a:bodyPr/>
@@ -18585,7 +18565,7 @@
                           <a:ea typeface="맑은 고딕" pitchFamily="34" charset="-122"/>
                           <a:cs typeface="맑은 고딕" pitchFamily="34" charset="-120"/>
                         </a:rPr>
-                        <a:t>노팅엄 — 파운데이션 + 공학·과학 3년</a:t>
+                        <a:t>노팅엄 — 파운데이션 + 이학 3년</a:t>
                       </a:r>
                       <a:endParaRPr lang="en-US" sz="1200" dirty="0">
                         <a:latin typeface="맑은 고딕" charset="0"/>
@@ -18841,7 +18821,7 @@
                   </a:tcPr>
                 </a:tc>
               </a:tr>
-              <a:tr h="420624">
+              <a:tr h="402336">
                 <a:tc>
                   <a:txBody>
                     <a:bodyPr/>
@@ -19115,7 +19095,7 @@
                   </a:tcPr>
                 </a:tc>
               </a:tr>
-              <a:tr h="420624">
+              <a:tr h="402336">
                 <a:tc>
                   <a:txBody>
                     <a:bodyPr/>
@@ -19389,7 +19369,7 @@
                   </a:tcPr>
                 </a:tc>
               </a:tr>
-              <a:tr h="420624">
+              <a:tr h="402336">
                 <a:tc>
                   <a:txBody>
                     <a:bodyPr/>
@@ -19663,6 +19643,280 @@
                   </a:tcPr>
                 </a:tc>
               </a:tr>
+              <a:tr h="402336">
+                <a:tc>
+                  <a:txBody>
+                    <a:bodyPr/>
+                    <a:lstStyle/>
+                    <a:p>
+                      <a:pPr indent="0" marL="0">
+                        <a:buNone/>
+                      </a:pPr>
+                      <a:r>
+                        <a:rPr lang="en-US" sz="1200" dirty="0">
+                          <a:solidFill>
+                            <a:srgbClr val="1B2426"/>
+                          </a:solidFill>
+                          <a:latin typeface="맑은 고딕" pitchFamily="34" charset="0"/>
+                          <a:ea typeface="맑은 고딕" pitchFamily="34" charset="-122"/>
+                          <a:cs typeface="맑은 고딕" pitchFamily="34" charset="-120"/>
+                        </a:rPr>
+                        <a:t>노팅엄 — 파운데이션 + 공학 MEng 4년</a:t>
+                      </a:r>
+                      <a:endParaRPr lang="en-US" sz="1200" dirty="0">
+                        <a:latin typeface="맑은 고딕" charset="0"/>
+                        <a:ea typeface="맑은 고딕" charset="0"/>
+                        <a:cs typeface="맑은 고딕" charset="0"/>
+                      </a:endParaRPr>
+                    </a:p>
+                  </a:txBody>
+                  <a:tcPr marL="88900" marR="88900" marT="50800" marB="50800" anchor="ctr">
+                    <a:lnL w="6350" cap="flat" cmpd="sng" algn="ctr">
+                      <a:solidFill>
+                        <a:srgbClr val="DCD6C9"/>
+                      </a:solidFill>
+                      <a:prstDash val="solid"/>
+                      <a:round/>
+                      <a:headEnd type="none" w="med" len="med"/>
+                      <a:tailEnd type="none" w="med" len="med"/>
+                    </a:lnL>
+                    <a:lnR w="6350" cap="flat" cmpd="sng" algn="ctr">
+                      <a:solidFill>
+                        <a:srgbClr val="DCD6C9"/>
+                      </a:solidFill>
+                      <a:prstDash val="solid"/>
+                      <a:round/>
+                      <a:headEnd type="none" w="med" len="med"/>
+                      <a:tailEnd type="none" w="med" len="med"/>
+                    </a:lnR>
+                    <a:lnT w="6350" cap="flat" cmpd="sng" algn="ctr">
+                      <a:solidFill>
+                        <a:srgbClr val="DCD6C9"/>
+                      </a:solidFill>
+                      <a:prstDash val="solid"/>
+                      <a:round/>
+                      <a:headEnd type="none" w="med" len="med"/>
+                      <a:tailEnd type="none" w="med" len="med"/>
+                    </a:lnT>
+                    <a:lnB w="6350" cap="flat" cmpd="sng" algn="ctr">
+                      <a:solidFill>
+                        <a:srgbClr val="DCD6C9"/>
+                      </a:solidFill>
+                      <a:prstDash val="solid"/>
+                      <a:round/>
+                      <a:headEnd type="none" w="med" len="med"/>
+                      <a:tailEnd type="none" w="med" len="med"/>
+                    </a:lnB>
+                    <a:solidFill>
+                      <a:srgbClr val="F1EDE4"/>
+                    </a:solidFill>
+                  </a:tcPr>
+                </a:tc>
+                <a:tc>
+                  <a:txBody>
+                    <a:bodyPr/>
+                    <a:lstStyle/>
+                    <a:p>
+                      <a:pPr indent="0" marL="0">
+                        <a:buNone/>
+                      </a:pPr>
+                      <a:r>
+                        <a:rPr lang="en-US" sz="1200" dirty="0">
+                          <a:solidFill>
+                            <a:srgbClr val="1B2426"/>
+                          </a:solidFill>
+                          <a:latin typeface="맑은 고딕" pitchFamily="34" charset="0"/>
+                          <a:ea typeface="맑은 고딕" pitchFamily="34" charset="-122"/>
+                          <a:cs typeface="맑은 고딕" pitchFamily="34" charset="-120"/>
+                        </a:rPr>
+                        <a:t>5년</a:t>
+                      </a:r>
+                      <a:endParaRPr lang="en-US" sz="1200" dirty="0">
+                        <a:latin typeface="맑은 고딕" charset="0"/>
+                        <a:ea typeface="맑은 고딕" charset="0"/>
+                        <a:cs typeface="맑은 고딕" charset="0"/>
+                      </a:endParaRPr>
+                    </a:p>
+                  </a:txBody>
+                  <a:tcPr marL="88900" marR="88900" marT="50800" marB="50800" anchor="ctr">
+                    <a:lnL w="6350" cap="flat" cmpd="sng" algn="ctr">
+                      <a:solidFill>
+                        <a:srgbClr val="DCD6C9"/>
+                      </a:solidFill>
+                      <a:prstDash val="solid"/>
+                      <a:round/>
+                      <a:headEnd type="none" w="med" len="med"/>
+                      <a:tailEnd type="none" w="med" len="med"/>
+                    </a:lnL>
+                    <a:lnR w="6350" cap="flat" cmpd="sng" algn="ctr">
+                      <a:solidFill>
+                        <a:srgbClr val="DCD6C9"/>
+                      </a:solidFill>
+                      <a:prstDash val="solid"/>
+                      <a:round/>
+                      <a:headEnd type="none" w="med" len="med"/>
+                      <a:tailEnd type="none" w="med" len="med"/>
+                    </a:lnR>
+                    <a:lnT w="6350" cap="flat" cmpd="sng" algn="ctr">
+                      <a:solidFill>
+                        <a:srgbClr val="DCD6C9"/>
+                      </a:solidFill>
+                      <a:prstDash val="solid"/>
+                      <a:round/>
+                      <a:headEnd type="none" w="med" len="med"/>
+                      <a:tailEnd type="none" w="med" len="med"/>
+                    </a:lnT>
+                    <a:lnB w="6350" cap="flat" cmpd="sng" algn="ctr">
+                      <a:solidFill>
+                        <a:srgbClr val="DCD6C9"/>
+                      </a:solidFill>
+                      <a:prstDash val="solid"/>
+                      <a:round/>
+                      <a:headEnd type="none" w="med" len="med"/>
+                      <a:tailEnd type="none" w="med" len="med"/>
+                    </a:lnB>
+                    <a:solidFill>
+                      <a:srgbClr val="F1EDE4"/>
+                    </a:solidFill>
+                  </a:tcPr>
+                </a:tc>
+                <a:tc>
+                  <a:txBody>
+                    <a:bodyPr/>
+                    <a:lstStyle/>
+                    <a:p>
+                      <a:pPr indent="0" marL="0">
+                        <a:buNone/>
+                      </a:pPr>
+                      <a:r>
+                        <a:rPr lang="en-US" sz="1200" dirty="0">
+                          <a:solidFill>
+                            <a:srgbClr val="1B2426"/>
+                          </a:solidFill>
+                          <a:latin typeface="맑은 고딕" pitchFamily="34" charset="0"/>
+                          <a:ea typeface="맑은 고딕" pitchFamily="34" charset="-122"/>
+                          <a:cs typeface="맑은 고딕" pitchFamily="34" charset="-120"/>
+                        </a:rPr>
+                        <a:t>306,000</a:t>
+                      </a:r>
+                      <a:endParaRPr lang="en-US" sz="1200" dirty="0">
+                        <a:latin typeface="맑은 고딕" charset="0"/>
+                        <a:ea typeface="맑은 고딕" charset="0"/>
+                        <a:cs typeface="맑은 고딕" charset="0"/>
+                      </a:endParaRPr>
+                    </a:p>
+                  </a:txBody>
+                  <a:tcPr marL="88900" marR="88900" marT="50800" marB="50800" anchor="ctr">
+                    <a:lnL w="6350" cap="flat" cmpd="sng" algn="ctr">
+                      <a:solidFill>
+                        <a:srgbClr val="DCD6C9"/>
+                      </a:solidFill>
+                      <a:prstDash val="solid"/>
+                      <a:round/>
+                      <a:headEnd type="none" w="med" len="med"/>
+                      <a:tailEnd type="none" w="med" len="med"/>
+                    </a:lnL>
+                    <a:lnR w="6350" cap="flat" cmpd="sng" algn="ctr">
+                      <a:solidFill>
+                        <a:srgbClr val="DCD6C9"/>
+                      </a:solidFill>
+                      <a:prstDash val="solid"/>
+                      <a:round/>
+                      <a:headEnd type="none" w="med" len="med"/>
+                      <a:tailEnd type="none" w="med" len="med"/>
+                    </a:lnR>
+                    <a:lnT w="6350" cap="flat" cmpd="sng" algn="ctr">
+                      <a:solidFill>
+                        <a:srgbClr val="DCD6C9"/>
+                      </a:solidFill>
+                      <a:prstDash val="solid"/>
+                      <a:round/>
+                      <a:headEnd type="none" w="med" len="med"/>
+                      <a:tailEnd type="none" w="med" len="med"/>
+                    </a:lnT>
+                    <a:lnB w="6350" cap="flat" cmpd="sng" algn="ctr">
+                      <a:solidFill>
+                        <a:srgbClr val="DCD6C9"/>
+                      </a:solidFill>
+                      <a:prstDash val="solid"/>
+                      <a:round/>
+                      <a:headEnd type="none" w="med" len="med"/>
+                      <a:tailEnd type="none" w="med" len="med"/>
+                    </a:lnB>
+                    <a:solidFill>
+                      <a:srgbClr val="F1EDE4"/>
+                    </a:solidFill>
+                  </a:tcPr>
+                </a:tc>
+                <a:tc>
+                  <a:txBody>
+                    <a:bodyPr/>
+                    <a:lstStyle/>
+                    <a:p>
+                      <a:pPr indent="0" marL="0">
+                        <a:buNone/>
+                      </a:pPr>
+                      <a:r>
+                        <a:rPr lang="en-US" sz="1200" dirty="0">
+                          <a:solidFill>
+                            <a:srgbClr val="1B2426"/>
+                          </a:solidFill>
+                          <a:latin typeface="맑은 고딕" pitchFamily="34" charset="0"/>
+                          <a:ea typeface="맑은 고딕" pitchFamily="34" charset="-122"/>
+                          <a:cs typeface="맑은 고딕" pitchFamily="34" charset="-120"/>
+                        </a:rPr>
+                        <a:t>1억 374만</a:t>
+                      </a:r>
+                      <a:endParaRPr lang="en-US" sz="1200" dirty="0">
+                        <a:latin typeface="맑은 고딕" charset="0"/>
+                        <a:ea typeface="맑은 고딕" charset="0"/>
+                        <a:cs typeface="맑은 고딕" charset="0"/>
+                      </a:endParaRPr>
+                    </a:p>
+                  </a:txBody>
+                  <a:tcPr marL="88900" marR="88900" marT="50800" marB="50800" anchor="ctr">
+                    <a:lnL w="6350" cap="flat" cmpd="sng" algn="ctr">
+                      <a:solidFill>
+                        <a:srgbClr val="DCD6C9"/>
+                      </a:solidFill>
+                      <a:prstDash val="solid"/>
+                      <a:round/>
+                      <a:headEnd type="none" w="med" len="med"/>
+                      <a:tailEnd type="none" w="med" len="med"/>
+                    </a:lnL>
+                    <a:lnR w="6350" cap="flat" cmpd="sng" algn="ctr">
+                      <a:solidFill>
+                        <a:srgbClr val="DCD6C9"/>
+                      </a:solidFill>
+                      <a:prstDash val="solid"/>
+                      <a:round/>
+                      <a:headEnd type="none" w="med" len="med"/>
+                      <a:tailEnd type="none" w="med" len="med"/>
+                    </a:lnR>
+                    <a:lnT w="6350" cap="flat" cmpd="sng" algn="ctr">
+                      <a:solidFill>
+                        <a:srgbClr val="DCD6C9"/>
+                      </a:solidFill>
+                      <a:prstDash val="solid"/>
+                      <a:round/>
+                      <a:headEnd type="none" w="med" len="med"/>
+                      <a:tailEnd type="none" w="med" len="med"/>
+                    </a:lnT>
+                    <a:lnB w="6350" cap="flat" cmpd="sng" algn="ctr">
+                      <a:solidFill>
+                        <a:srgbClr val="DCD6C9"/>
+                      </a:solidFill>
+                      <a:prstDash val="solid"/>
+                      <a:round/>
+                      <a:headEnd type="none" w="med" len="med"/>
+                      <a:tailEnd type="none" w="med" len="med"/>
+                    </a:lnB>
+                    <a:solidFill>
+                      <a:srgbClr val="F1EDE4"/>
+                    </a:solidFill>
+                  </a:tcPr>
+                </a:tc>
+              </a:tr>
             </a:tbl>
           </a:graphicData>
         </a:graphic>
@@ -21151,7 +21405,7 @@
           </p:nvPr>
         </p:nvGraphicFramePr>
         <p:xfrm>
-          <a:off x="640080" y="1828800"/>
+          <a:off x="640080" y="1792224"/>
           <a:ext cx="10911535" cy="914400"/>
         </p:xfrm>
         <a:graphic>
@@ -21159,13 +21413,14 @@
             <a:tbl>
               <a:tblPr/>
               <a:tblGrid>
-                <a:gridCol w="2560320"/>
-                <a:gridCol w="2084832"/>
-                <a:gridCol w="2084832"/>
-                <a:gridCol w="2084832"/>
-                <a:gridCol w="2096719"/>
+                <a:gridCol w="2240280"/>
+                <a:gridCol w="1737360"/>
+                <a:gridCol w="1737360"/>
+                <a:gridCol w="1737360"/>
+                <a:gridCol w="1737360"/>
+                <a:gridCol w="1721815"/>
               </a:tblGrid>
-              <a:tr h="438912">
+              <a:tr h="402336">
                 <a:tc>
                   <a:txBody>
                     <a:bodyPr/>
@@ -21175,7 +21430,7 @@
                         <a:buNone/>
                       </a:pPr>
                       <a:r>
-                        <a:rPr lang="en-US" sz="1150" b="1" dirty="0">
+                        <a:rPr lang="en-US" sz="1050" b="1" dirty="0">
                           <a:solidFill>
                             <a:srgbClr val="FFFFFF"/>
                           </a:solidFill>
@@ -21185,7 +21440,7 @@
                         </a:rPr>
                         <a:t>항목</a:t>
                       </a:r>
-                      <a:endParaRPr lang="en-US" sz="1150" dirty="0">
+                      <a:endParaRPr lang="en-US" sz="1050" dirty="0">
                         <a:latin typeface="맑은 고딕" charset="0"/>
                         <a:ea typeface="맑은 고딕" charset="0"/>
                         <a:cs typeface="맑은 고딕" charset="0"/>
@@ -21243,7 +21498,7 @@
                         <a:buNone/>
                       </a:pPr>
                       <a:r>
-                        <a:rPr lang="en-US" sz="1150" b="1" dirty="0">
+                        <a:rPr lang="en-US" sz="1050" b="1" dirty="0">
                           <a:solidFill>
                             <a:srgbClr val="FFFFFF"/>
                           </a:solidFill>
@@ -21253,7 +21508,7 @@
                         </a:rPr>
                         <a:t>선웨이 경영 4년</a:t>
                       </a:r>
-                      <a:endParaRPr lang="en-US" sz="1150" dirty="0">
+                      <a:endParaRPr lang="en-US" sz="1050" dirty="0">
                         <a:latin typeface="맑은 고딕" charset="0"/>
                         <a:ea typeface="맑은 고딕" charset="0"/>
                         <a:cs typeface="맑은 고딕" charset="0"/>
@@ -21311,7 +21566,7 @@
                         <a:buNone/>
                       </a:pPr>
                       <a:r>
-                        <a:rPr lang="en-US" sz="1150" b="1" dirty="0">
+                        <a:rPr lang="en-US" sz="1050" b="1" dirty="0">
                           <a:solidFill>
                             <a:srgbClr val="FFFFFF"/>
                           </a:solidFill>
@@ -21321,7 +21576,7 @@
                         </a:rPr>
                         <a:t>모나쉬 DHES 3년</a:t>
                       </a:r>
-                      <a:endParaRPr lang="en-US" sz="1150" dirty="0">
+                      <a:endParaRPr lang="en-US" sz="1050" dirty="0">
                         <a:latin typeface="맑은 고딕" charset="0"/>
                         <a:ea typeface="맑은 고딕" charset="0"/>
                         <a:cs typeface="맑은 고딕" charset="0"/>
@@ -21379,7 +21634,7 @@
                         <a:buNone/>
                       </a:pPr>
                       <a:r>
-                        <a:rPr lang="en-US" sz="1150" b="1" dirty="0">
+                        <a:rPr lang="en-US" sz="1050" b="1" dirty="0">
                           <a:solidFill>
                             <a:srgbClr val="FFFFFF"/>
                           </a:solidFill>
@@ -21387,9 +21642,9 @@
                           <a:ea typeface="맑은 고딕" pitchFamily="34" charset="-122"/>
                           <a:cs typeface="맑은 고딕" pitchFamily="34" charset="-120"/>
                         </a:rPr>
-                        <a:t>노팅엄 공학·과학 4년</a:t>
+                        <a:t>노팅엄 문과 4년</a:t>
                       </a:r>
-                      <a:endParaRPr lang="en-US" sz="1150" dirty="0">
+                      <a:endParaRPr lang="en-US" sz="1050" dirty="0">
                         <a:latin typeface="맑은 고딕" charset="0"/>
                         <a:ea typeface="맑은 고딕" charset="0"/>
                         <a:cs typeface="맑은 고딕" charset="0"/>
@@ -21447,7 +21702,7 @@
                         <a:buNone/>
                       </a:pPr>
                       <a:r>
-                        <a:rPr lang="en-US" sz="1150" b="1" dirty="0">
+                        <a:rPr lang="en-US" sz="1050" b="1" dirty="0">
                           <a:solidFill>
                             <a:srgbClr val="FFFFFF"/>
                           </a:solidFill>
@@ -21457,7 +21712,7 @@
                         </a:rPr>
                         <a:t>모나쉬 MUFY+공학 5년</a:t>
                       </a:r>
-                      <a:endParaRPr lang="en-US" sz="1150" dirty="0">
+                      <a:endParaRPr lang="en-US" sz="1050" dirty="0">
                         <a:latin typeface="맑은 고딕" charset="0"/>
                         <a:ea typeface="맑은 고딕" charset="0"/>
                         <a:cs typeface="맑은 고딕" charset="0"/>
@@ -21506,8 +21761,6 @@
                     </a:solidFill>
                   </a:tcPr>
                 </a:tc>
-              </a:tr>
-              <a:tr h="438912">
                 <a:tc>
                   <a:txBody>
                     <a:bodyPr/>
@@ -21517,7 +21770,77 @@
                         <a:buNone/>
                       </a:pPr>
                       <a:r>
-                        <a:rPr lang="en-US" sz="1150" dirty="0">
+                        <a:rPr lang="en-US" sz="1050" b="1" dirty="0">
+                          <a:solidFill>
+                            <a:srgbClr val="FFFFFF"/>
+                          </a:solidFill>
+                          <a:latin typeface="맑은 고딕" pitchFamily="34" charset="0"/>
+                          <a:ea typeface="맑은 고딕" pitchFamily="34" charset="-122"/>
+                          <a:cs typeface="맑은 고딕" pitchFamily="34" charset="-120"/>
+                        </a:rPr>
+                        <a:t>노팅엄 MEng 공학 5년</a:t>
+                      </a:r>
+                      <a:endParaRPr lang="en-US" sz="1050" dirty="0">
+                        <a:latin typeface="맑은 고딕" charset="0"/>
+                        <a:ea typeface="맑은 고딕" charset="0"/>
+                        <a:cs typeface="맑은 고딕" charset="0"/>
+                      </a:endParaRPr>
+                    </a:p>
+                  </a:txBody>
+                  <a:tcPr marL="88900" marR="88900" marT="50800" marB="50800" anchor="ctr">
+                    <a:lnL w="6350" cap="flat" cmpd="sng" algn="ctr">
+                      <a:solidFill>
+                        <a:srgbClr val="DCD6C9"/>
+                      </a:solidFill>
+                      <a:prstDash val="solid"/>
+                      <a:round/>
+                      <a:headEnd type="none" w="med" len="med"/>
+                      <a:tailEnd type="none" w="med" len="med"/>
+                    </a:lnL>
+                    <a:lnR w="6350" cap="flat" cmpd="sng" algn="ctr">
+                      <a:solidFill>
+                        <a:srgbClr val="DCD6C9"/>
+                      </a:solidFill>
+                      <a:prstDash val="solid"/>
+                      <a:round/>
+                      <a:headEnd type="none" w="med" len="med"/>
+                      <a:tailEnd type="none" w="med" len="med"/>
+                    </a:lnR>
+                    <a:lnT w="6350" cap="flat" cmpd="sng" algn="ctr">
+                      <a:solidFill>
+                        <a:srgbClr val="DCD6C9"/>
+                      </a:solidFill>
+                      <a:prstDash val="solid"/>
+                      <a:round/>
+                      <a:headEnd type="none" w="med" len="med"/>
+                      <a:tailEnd type="none" w="med" len="med"/>
+                    </a:lnT>
+                    <a:lnB w="6350" cap="flat" cmpd="sng" algn="ctr">
+                      <a:solidFill>
+                        <a:srgbClr val="DCD6C9"/>
+                      </a:solidFill>
+                      <a:prstDash val="solid"/>
+                      <a:round/>
+                      <a:headEnd type="none" w="med" len="med"/>
+                      <a:tailEnd type="none" w="med" len="med"/>
+                    </a:lnB>
+                    <a:solidFill>
+                      <a:srgbClr val="134744"/>
+                    </a:solidFill>
+                  </a:tcPr>
+                </a:tc>
+              </a:tr>
+              <a:tr h="402336">
+                <a:tc>
+                  <a:txBody>
+                    <a:bodyPr/>
+                    <a:lstStyle/>
+                    <a:p>
+                      <a:pPr indent="0" marL="0">
+                        <a:buNone/>
+                      </a:pPr>
+                      <a:r>
+                        <a:rPr lang="en-US" sz="1050" dirty="0">
                           <a:solidFill>
                             <a:srgbClr val="1B2426"/>
                           </a:solidFill>
@@ -21527,7 +21850,7 @@
                         </a:rPr>
                         <a:t>1년차 학비 (파운데이션)</a:t>
                       </a:r>
-                      <a:endParaRPr lang="en-US" sz="1150" dirty="0">
+                      <a:endParaRPr lang="en-US" sz="1050" dirty="0">
                         <a:latin typeface="맑은 고딕" charset="0"/>
                         <a:ea typeface="맑은 고딕" charset="0"/>
                         <a:cs typeface="맑은 고딕" charset="0"/>
@@ -21585,7 +21908,7 @@
                         <a:buNone/>
                       </a:pPr>
                       <a:r>
-                        <a:rPr lang="en-US" sz="1150" dirty="0">
+                        <a:rPr lang="en-US" sz="1050" dirty="0">
                           <a:solidFill>
                             <a:srgbClr val="1B2426"/>
                           </a:solidFill>
@@ -21595,7 +21918,7 @@
                         </a:rPr>
                         <a:t>약 800만</a:t>
                       </a:r>
-                      <a:endParaRPr lang="en-US" sz="1150" dirty="0">
+                      <a:endParaRPr lang="en-US" sz="1050" dirty="0">
                         <a:latin typeface="맑은 고딕" charset="0"/>
                         <a:ea typeface="맑은 고딕" charset="0"/>
                         <a:cs typeface="맑은 고딕" charset="0"/>
@@ -21653,7 +21976,7 @@
                         <a:buNone/>
                       </a:pPr>
                       <a:r>
-                        <a:rPr lang="en-US" sz="1150" dirty="0">
+                        <a:rPr lang="en-US" sz="1050" dirty="0">
                           <a:solidFill>
                             <a:srgbClr val="1B2426"/>
                           </a:solidFill>
@@ -21663,7 +21986,7 @@
                         </a:rPr>
                         <a:t>DHES 약 1,676만</a:t>
                       </a:r>
-                      <a:endParaRPr lang="en-US" sz="1150" dirty="0">
+                      <a:endParaRPr lang="en-US" sz="1050" dirty="0">
                         <a:latin typeface="맑은 고딕" charset="0"/>
                         <a:ea typeface="맑은 고딕" charset="0"/>
                         <a:cs typeface="맑은 고딕" charset="0"/>
@@ -21721,7 +22044,7 @@
                         <a:buNone/>
                       </a:pPr>
                       <a:r>
-                        <a:rPr lang="en-US" sz="1150" dirty="0">
+                        <a:rPr lang="en-US" sz="1050" dirty="0">
                           <a:solidFill>
                             <a:srgbClr val="1B2426"/>
                           </a:solidFill>
@@ -21731,7 +22054,7 @@
                         </a:rPr>
                         <a:t>약 1,288만</a:t>
                       </a:r>
-                      <a:endParaRPr lang="en-US" sz="1150" dirty="0">
+                      <a:endParaRPr lang="en-US" sz="1050" dirty="0">
                         <a:latin typeface="맑은 고딕" charset="0"/>
                         <a:ea typeface="맑은 고딕" charset="0"/>
                         <a:cs typeface="맑은 고딕" charset="0"/>
@@ -21789,7 +22112,7 @@
                         <a:buNone/>
                       </a:pPr>
                       <a:r>
-                        <a:rPr lang="en-US" sz="1150" dirty="0">
+                        <a:rPr lang="en-US" sz="1050" dirty="0">
                           <a:solidFill>
                             <a:srgbClr val="1B2426"/>
                           </a:solidFill>
@@ -21799,7 +22122,7 @@
                         </a:rPr>
                         <a:t>MUFY 약 800만</a:t>
                       </a:r>
-                      <a:endParaRPr lang="en-US" sz="1150" dirty="0">
+                      <a:endParaRPr lang="en-US" sz="1050" dirty="0">
                         <a:latin typeface="맑은 고딕" charset="0"/>
                         <a:ea typeface="맑은 고딕" charset="0"/>
                         <a:cs typeface="맑은 고딕" charset="0"/>
@@ -21848,8 +22171,6 @@
                     </a:solidFill>
                   </a:tcPr>
                 </a:tc>
-              </a:tr>
-              <a:tr h="438912">
                 <a:tc>
                   <a:txBody>
                     <a:bodyPr/>
@@ -21859,7 +22180,77 @@
                         <a:buNone/>
                       </a:pPr>
                       <a:r>
-                        <a:rPr lang="en-US" sz="1150" dirty="0">
+                        <a:rPr lang="en-US" sz="1050" dirty="0">
+                          <a:solidFill>
+                            <a:srgbClr val="1B2426"/>
+                          </a:solidFill>
+                          <a:latin typeface="맑은 고딕" pitchFamily="34" charset="0"/>
+                          <a:ea typeface="맑은 고딕" pitchFamily="34" charset="-122"/>
+                          <a:cs typeface="맑은 고딕" pitchFamily="34" charset="-120"/>
+                        </a:rPr>
+                        <a:t>약 1,288만</a:t>
+                      </a:r>
+                      <a:endParaRPr lang="en-US" sz="1050" dirty="0">
+                        <a:latin typeface="맑은 고딕" charset="0"/>
+                        <a:ea typeface="맑은 고딕" charset="0"/>
+                        <a:cs typeface="맑은 고딕" charset="0"/>
+                      </a:endParaRPr>
+                    </a:p>
+                  </a:txBody>
+                  <a:tcPr marL="88900" marR="88900" marT="50800" marB="50800" anchor="ctr">
+                    <a:lnL w="6350" cap="flat" cmpd="sng" algn="ctr">
+                      <a:solidFill>
+                        <a:srgbClr val="DCD6C9"/>
+                      </a:solidFill>
+                      <a:prstDash val="solid"/>
+                      <a:round/>
+                      <a:headEnd type="none" w="med" len="med"/>
+                      <a:tailEnd type="none" w="med" len="med"/>
+                    </a:lnL>
+                    <a:lnR w="6350" cap="flat" cmpd="sng" algn="ctr">
+                      <a:solidFill>
+                        <a:srgbClr val="DCD6C9"/>
+                      </a:solidFill>
+                      <a:prstDash val="solid"/>
+                      <a:round/>
+                      <a:headEnd type="none" w="med" len="med"/>
+                      <a:tailEnd type="none" w="med" len="med"/>
+                    </a:lnR>
+                    <a:lnT w="6350" cap="flat" cmpd="sng" algn="ctr">
+                      <a:solidFill>
+                        <a:srgbClr val="DCD6C9"/>
+                      </a:solidFill>
+                      <a:prstDash val="solid"/>
+                      <a:round/>
+                      <a:headEnd type="none" w="med" len="med"/>
+                      <a:tailEnd type="none" w="med" len="med"/>
+                    </a:lnT>
+                    <a:lnB w="6350" cap="flat" cmpd="sng" algn="ctr">
+                      <a:solidFill>
+                        <a:srgbClr val="DCD6C9"/>
+                      </a:solidFill>
+                      <a:prstDash val="solid"/>
+                      <a:round/>
+                      <a:headEnd type="none" w="med" len="med"/>
+                      <a:tailEnd type="none" w="med" len="med"/>
+                    </a:lnB>
+                    <a:solidFill>
+                      <a:srgbClr val="FFFFFF"/>
+                    </a:solidFill>
+                  </a:tcPr>
+                </a:tc>
+              </a:tr>
+              <a:tr h="402336">
+                <a:tc>
+                  <a:txBody>
+                    <a:bodyPr/>
+                    <a:lstStyle/>
+                    <a:p>
+                      <a:pPr indent="0" marL="0">
+                        <a:buNone/>
+                      </a:pPr>
+                      <a:r>
+                        <a:rPr lang="en-US" sz="1050" dirty="0">
                           <a:solidFill>
                             <a:srgbClr val="1B2426"/>
                           </a:solidFill>
@@ -21869,7 +22260,7 @@
                         </a:rPr>
                         <a:t>2년차 이후 학비 (학부)</a:t>
                       </a:r>
-                      <a:endParaRPr lang="en-US" sz="1150" dirty="0">
+                      <a:endParaRPr lang="en-US" sz="1050" dirty="0">
                         <a:latin typeface="맑은 고딕" charset="0"/>
                         <a:ea typeface="맑은 고딕" charset="0"/>
                         <a:cs typeface="맑은 고딕" charset="0"/>
@@ -21927,7 +22318,7 @@
                         <a:buNone/>
                       </a:pPr>
                       <a:r>
-                        <a:rPr lang="en-US" sz="1150" dirty="0">
+                        <a:rPr lang="en-US" sz="1050" dirty="0">
                           <a:solidFill>
                             <a:srgbClr val="1B2426"/>
                           </a:solidFill>
@@ -21937,7 +22328,7 @@
                         </a:rPr>
                         <a:t>약 910만~1,290만</a:t>
                       </a:r>
-                      <a:endParaRPr lang="en-US" sz="1150" dirty="0">
+                      <a:endParaRPr lang="en-US" sz="1050" dirty="0">
                         <a:latin typeface="맑은 고딕" charset="0"/>
                         <a:ea typeface="맑은 고딕" charset="0"/>
                         <a:cs typeface="맑은 고딕" charset="0"/>
@@ -21995,7 +22386,7 @@
                         <a:buNone/>
                       </a:pPr>
                       <a:r>
-                        <a:rPr lang="en-US" sz="1150" dirty="0">
+                        <a:rPr lang="en-US" sz="1050" dirty="0">
                           <a:solidFill>
                             <a:srgbClr val="1B2426"/>
                           </a:solidFill>
@@ -22005,7 +22396,7 @@
                         </a:rPr>
                         <a:t>약 1,741만</a:t>
                       </a:r>
-                      <a:endParaRPr lang="en-US" sz="1150" dirty="0">
+                      <a:endParaRPr lang="en-US" sz="1050" dirty="0">
                         <a:latin typeface="맑은 고딕" charset="0"/>
                         <a:ea typeface="맑은 고딕" charset="0"/>
                         <a:cs typeface="맑은 고딕" charset="0"/>
@@ -22063,7 +22454,7 @@
                         <a:buNone/>
                       </a:pPr>
                       <a:r>
-                        <a:rPr lang="en-US" sz="1150" dirty="0">
+                        <a:rPr lang="en-US" sz="1050" dirty="0">
                           <a:solidFill>
                             <a:srgbClr val="1B2426"/>
                           </a:solidFill>
@@ -22071,9 +22462,9 @@
                           <a:ea typeface="맑은 고딕" pitchFamily="34" charset="-122"/>
                           <a:cs typeface="맑은 고딕" pitchFamily="34" charset="-120"/>
                         </a:rPr>
-                        <a:t>약 1,763만</a:t>
+                        <a:t>약 1,865만</a:t>
                       </a:r>
-                      <a:endParaRPr lang="en-US" sz="1150" dirty="0">
+                      <a:endParaRPr lang="en-US" sz="1050" dirty="0">
                         <a:latin typeface="맑은 고딕" charset="0"/>
                         <a:ea typeface="맑은 고딕" charset="0"/>
                         <a:cs typeface="맑은 고딕" charset="0"/>
@@ -22131,7 +22522,7 @@
                         <a:buNone/>
                       </a:pPr>
                       <a:r>
-                        <a:rPr lang="en-US" sz="1150" dirty="0">
+                        <a:rPr lang="en-US" sz="1050" dirty="0">
                           <a:solidFill>
                             <a:srgbClr val="1B2426"/>
                           </a:solidFill>
@@ -22141,7 +22532,7 @@
                         </a:rPr>
                         <a:t>약 2,311만</a:t>
                       </a:r>
-                      <a:endParaRPr lang="en-US" sz="1150" dirty="0">
+                      <a:endParaRPr lang="en-US" sz="1050" dirty="0">
                         <a:latin typeface="맑은 고딕" charset="0"/>
                         <a:ea typeface="맑은 고딕" charset="0"/>
                         <a:cs typeface="맑은 고딕" charset="0"/>
@@ -22190,8 +22581,6 @@
                     </a:solidFill>
                   </a:tcPr>
                 </a:tc>
-              </a:tr>
-              <a:tr h="438912">
                 <a:tc>
                   <a:txBody>
                     <a:bodyPr/>
@@ -22201,7 +22590,77 @@
                         <a:buNone/>
                       </a:pPr>
                       <a:r>
-                        <a:rPr lang="en-US" sz="1150" dirty="0">
+                        <a:rPr lang="en-US" sz="1050" dirty="0">
+                          <a:solidFill>
+                            <a:srgbClr val="1B2426"/>
+                          </a:solidFill>
+                          <a:latin typeface="맑은 고딕" pitchFamily="34" charset="0"/>
+                          <a:ea typeface="맑은 고딕" pitchFamily="34" charset="-122"/>
+                          <a:cs typeface="맑은 고딕" pitchFamily="34" charset="-120"/>
+                        </a:rPr>
+                        <a:t>약 2,271만</a:t>
+                      </a:r>
+                      <a:endParaRPr lang="en-US" sz="1050" dirty="0">
+                        <a:latin typeface="맑은 고딕" charset="0"/>
+                        <a:ea typeface="맑은 고딕" charset="0"/>
+                        <a:cs typeface="맑은 고딕" charset="0"/>
+                      </a:endParaRPr>
+                    </a:p>
+                  </a:txBody>
+                  <a:tcPr marL="88900" marR="88900" marT="50800" marB="50800" anchor="ctr">
+                    <a:lnL w="6350" cap="flat" cmpd="sng" algn="ctr">
+                      <a:solidFill>
+                        <a:srgbClr val="DCD6C9"/>
+                      </a:solidFill>
+                      <a:prstDash val="solid"/>
+                      <a:round/>
+                      <a:headEnd type="none" w="med" len="med"/>
+                      <a:tailEnd type="none" w="med" len="med"/>
+                    </a:lnL>
+                    <a:lnR w="6350" cap="flat" cmpd="sng" algn="ctr">
+                      <a:solidFill>
+                        <a:srgbClr val="DCD6C9"/>
+                      </a:solidFill>
+                      <a:prstDash val="solid"/>
+                      <a:round/>
+                      <a:headEnd type="none" w="med" len="med"/>
+                      <a:tailEnd type="none" w="med" len="med"/>
+                    </a:lnR>
+                    <a:lnT w="6350" cap="flat" cmpd="sng" algn="ctr">
+                      <a:solidFill>
+                        <a:srgbClr val="DCD6C9"/>
+                      </a:solidFill>
+                      <a:prstDash val="solid"/>
+                      <a:round/>
+                      <a:headEnd type="none" w="med" len="med"/>
+                      <a:tailEnd type="none" w="med" len="med"/>
+                    </a:lnT>
+                    <a:lnB w="6350" cap="flat" cmpd="sng" algn="ctr">
+                      <a:solidFill>
+                        <a:srgbClr val="DCD6C9"/>
+                      </a:solidFill>
+                      <a:prstDash val="solid"/>
+                      <a:round/>
+                      <a:headEnd type="none" w="med" len="med"/>
+                      <a:tailEnd type="none" w="med" len="med"/>
+                    </a:lnB>
+                    <a:solidFill>
+                      <a:srgbClr val="F1EDE4"/>
+                    </a:solidFill>
+                  </a:tcPr>
+                </a:tc>
+              </a:tr>
+              <a:tr h="402336">
+                <a:tc>
+                  <a:txBody>
+                    <a:bodyPr/>
+                    <a:lstStyle/>
+                    <a:p>
+                      <a:pPr indent="0" marL="0">
+                        <a:buNone/>
+                      </a:pPr>
+                      <a:r>
+                        <a:rPr lang="en-US" sz="1050" dirty="0">
                           <a:solidFill>
                             <a:srgbClr val="1B2426"/>
                           </a:solidFill>
@@ -22211,7 +22670,7 @@
                         </a:rPr>
                         <a:t>학생비자 갱신</a:t>
                       </a:r>
-                      <a:endParaRPr lang="en-US" sz="1150" dirty="0">
+                      <a:endParaRPr lang="en-US" sz="1050" dirty="0">
                         <a:latin typeface="맑은 고딕" charset="0"/>
                         <a:ea typeface="맑은 고딕" charset="0"/>
                         <a:cs typeface="맑은 고딕" charset="0"/>
@@ -22269,7 +22728,7 @@
                         <a:buNone/>
                       </a:pPr>
                       <a:r>
-                        <a:rPr lang="en-US" sz="1150" dirty="0">
+                        <a:rPr lang="en-US" sz="1050" dirty="0">
                           <a:solidFill>
                             <a:srgbClr val="1B2426"/>
                           </a:solidFill>
@@ -22279,7 +22738,7 @@
                         </a:rPr>
                         <a:t>약 140만 / 년</a:t>
                       </a:r>
-                      <a:endParaRPr lang="en-US" sz="1150" dirty="0">
+                      <a:endParaRPr lang="en-US" sz="1050" dirty="0">
                         <a:latin typeface="맑은 고딕" charset="0"/>
                         <a:ea typeface="맑은 고딕" charset="0"/>
                         <a:cs typeface="맑은 고딕" charset="0"/>
@@ -22337,7 +22796,7 @@
                         <a:buNone/>
                       </a:pPr>
                       <a:r>
-                        <a:rPr lang="en-US" sz="1150" dirty="0">
+                        <a:rPr lang="en-US" sz="1050" dirty="0">
                           <a:solidFill>
                             <a:srgbClr val="1B2426"/>
                           </a:solidFill>
@@ -22347,7 +22806,7 @@
                         </a:rPr>
                         <a:t>약 140만 / 년</a:t>
                       </a:r>
-                      <a:endParaRPr lang="en-US" sz="1150" dirty="0">
+                      <a:endParaRPr lang="en-US" sz="1050" dirty="0">
                         <a:latin typeface="맑은 고딕" charset="0"/>
                         <a:ea typeface="맑은 고딕" charset="0"/>
                         <a:cs typeface="맑은 고딕" charset="0"/>
@@ -22405,7 +22864,7 @@
                         <a:buNone/>
                       </a:pPr>
                       <a:r>
-                        <a:rPr lang="en-US" sz="1150" dirty="0">
+                        <a:rPr lang="en-US" sz="1050" dirty="0">
                           <a:solidFill>
                             <a:srgbClr val="1B2426"/>
                           </a:solidFill>
@@ -22415,7 +22874,7 @@
                         </a:rPr>
                         <a:t>약 140만 / 년</a:t>
                       </a:r>
-                      <a:endParaRPr lang="en-US" sz="1150" dirty="0">
+                      <a:endParaRPr lang="en-US" sz="1050" dirty="0">
                         <a:latin typeface="맑은 고딕" charset="0"/>
                         <a:ea typeface="맑은 고딕" charset="0"/>
                         <a:cs typeface="맑은 고딕" charset="0"/>
@@ -22473,7 +22932,7 @@
                         <a:buNone/>
                       </a:pPr>
                       <a:r>
-                        <a:rPr lang="en-US" sz="1150" dirty="0">
+                        <a:rPr lang="en-US" sz="1050" dirty="0">
                           <a:solidFill>
                             <a:srgbClr val="1B2426"/>
                           </a:solidFill>
@@ -22483,7 +22942,7 @@
                         </a:rPr>
                         <a:t>약 140만 / 년</a:t>
                       </a:r>
-                      <a:endParaRPr lang="en-US" sz="1150" dirty="0">
+                      <a:endParaRPr lang="en-US" sz="1050" dirty="0">
                         <a:latin typeface="맑은 고딕" charset="0"/>
                         <a:ea typeface="맑은 고딕" charset="0"/>
                         <a:cs typeface="맑은 고딕" charset="0"/>
@@ -22532,8 +22991,6 @@
                     </a:solidFill>
                   </a:tcPr>
                 </a:tc>
-              </a:tr>
-              <a:tr h="438912">
                 <a:tc>
                   <a:txBody>
                     <a:bodyPr/>
@@ -22543,7 +23000,77 @@
                         <a:buNone/>
                       </a:pPr>
                       <a:r>
-                        <a:rPr lang="en-US" sz="1150" dirty="0">
+                        <a:rPr lang="en-US" sz="1050" dirty="0">
+                          <a:solidFill>
+                            <a:srgbClr val="1B2426"/>
+                          </a:solidFill>
+                          <a:latin typeface="맑은 고딕" pitchFamily="34" charset="0"/>
+                          <a:ea typeface="맑은 고딕" pitchFamily="34" charset="-122"/>
+                          <a:cs typeface="맑은 고딕" pitchFamily="34" charset="-120"/>
+                        </a:rPr>
+                        <a:t>약 140만 / 년</a:t>
+                      </a:r>
+                      <a:endParaRPr lang="en-US" sz="1050" dirty="0">
+                        <a:latin typeface="맑은 고딕" charset="0"/>
+                        <a:ea typeface="맑은 고딕" charset="0"/>
+                        <a:cs typeface="맑은 고딕" charset="0"/>
+                      </a:endParaRPr>
+                    </a:p>
+                  </a:txBody>
+                  <a:tcPr marL="88900" marR="88900" marT="50800" marB="50800" anchor="ctr">
+                    <a:lnL w="6350" cap="flat" cmpd="sng" algn="ctr">
+                      <a:solidFill>
+                        <a:srgbClr val="DCD6C9"/>
+                      </a:solidFill>
+                      <a:prstDash val="solid"/>
+                      <a:round/>
+                      <a:headEnd type="none" w="med" len="med"/>
+                      <a:tailEnd type="none" w="med" len="med"/>
+                    </a:lnL>
+                    <a:lnR w="6350" cap="flat" cmpd="sng" algn="ctr">
+                      <a:solidFill>
+                        <a:srgbClr val="DCD6C9"/>
+                      </a:solidFill>
+                      <a:prstDash val="solid"/>
+                      <a:round/>
+                      <a:headEnd type="none" w="med" len="med"/>
+                      <a:tailEnd type="none" w="med" len="med"/>
+                    </a:lnR>
+                    <a:lnT w="6350" cap="flat" cmpd="sng" algn="ctr">
+                      <a:solidFill>
+                        <a:srgbClr val="DCD6C9"/>
+                      </a:solidFill>
+                      <a:prstDash val="solid"/>
+                      <a:round/>
+                      <a:headEnd type="none" w="med" len="med"/>
+                      <a:tailEnd type="none" w="med" len="med"/>
+                    </a:lnT>
+                    <a:lnB w="6350" cap="flat" cmpd="sng" algn="ctr">
+                      <a:solidFill>
+                        <a:srgbClr val="DCD6C9"/>
+                      </a:solidFill>
+                      <a:prstDash val="solid"/>
+                      <a:round/>
+                      <a:headEnd type="none" w="med" len="med"/>
+                      <a:tailEnd type="none" w="med" len="med"/>
+                    </a:lnB>
+                    <a:solidFill>
+                      <a:srgbClr val="FFFFFF"/>
+                    </a:solidFill>
+                  </a:tcPr>
+                </a:tc>
+              </a:tr>
+              <a:tr h="402336">
+                <a:tc>
+                  <a:txBody>
+                    <a:bodyPr/>
+                    <a:lstStyle/>
+                    <a:p>
+                      <a:pPr indent="0" marL="0">
+                        <a:buNone/>
+                      </a:pPr>
+                      <a:r>
+                        <a:rPr lang="en-US" sz="1050" dirty="0">
                           <a:solidFill>
                             <a:srgbClr val="1B2426"/>
                           </a:solidFill>
@@ -22553,7 +23080,7 @@
                         </a:rPr>
                         <a:t>IM 공동체 운영비</a:t>
                       </a:r>
-                      <a:endParaRPr lang="en-US" sz="1150" dirty="0">
+                      <a:endParaRPr lang="en-US" sz="1050" dirty="0">
                         <a:latin typeface="맑은 고딕" charset="0"/>
                         <a:ea typeface="맑은 고딕" charset="0"/>
                         <a:cs typeface="맑은 고딕" charset="0"/>
@@ -22611,7 +23138,7 @@
                         <a:buNone/>
                       </a:pPr>
                       <a:r>
-                        <a:rPr lang="en-US" sz="1150" dirty="0">
+                        <a:rPr lang="en-US" sz="1050" dirty="0">
                           <a:solidFill>
                             <a:srgbClr val="1B2426"/>
                           </a:solidFill>
@@ -22621,7 +23148,7 @@
                         </a:rPr>
                         <a:t>1,440만 / 년</a:t>
                       </a:r>
-                      <a:endParaRPr lang="en-US" sz="1150" dirty="0">
+                      <a:endParaRPr lang="en-US" sz="1050" dirty="0">
                         <a:latin typeface="맑은 고딕" charset="0"/>
                         <a:ea typeface="맑은 고딕" charset="0"/>
                         <a:cs typeface="맑은 고딕" charset="0"/>
@@ -22679,7 +23206,7 @@
                         <a:buNone/>
                       </a:pPr>
                       <a:r>
-                        <a:rPr lang="en-US" sz="1150" dirty="0">
+                        <a:rPr lang="en-US" sz="1050" dirty="0">
                           <a:solidFill>
                             <a:srgbClr val="1B2426"/>
                           </a:solidFill>
@@ -22689,7 +23216,7 @@
                         </a:rPr>
                         <a:t>1,440만 / 년</a:t>
                       </a:r>
-                      <a:endParaRPr lang="en-US" sz="1150" dirty="0">
+                      <a:endParaRPr lang="en-US" sz="1050" dirty="0">
                         <a:latin typeface="맑은 고딕" charset="0"/>
                         <a:ea typeface="맑은 고딕" charset="0"/>
                         <a:cs typeface="맑은 고딕" charset="0"/>
@@ -22747,7 +23274,7 @@
                         <a:buNone/>
                       </a:pPr>
                       <a:r>
-                        <a:rPr lang="en-US" sz="1150" dirty="0">
+                        <a:rPr lang="en-US" sz="1050" dirty="0">
                           <a:solidFill>
                             <a:srgbClr val="1B2426"/>
                           </a:solidFill>
@@ -22757,7 +23284,7 @@
                         </a:rPr>
                         <a:t>1,440만 / 년</a:t>
                       </a:r>
-                      <a:endParaRPr lang="en-US" sz="1150" dirty="0">
+                      <a:endParaRPr lang="en-US" sz="1050" dirty="0">
                         <a:latin typeface="맑은 고딕" charset="0"/>
                         <a:ea typeface="맑은 고딕" charset="0"/>
                         <a:cs typeface="맑은 고딕" charset="0"/>
@@ -22815,7 +23342,7 @@
                         <a:buNone/>
                       </a:pPr>
                       <a:r>
-                        <a:rPr lang="en-US" sz="1150" dirty="0">
+                        <a:rPr lang="en-US" sz="1050" dirty="0">
                           <a:solidFill>
                             <a:srgbClr val="1B2426"/>
                           </a:solidFill>
@@ -22825,7 +23352,7 @@
                         </a:rPr>
                         <a:t>1,440만 / 년</a:t>
                       </a:r>
-                      <a:endParaRPr lang="en-US" sz="1150" dirty="0">
+                      <a:endParaRPr lang="en-US" sz="1050" dirty="0">
                         <a:latin typeface="맑은 고딕" charset="0"/>
                         <a:ea typeface="맑은 고딕" charset="0"/>
                         <a:cs typeface="맑은 고딕" charset="0"/>
@@ -22874,8 +23401,6 @@
                     </a:solidFill>
                   </a:tcPr>
                 </a:tc>
-              </a:tr>
-              <a:tr h="438912">
                 <a:tc>
                   <a:txBody>
                     <a:bodyPr/>
@@ -22885,7 +23410,77 @@
                         <a:buNone/>
                       </a:pPr>
                       <a:r>
-                        <a:rPr lang="en-US" sz="1150" dirty="0">
+                        <a:rPr lang="en-US" sz="1050" dirty="0">
+                          <a:solidFill>
+                            <a:srgbClr val="1B2426"/>
+                          </a:solidFill>
+                          <a:latin typeface="맑은 고딕" pitchFamily="34" charset="0"/>
+                          <a:ea typeface="맑은 고딕" pitchFamily="34" charset="-122"/>
+                          <a:cs typeface="맑은 고딕" pitchFamily="34" charset="-120"/>
+                        </a:rPr>
+                        <a:t>1,440만 / 년</a:t>
+                      </a:r>
+                      <a:endParaRPr lang="en-US" sz="1050" dirty="0">
+                        <a:latin typeface="맑은 고딕" charset="0"/>
+                        <a:ea typeface="맑은 고딕" charset="0"/>
+                        <a:cs typeface="맑은 고딕" charset="0"/>
+                      </a:endParaRPr>
+                    </a:p>
+                  </a:txBody>
+                  <a:tcPr marL="88900" marR="88900" marT="50800" marB="50800" anchor="ctr">
+                    <a:lnL w="6350" cap="flat" cmpd="sng" algn="ctr">
+                      <a:solidFill>
+                        <a:srgbClr val="DCD6C9"/>
+                      </a:solidFill>
+                      <a:prstDash val="solid"/>
+                      <a:round/>
+                      <a:headEnd type="none" w="med" len="med"/>
+                      <a:tailEnd type="none" w="med" len="med"/>
+                    </a:lnL>
+                    <a:lnR w="6350" cap="flat" cmpd="sng" algn="ctr">
+                      <a:solidFill>
+                        <a:srgbClr val="DCD6C9"/>
+                      </a:solidFill>
+                      <a:prstDash val="solid"/>
+                      <a:round/>
+                      <a:headEnd type="none" w="med" len="med"/>
+                      <a:tailEnd type="none" w="med" len="med"/>
+                    </a:lnR>
+                    <a:lnT w="6350" cap="flat" cmpd="sng" algn="ctr">
+                      <a:solidFill>
+                        <a:srgbClr val="DCD6C9"/>
+                      </a:solidFill>
+                      <a:prstDash val="solid"/>
+                      <a:round/>
+                      <a:headEnd type="none" w="med" len="med"/>
+                      <a:tailEnd type="none" w="med" len="med"/>
+                    </a:lnT>
+                    <a:lnB w="6350" cap="flat" cmpd="sng" algn="ctr">
+                      <a:solidFill>
+                        <a:srgbClr val="DCD6C9"/>
+                      </a:solidFill>
+                      <a:prstDash val="solid"/>
+                      <a:round/>
+                      <a:headEnd type="none" w="med" len="med"/>
+                      <a:tailEnd type="none" w="med" len="med"/>
+                    </a:lnB>
+                    <a:solidFill>
+                      <a:srgbClr val="F1EDE4"/>
+                    </a:solidFill>
+                  </a:tcPr>
+                </a:tc>
+              </a:tr>
+              <a:tr h="402336">
+                <a:tc>
+                  <a:txBody>
+                    <a:bodyPr/>
+                    <a:lstStyle/>
+                    <a:p>
+                      <a:pPr indent="0" marL="0">
+                        <a:buNone/>
+                      </a:pPr>
+                      <a:r>
+                        <a:rPr lang="en-US" sz="1050" dirty="0">
                           <a:solidFill>
                             <a:srgbClr val="1B2426"/>
                           </a:solidFill>
@@ -22895,7 +23490,7 @@
                         </a:rPr>
                         <a:t>입학비 — 입회 시 1회</a:t>
                       </a:r>
-                      <a:endParaRPr lang="en-US" sz="1150" dirty="0">
+                      <a:endParaRPr lang="en-US" sz="1050" dirty="0">
                         <a:latin typeface="맑은 고딕" charset="0"/>
                         <a:ea typeface="맑은 고딕" charset="0"/>
                         <a:cs typeface="맑은 고딕" charset="0"/>
@@ -22953,7 +23548,7 @@
                         <a:buNone/>
                       </a:pPr>
                       <a:r>
-                        <a:rPr lang="en-US" sz="1150" dirty="0">
+                        <a:rPr lang="en-US" sz="1050" dirty="0">
                           <a:solidFill>
                             <a:srgbClr val="1B2426"/>
                           </a:solidFill>
@@ -22963,7 +23558,7 @@
                         </a:rPr>
                         <a:t>500만</a:t>
                       </a:r>
-                      <a:endParaRPr lang="en-US" sz="1150" dirty="0">
+                      <a:endParaRPr lang="en-US" sz="1050" dirty="0">
                         <a:latin typeface="맑은 고딕" charset="0"/>
                         <a:ea typeface="맑은 고딕" charset="0"/>
                         <a:cs typeface="맑은 고딕" charset="0"/>
@@ -23021,7 +23616,7 @@
                         <a:buNone/>
                       </a:pPr>
                       <a:r>
-                        <a:rPr lang="en-US" sz="1150" dirty="0">
+                        <a:rPr lang="en-US" sz="1050" dirty="0">
                           <a:solidFill>
                             <a:srgbClr val="1B2426"/>
                           </a:solidFill>
@@ -23031,7 +23626,7 @@
                         </a:rPr>
                         <a:t>500만</a:t>
                       </a:r>
-                      <a:endParaRPr lang="en-US" sz="1150" dirty="0">
+                      <a:endParaRPr lang="en-US" sz="1050" dirty="0">
                         <a:latin typeface="맑은 고딕" charset="0"/>
                         <a:ea typeface="맑은 고딕" charset="0"/>
                         <a:cs typeface="맑은 고딕" charset="0"/>
@@ -23089,7 +23684,7 @@
                         <a:buNone/>
                       </a:pPr>
                       <a:r>
-                        <a:rPr lang="en-US" sz="1150" dirty="0">
+                        <a:rPr lang="en-US" sz="1050" dirty="0">
                           <a:solidFill>
                             <a:srgbClr val="1B2426"/>
                           </a:solidFill>
@@ -23099,7 +23694,7 @@
                         </a:rPr>
                         <a:t>500만</a:t>
                       </a:r>
-                      <a:endParaRPr lang="en-US" sz="1150" dirty="0">
+                      <a:endParaRPr lang="en-US" sz="1050" dirty="0">
                         <a:latin typeface="맑은 고딕" charset="0"/>
                         <a:ea typeface="맑은 고딕" charset="0"/>
                         <a:cs typeface="맑은 고딕" charset="0"/>
@@ -23157,7 +23752,7 @@
                         <a:buNone/>
                       </a:pPr>
                       <a:r>
-                        <a:rPr lang="en-US" sz="1150" dirty="0">
+                        <a:rPr lang="en-US" sz="1050" dirty="0">
                           <a:solidFill>
                             <a:srgbClr val="1B2426"/>
                           </a:solidFill>
@@ -23167,7 +23762,7 @@
                         </a:rPr>
                         <a:t>500만</a:t>
                       </a:r>
-                      <a:endParaRPr lang="en-US" sz="1150" dirty="0">
+                      <a:endParaRPr lang="en-US" sz="1050" dirty="0">
                         <a:latin typeface="맑은 고딕" charset="0"/>
                         <a:ea typeface="맑은 고딕" charset="0"/>
                         <a:cs typeface="맑은 고딕" charset="0"/>
@@ -23216,8 +23811,6 @@
                     </a:solidFill>
                   </a:tcPr>
                 </a:tc>
-              </a:tr>
-              <a:tr h="438912">
                 <a:tc>
                   <a:txBody>
                     <a:bodyPr/>
@@ -23227,7 +23820,7 @@
                         <a:buNone/>
                       </a:pPr>
                       <a:r>
-                        <a:rPr lang="en-US" sz="1150" dirty="0">
+                        <a:rPr lang="en-US" sz="1050" dirty="0">
                           <a:solidFill>
                             <a:srgbClr val="1B2426"/>
                           </a:solidFill>
@@ -23235,9 +23828,79 @@
                           <a:ea typeface="맑은 고딕" pitchFamily="34" charset="-122"/>
                           <a:cs typeface="맑은 고딕" pitchFamily="34" charset="-120"/>
                         </a:rPr>
-                        <a:t>1년차 소계</a:t>
+                        <a:t>500만</a:t>
                       </a:r>
-                      <a:endParaRPr lang="en-US" sz="1150" dirty="0">
+                      <a:endParaRPr lang="en-US" sz="1050" dirty="0">
+                        <a:latin typeface="맑은 고딕" charset="0"/>
+                        <a:ea typeface="맑은 고딕" charset="0"/>
+                        <a:cs typeface="맑은 고딕" charset="0"/>
+                      </a:endParaRPr>
+                    </a:p>
+                  </a:txBody>
+                  <a:tcPr marL="88900" marR="88900" marT="50800" marB="50800" anchor="ctr">
+                    <a:lnL w="6350" cap="flat" cmpd="sng" algn="ctr">
+                      <a:solidFill>
+                        <a:srgbClr val="DCD6C9"/>
+                      </a:solidFill>
+                      <a:prstDash val="solid"/>
+                      <a:round/>
+                      <a:headEnd type="none" w="med" len="med"/>
+                      <a:tailEnd type="none" w="med" len="med"/>
+                    </a:lnL>
+                    <a:lnR w="6350" cap="flat" cmpd="sng" algn="ctr">
+                      <a:solidFill>
+                        <a:srgbClr val="DCD6C9"/>
+                      </a:solidFill>
+                      <a:prstDash val="solid"/>
+                      <a:round/>
+                      <a:headEnd type="none" w="med" len="med"/>
+                      <a:tailEnd type="none" w="med" len="med"/>
+                    </a:lnR>
+                    <a:lnT w="6350" cap="flat" cmpd="sng" algn="ctr">
+                      <a:solidFill>
+                        <a:srgbClr val="DCD6C9"/>
+                      </a:solidFill>
+                      <a:prstDash val="solid"/>
+                      <a:round/>
+                      <a:headEnd type="none" w="med" len="med"/>
+                      <a:tailEnd type="none" w="med" len="med"/>
+                    </a:lnT>
+                    <a:lnB w="6350" cap="flat" cmpd="sng" algn="ctr">
+                      <a:solidFill>
+                        <a:srgbClr val="DCD6C9"/>
+                      </a:solidFill>
+                      <a:prstDash val="solid"/>
+                      <a:round/>
+                      <a:headEnd type="none" w="med" len="med"/>
+                      <a:tailEnd type="none" w="med" len="med"/>
+                    </a:lnB>
+                    <a:solidFill>
+                      <a:srgbClr val="FFFFFF"/>
+                    </a:solidFill>
+                  </a:tcPr>
+                </a:tc>
+              </a:tr>
+              <a:tr h="402336">
+                <a:tc>
+                  <a:txBody>
+                    <a:bodyPr/>
+                    <a:lstStyle/>
+                    <a:p>
+                      <a:pPr indent="0" marL="0">
+                        <a:buNone/>
+                      </a:pPr>
+                      <a:r>
+                        <a:rPr lang="en-US" sz="1050" dirty="0">
+                          <a:solidFill>
+                            <a:srgbClr val="1B2426"/>
+                          </a:solidFill>
+                          <a:latin typeface="맑은 고딕" pitchFamily="34" charset="0"/>
+                          <a:ea typeface="맑은 고딕" pitchFamily="34" charset="-122"/>
+                          <a:cs typeface="맑은 고딕" pitchFamily="34" charset="-120"/>
+                        </a:rPr>
+                        <a:t>1년차 소계 (입학비 제외)</a:t>
+                      </a:r>
+                      <a:endParaRPr lang="en-US" sz="1050" dirty="0">
                         <a:latin typeface="맑은 고딕" charset="0"/>
                         <a:ea typeface="맑은 고딕" charset="0"/>
                         <a:cs typeface="맑은 고딕" charset="0"/>
@@ -23295,7 +23958,7 @@
                         <a:buNone/>
                       </a:pPr>
                       <a:r>
-                        <a:rPr lang="en-US" sz="1150" dirty="0">
+                        <a:rPr lang="en-US" sz="1050" dirty="0">
                           <a:solidFill>
                             <a:srgbClr val="1B2426"/>
                           </a:solidFill>
@@ -23303,9 +23966,9 @@
                           <a:ea typeface="맑은 고딕" pitchFamily="34" charset="-122"/>
                           <a:cs typeface="맑은 고딕" pitchFamily="34" charset="-120"/>
                         </a:rPr>
-                        <a:t>약 2,880만</a:t>
+                        <a:t>약 2,380만</a:t>
                       </a:r>
-                      <a:endParaRPr lang="en-US" sz="1150" dirty="0">
+                      <a:endParaRPr lang="en-US" sz="1050" dirty="0">
                         <a:latin typeface="맑은 고딕" charset="0"/>
                         <a:ea typeface="맑은 고딕" charset="0"/>
                         <a:cs typeface="맑은 고딕" charset="0"/>
@@ -23363,7 +24026,7 @@
                         <a:buNone/>
                       </a:pPr>
                       <a:r>
-                        <a:rPr lang="en-US" sz="1150" dirty="0">
+                        <a:rPr lang="en-US" sz="1050" dirty="0">
                           <a:solidFill>
                             <a:srgbClr val="1B2426"/>
                           </a:solidFill>
@@ -23371,9 +24034,9 @@
                           <a:ea typeface="맑은 고딕" pitchFamily="34" charset="-122"/>
                           <a:cs typeface="맑은 고딕" pitchFamily="34" charset="-120"/>
                         </a:rPr>
-                        <a:t>약 3,756만</a:t>
+                        <a:t>약 3,256만</a:t>
                       </a:r>
-                      <a:endParaRPr lang="en-US" sz="1150" dirty="0">
+                      <a:endParaRPr lang="en-US" sz="1050" dirty="0">
                         <a:latin typeface="맑은 고딕" charset="0"/>
                         <a:ea typeface="맑은 고딕" charset="0"/>
                         <a:cs typeface="맑은 고딕" charset="0"/>
@@ -23431,7 +24094,7 @@
                         <a:buNone/>
                       </a:pPr>
                       <a:r>
-                        <a:rPr lang="en-US" sz="1150" dirty="0">
+                        <a:rPr lang="en-US" sz="1050" dirty="0">
                           <a:solidFill>
                             <a:srgbClr val="1B2426"/>
                           </a:solidFill>
@@ -23439,9 +24102,9 @@
                           <a:ea typeface="맑은 고딕" pitchFamily="34" charset="-122"/>
                           <a:cs typeface="맑은 고딕" pitchFamily="34" charset="-120"/>
                         </a:rPr>
-                        <a:t>약 3,368만</a:t>
+                        <a:t>약 2,868만</a:t>
                       </a:r>
-                      <a:endParaRPr lang="en-US" sz="1150" dirty="0">
+                      <a:endParaRPr lang="en-US" sz="1050" dirty="0">
                         <a:latin typeface="맑은 고딕" charset="0"/>
                         <a:ea typeface="맑은 고딕" charset="0"/>
                         <a:cs typeface="맑은 고딕" charset="0"/>
@@ -23499,7 +24162,7 @@
                         <a:buNone/>
                       </a:pPr>
                       <a:r>
-                        <a:rPr lang="en-US" sz="1150" dirty="0">
+                        <a:rPr lang="en-US" sz="1050" dirty="0">
                           <a:solidFill>
                             <a:srgbClr val="1B2426"/>
                           </a:solidFill>
@@ -23507,9 +24170,9 @@
                           <a:ea typeface="맑은 고딕" pitchFamily="34" charset="-122"/>
                           <a:cs typeface="맑은 고딕" pitchFamily="34" charset="-120"/>
                         </a:rPr>
-                        <a:t>약 2,880만</a:t>
+                        <a:t>약 2,380만</a:t>
                       </a:r>
-                      <a:endParaRPr lang="en-US" sz="1150" dirty="0">
+                      <a:endParaRPr lang="en-US" sz="1050" dirty="0">
                         <a:latin typeface="맑은 고딕" charset="0"/>
                         <a:ea typeface="맑은 고딕" charset="0"/>
                         <a:cs typeface="맑은 고딕" charset="0"/>
@@ -23558,8 +24221,6 @@
                     </a:solidFill>
                   </a:tcPr>
                 </a:tc>
-              </a:tr>
-              <a:tr h="438912">
                 <a:tc>
                   <a:txBody>
                     <a:bodyPr/>
@@ -23569,7 +24230,7 @@
                         <a:buNone/>
                       </a:pPr>
                       <a:r>
-                        <a:rPr lang="en-US" sz="1150" dirty="0">
+                        <a:rPr lang="en-US" sz="1050" dirty="0">
                           <a:solidFill>
                             <a:srgbClr val="1B2426"/>
                           </a:solidFill>
@@ -23577,9 +24238,79 @@
                           <a:ea typeface="맑은 고딕" pitchFamily="34" charset="-122"/>
                           <a:cs typeface="맑은 고딕" pitchFamily="34" charset="-120"/>
                         </a:rPr>
-                        <a:t>2년차 이후 (연)</a:t>
+                        <a:t>약 2,868만</a:t>
                       </a:r>
-                      <a:endParaRPr lang="en-US" sz="1150" dirty="0">
+                      <a:endParaRPr lang="en-US" sz="1050" dirty="0">
+                        <a:latin typeface="맑은 고딕" charset="0"/>
+                        <a:ea typeface="맑은 고딕" charset="0"/>
+                        <a:cs typeface="맑은 고딕" charset="0"/>
+                      </a:endParaRPr>
+                    </a:p>
+                  </a:txBody>
+                  <a:tcPr marL="88900" marR="88900" marT="50800" marB="50800" anchor="ctr">
+                    <a:lnL w="6350" cap="flat" cmpd="sng" algn="ctr">
+                      <a:solidFill>
+                        <a:srgbClr val="DCD6C9"/>
+                      </a:solidFill>
+                      <a:prstDash val="solid"/>
+                      <a:round/>
+                      <a:headEnd type="none" w="med" len="med"/>
+                      <a:tailEnd type="none" w="med" len="med"/>
+                    </a:lnL>
+                    <a:lnR w="6350" cap="flat" cmpd="sng" algn="ctr">
+                      <a:solidFill>
+                        <a:srgbClr val="DCD6C9"/>
+                      </a:solidFill>
+                      <a:prstDash val="solid"/>
+                      <a:round/>
+                      <a:headEnd type="none" w="med" len="med"/>
+                      <a:tailEnd type="none" w="med" len="med"/>
+                    </a:lnR>
+                    <a:lnT w="6350" cap="flat" cmpd="sng" algn="ctr">
+                      <a:solidFill>
+                        <a:srgbClr val="DCD6C9"/>
+                      </a:solidFill>
+                      <a:prstDash val="solid"/>
+                      <a:round/>
+                      <a:headEnd type="none" w="med" len="med"/>
+                      <a:tailEnd type="none" w="med" len="med"/>
+                    </a:lnT>
+                    <a:lnB w="6350" cap="flat" cmpd="sng" algn="ctr">
+                      <a:solidFill>
+                        <a:srgbClr val="DCD6C9"/>
+                      </a:solidFill>
+                      <a:prstDash val="solid"/>
+                      <a:round/>
+                      <a:headEnd type="none" w="med" len="med"/>
+                      <a:tailEnd type="none" w="med" len="med"/>
+                    </a:lnB>
+                    <a:solidFill>
+                      <a:srgbClr val="F1EDE4"/>
+                    </a:solidFill>
+                  </a:tcPr>
+                </a:tc>
+              </a:tr>
+              <a:tr h="402336">
+                <a:tc>
+                  <a:txBody>
+                    <a:bodyPr/>
+                    <a:lstStyle/>
+                    <a:p>
+                      <a:pPr indent="0" marL="0">
+                        <a:buNone/>
+                      </a:pPr>
+                      <a:r>
+                        <a:rPr lang="en-US" sz="1050" dirty="0">
+                          <a:solidFill>
+                            <a:srgbClr val="1B2426"/>
+                          </a:solidFill>
+                          <a:latin typeface="맑은 고딕" pitchFamily="34" charset="0"/>
+                          <a:ea typeface="맑은 고딕" pitchFamily="34" charset="-122"/>
+                          <a:cs typeface="맑은 고딕" pitchFamily="34" charset="-120"/>
+                        </a:rPr>
+                        <a:t>1년차 소계 (입학비 포함)</a:t>
+                      </a:r>
+                      <a:endParaRPr lang="en-US" sz="1050" dirty="0">
                         <a:latin typeface="맑은 고딕" charset="0"/>
                         <a:ea typeface="맑은 고딕" charset="0"/>
                         <a:cs typeface="맑은 고딕" charset="0"/>
@@ -23637,7 +24368,7 @@
                         <a:buNone/>
                       </a:pPr>
                       <a:r>
-                        <a:rPr lang="en-US" sz="1150" dirty="0">
+                        <a:rPr lang="en-US" sz="1050" dirty="0">
                           <a:solidFill>
                             <a:srgbClr val="1B2426"/>
                           </a:solidFill>
@@ -23645,9 +24376,9 @@
                           <a:ea typeface="맑은 고딕" pitchFamily="34" charset="-122"/>
                           <a:cs typeface="맑은 고딕" pitchFamily="34" charset="-120"/>
                         </a:rPr>
-                        <a:t>2,490만~2,870만</a:t>
+                        <a:t>약 2,880만</a:t>
                       </a:r>
-                      <a:endParaRPr lang="en-US" sz="1150" dirty="0">
+                      <a:endParaRPr lang="en-US" sz="1050" dirty="0">
                         <a:latin typeface="맑은 고딕" charset="0"/>
                         <a:ea typeface="맑은 고딕" charset="0"/>
                         <a:cs typeface="맑은 고딕" charset="0"/>
@@ -23705,7 +24436,7 @@
                         <a:buNone/>
                       </a:pPr>
                       <a:r>
-                        <a:rPr lang="en-US" sz="1150" dirty="0">
+                        <a:rPr lang="en-US" sz="1050" dirty="0">
                           <a:solidFill>
                             <a:srgbClr val="1B2426"/>
                           </a:solidFill>
@@ -23713,9 +24444,9 @@
                           <a:ea typeface="맑은 고딕" pitchFamily="34" charset="-122"/>
                           <a:cs typeface="맑은 고딕" pitchFamily="34" charset="-120"/>
                         </a:rPr>
-                        <a:t>약 3,321만</a:t>
+                        <a:t>약 3,756만</a:t>
                       </a:r>
-                      <a:endParaRPr lang="en-US" sz="1150" dirty="0">
+                      <a:endParaRPr lang="en-US" sz="1050" dirty="0">
                         <a:latin typeface="맑은 고딕" charset="0"/>
                         <a:ea typeface="맑은 고딕" charset="0"/>
                         <a:cs typeface="맑은 고딕" charset="0"/>
@@ -23773,7 +24504,7 @@
                         <a:buNone/>
                       </a:pPr>
                       <a:r>
-                        <a:rPr lang="en-US" sz="1150" dirty="0">
+                        <a:rPr lang="en-US" sz="1050" dirty="0">
                           <a:solidFill>
                             <a:srgbClr val="1B2426"/>
                           </a:solidFill>
@@ -23781,9 +24512,9 @@
                           <a:ea typeface="맑은 고딕" pitchFamily="34" charset="-122"/>
                           <a:cs typeface="맑은 고딕" pitchFamily="34" charset="-120"/>
                         </a:rPr>
-                        <a:t>약 3,343만</a:t>
+                        <a:t>약 3,368만</a:t>
                       </a:r>
-                      <a:endParaRPr lang="en-US" sz="1150" dirty="0">
+                      <a:endParaRPr lang="en-US" sz="1050" dirty="0">
                         <a:latin typeface="맑은 고딕" charset="0"/>
                         <a:ea typeface="맑은 고딕" charset="0"/>
                         <a:cs typeface="맑은 고딕" charset="0"/>
@@ -23841,7 +24572,7 @@
                         <a:buNone/>
                       </a:pPr>
                       <a:r>
-                        <a:rPr lang="en-US" sz="1150" dirty="0">
+                        <a:rPr lang="en-US" sz="1050" dirty="0">
                           <a:solidFill>
                             <a:srgbClr val="1B2426"/>
                           </a:solidFill>
@@ -23849,9 +24580,9 @@
                           <a:ea typeface="맑은 고딕" pitchFamily="34" charset="-122"/>
                           <a:cs typeface="맑은 고딕" pitchFamily="34" charset="-120"/>
                         </a:rPr>
-                        <a:t>약 3,891만</a:t>
+                        <a:t>약 2,880만</a:t>
                       </a:r>
-                      <a:endParaRPr lang="en-US" sz="1150" dirty="0">
+                      <a:endParaRPr lang="en-US" sz="1050" dirty="0">
                         <a:latin typeface="맑은 고딕" charset="0"/>
                         <a:ea typeface="맑은 고딕" charset="0"/>
                         <a:cs typeface="맑은 고딕" charset="0"/>
@@ -23900,8 +24631,6 @@
                     </a:solidFill>
                   </a:tcPr>
                 </a:tc>
-              </a:tr>
-              <a:tr h="438912">
                 <a:tc>
                   <a:txBody>
                     <a:bodyPr/>
@@ -23911,7 +24640,7 @@
                         <a:buNone/>
                       </a:pPr>
                       <a:r>
-                        <a:rPr lang="en-US" sz="1150" dirty="0">
+                        <a:rPr lang="en-US" sz="1050" dirty="0">
                           <a:solidFill>
                             <a:srgbClr val="1B2426"/>
                           </a:solidFill>
@@ -23919,9 +24648,79 @@
                           <a:ea typeface="맑은 고딕" pitchFamily="34" charset="-122"/>
                           <a:cs typeface="맑은 고딕" pitchFamily="34" charset="-120"/>
                         </a:rPr>
-                        <a:t>졸업까지 총액</a:t>
+                        <a:t>약 3,368만</a:t>
                       </a:r>
-                      <a:endParaRPr lang="en-US" sz="1150" dirty="0">
+                      <a:endParaRPr lang="en-US" sz="1050" dirty="0">
+                        <a:latin typeface="맑은 고딕" charset="0"/>
+                        <a:ea typeface="맑은 고딕" charset="0"/>
+                        <a:cs typeface="맑은 고딕" charset="0"/>
+                      </a:endParaRPr>
+                    </a:p>
+                  </a:txBody>
+                  <a:tcPr marL="88900" marR="88900" marT="50800" marB="50800" anchor="ctr">
+                    <a:lnL w="6350" cap="flat" cmpd="sng" algn="ctr">
+                      <a:solidFill>
+                        <a:srgbClr val="DCD6C9"/>
+                      </a:solidFill>
+                      <a:prstDash val="solid"/>
+                      <a:round/>
+                      <a:headEnd type="none" w="med" len="med"/>
+                      <a:tailEnd type="none" w="med" len="med"/>
+                    </a:lnL>
+                    <a:lnR w="6350" cap="flat" cmpd="sng" algn="ctr">
+                      <a:solidFill>
+                        <a:srgbClr val="DCD6C9"/>
+                      </a:solidFill>
+                      <a:prstDash val="solid"/>
+                      <a:round/>
+                      <a:headEnd type="none" w="med" len="med"/>
+                      <a:tailEnd type="none" w="med" len="med"/>
+                    </a:lnR>
+                    <a:lnT w="6350" cap="flat" cmpd="sng" algn="ctr">
+                      <a:solidFill>
+                        <a:srgbClr val="DCD6C9"/>
+                      </a:solidFill>
+                      <a:prstDash val="solid"/>
+                      <a:round/>
+                      <a:headEnd type="none" w="med" len="med"/>
+                      <a:tailEnd type="none" w="med" len="med"/>
+                    </a:lnT>
+                    <a:lnB w="6350" cap="flat" cmpd="sng" algn="ctr">
+                      <a:solidFill>
+                        <a:srgbClr val="DCD6C9"/>
+                      </a:solidFill>
+                      <a:prstDash val="solid"/>
+                      <a:round/>
+                      <a:headEnd type="none" w="med" len="med"/>
+                      <a:tailEnd type="none" w="med" len="med"/>
+                    </a:lnB>
+                    <a:solidFill>
+                      <a:srgbClr val="FFFFFF"/>
+                    </a:solidFill>
+                  </a:tcPr>
+                </a:tc>
+              </a:tr>
+              <a:tr h="402336">
+                <a:tc>
+                  <a:txBody>
+                    <a:bodyPr/>
+                    <a:lstStyle/>
+                    <a:p>
+                      <a:pPr indent="0" marL="0">
+                        <a:buNone/>
+                      </a:pPr>
+                      <a:r>
+                        <a:rPr lang="en-US" sz="1050" dirty="0">
+                          <a:solidFill>
+                            <a:srgbClr val="1B2426"/>
+                          </a:solidFill>
+                          <a:latin typeface="맑은 고딕" pitchFamily="34" charset="0"/>
+                          <a:ea typeface="맑은 고딕" pitchFamily="34" charset="-122"/>
+                          <a:cs typeface="맑은 고딕" pitchFamily="34" charset="-120"/>
+                        </a:rPr>
+                        <a:t>2년차 이후 (연)</a:t>
+                      </a:r>
+                      <a:endParaRPr lang="en-US" sz="1050" dirty="0">
                         <a:latin typeface="맑은 고딕" charset="0"/>
                         <a:ea typeface="맑은 고딕" charset="0"/>
                         <a:cs typeface="맑은 고딕" charset="0"/>
@@ -23979,7 +24778,7 @@
                         <a:buNone/>
                       </a:pPr>
                       <a:r>
-                        <a:rPr lang="en-US" sz="1150" dirty="0">
+                        <a:rPr lang="en-US" sz="1050" dirty="0">
                           <a:solidFill>
                             <a:srgbClr val="1B2426"/>
                           </a:solidFill>
@@ -23987,9 +24786,9 @@
                           <a:ea typeface="맑은 고딕" pitchFamily="34" charset="-122"/>
                           <a:cs typeface="맑은 고딕" pitchFamily="34" charset="-120"/>
                         </a:rPr>
-                        <a:t>약 1억 350만~1억 1,490만</a:t>
+                        <a:t>2,490만~2,870만</a:t>
                       </a:r>
-                      <a:endParaRPr lang="en-US" sz="1150" dirty="0">
+                      <a:endParaRPr lang="en-US" sz="1050" dirty="0">
                         <a:latin typeface="맑은 고딕" charset="0"/>
                         <a:ea typeface="맑은 고딕" charset="0"/>
                         <a:cs typeface="맑은 고딕" charset="0"/>
@@ -24047,7 +24846,7 @@
                         <a:buNone/>
                       </a:pPr>
                       <a:r>
-                        <a:rPr lang="en-US" sz="1150" dirty="0">
+                        <a:rPr lang="en-US" sz="1050" dirty="0">
                           <a:solidFill>
                             <a:srgbClr val="1B2426"/>
                           </a:solidFill>
@@ -24055,9 +24854,9 @@
                           <a:ea typeface="맑은 고딕" pitchFamily="34" charset="-122"/>
                           <a:cs typeface="맑은 고딕" pitchFamily="34" charset="-120"/>
                         </a:rPr>
-                        <a:t>약 1억 398만</a:t>
+                        <a:t>약 3,321만</a:t>
                       </a:r>
-                      <a:endParaRPr lang="en-US" sz="1150" dirty="0">
+                      <a:endParaRPr lang="en-US" sz="1050" dirty="0">
                         <a:latin typeface="맑은 고딕" charset="0"/>
                         <a:ea typeface="맑은 고딕" charset="0"/>
                         <a:cs typeface="맑은 고딕" charset="0"/>
@@ -24115,7 +24914,7 @@
                         <a:buNone/>
                       </a:pPr>
                       <a:r>
-                        <a:rPr lang="en-US" sz="1150" dirty="0">
+                        <a:rPr lang="en-US" sz="1050" dirty="0">
                           <a:solidFill>
                             <a:srgbClr val="1B2426"/>
                           </a:solidFill>
@@ -24123,9 +24922,9 @@
                           <a:ea typeface="맑은 고딕" pitchFamily="34" charset="-122"/>
                           <a:cs typeface="맑은 고딕" pitchFamily="34" charset="-120"/>
                         </a:rPr>
-                        <a:t>약 1억 3,397만</a:t>
+                        <a:t>약 3,445만</a:t>
                       </a:r>
-                      <a:endParaRPr lang="en-US" sz="1150" dirty="0">
+                      <a:endParaRPr lang="en-US" sz="1050" dirty="0">
                         <a:latin typeface="맑은 고딕" charset="0"/>
                         <a:ea typeface="맑은 고딕" charset="0"/>
                         <a:cs typeface="맑은 고딕" charset="0"/>
@@ -24183,7 +24982,417 @@
                         <a:buNone/>
                       </a:pPr>
                       <a:r>
-                        <a:rPr lang="en-US" sz="1150" dirty="0">
+                        <a:rPr lang="en-US" sz="1050" dirty="0">
+                          <a:solidFill>
+                            <a:srgbClr val="1B2426"/>
+                          </a:solidFill>
+                          <a:latin typeface="맑은 고딕" pitchFamily="34" charset="0"/>
+                          <a:ea typeface="맑은 고딕" pitchFamily="34" charset="-122"/>
+                          <a:cs typeface="맑은 고딕" pitchFamily="34" charset="-120"/>
+                        </a:rPr>
+                        <a:t>약 3,891만</a:t>
+                      </a:r>
+                      <a:endParaRPr lang="en-US" sz="1050" dirty="0">
+                        <a:latin typeface="맑은 고딕" charset="0"/>
+                        <a:ea typeface="맑은 고딕" charset="0"/>
+                        <a:cs typeface="맑은 고딕" charset="0"/>
+                      </a:endParaRPr>
+                    </a:p>
+                  </a:txBody>
+                  <a:tcPr marL="88900" marR="88900" marT="50800" marB="50800" anchor="ctr">
+                    <a:lnL w="6350" cap="flat" cmpd="sng" algn="ctr">
+                      <a:solidFill>
+                        <a:srgbClr val="DCD6C9"/>
+                      </a:solidFill>
+                      <a:prstDash val="solid"/>
+                      <a:round/>
+                      <a:headEnd type="none" w="med" len="med"/>
+                      <a:tailEnd type="none" w="med" len="med"/>
+                    </a:lnL>
+                    <a:lnR w="6350" cap="flat" cmpd="sng" algn="ctr">
+                      <a:solidFill>
+                        <a:srgbClr val="DCD6C9"/>
+                      </a:solidFill>
+                      <a:prstDash val="solid"/>
+                      <a:round/>
+                      <a:headEnd type="none" w="med" len="med"/>
+                      <a:tailEnd type="none" w="med" len="med"/>
+                    </a:lnR>
+                    <a:lnT w="6350" cap="flat" cmpd="sng" algn="ctr">
+                      <a:solidFill>
+                        <a:srgbClr val="DCD6C9"/>
+                      </a:solidFill>
+                      <a:prstDash val="solid"/>
+                      <a:round/>
+                      <a:headEnd type="none" w="med" len="med"/>
+                      <a:tailEnd type="none" w="med" len="med"/>
+                    </a:lnT>
+                    <a:lnB w="6350" cap="flat" cmpd="sng" algn="ctr">
+                      <a:solidFill>
+                        <a:srgbClr val="DCD6C9"/>
+                      </a:solidFill>
+                      <a:prstDash val="solid"/>
+                      <a:round/>
+                      <a:headEnd type="none" w="med" len="med"/>
+                      <a:tailEnd type="none" w="med" len="med"/>
+                    </a:lnB>
+                    <a:solidFill>
+                      <a:srgbClr val="F1EDE4"/>
+                    </a:solidFill>
+                  </a:tcPr>
+                </a:tc>
+                <a:tc>
+                  <a:txBody>
+                    <a:bodyPr/>
+                    <a:lstStyle/>
+                    <a:p>
+                      <a:pPr indent="0" marL="0">
+                        <a:buNone/>
+                      </a:pPr>
+                      <a:r>
+                        <a:rPr lang="en-US" sz="1050" dirty="0">
+                          <a:solidFill>
+                            <a:srgbClr val="1B2426"/>
+                          </a:solidFill>
+                          <a:latin typeface="맑은 고딕" pitchFamily="34" charset="0"/>
+                          <a:ea typeface="맑은 고딕" pitchFamily="34" charset="-122"/>
+                          <a:cs typeface="맑은 고딕" pitchFamily="34" charset="-120"/>
+                        </a:rPr>
+                        <a:t>약 3,851만</a:t>
+                      </a:r>
+                      <a:endParaRPr lang="en-US" sz="1050" dirty="0">
+                        <a:latin typeface="맑은 고딕" charset="0"/>
+                        <a:ea typeface="맑은 고딕" charset="0"/>
+                        <a:cs typeface="맑은 고딕" charset="0"/>
+                      </a:endParaRPr>
+                    </a:p>
+                  </a:txBody>
+                  <a:tcPr marL="88900" marR="88900" marT="50800" marB="50800" anchor="ctr">
+                    <a:lnL w="6350" cap="flat" cmpd="sng" algn="ctr">
+                      <a:solidFill>
+                        <a:srgbClr val="DCD6C9"/>
+                      </a:solidFill>
+                      <a:prstDash val="solid"/>
+                      <a:round/>
+                      <a:headEnd type="none" w="med" len="med"/>
+                      <a:tailEnd type="none" w="med" len="med"/>
+                    </a:lnL>
+                    <a:lnR w="6350" cap="flat" cmpd="sng" algn="ctr">
+                      <a:solidFill>
+                        <a:srgbClr val="DCD6C9"/>
+                      </a:solidFill>
+                      <a:prstDash val="solid"/>
+                      <a:round/>
+                      <a:headEnd type="none" w="med" len="med"/>
+                      <a:tailEnd type="none" w="med" len="med"/>
+                    </a:lnR>
+                    <a:lnT w="6350" cap="flat" cmpd="sng" algn="ctr">
+                      <a:solidFill>
+                        <a:srgbClr val="DCD6C9"/>
+                      </a:solidFill>
+                      <a:prstDash val="solid"/>
+                      <a:round/>
+                      <a:headEnd type="none" w="med" len="med"/>
+                      <a:tailEnd type="none" w="med" len="med"/>
+                    </a:lnT>
+                    <a:lnB w="6350" cap="flat" cmpd="sng" algn="ctr">
+                      <a:solidFill>
+                        <a:srgbClr val="DCD6C9"/>
+                      </a:solidFill>
+                      <a:prstDash val="solid"/>
+                      <a:round/>
+                      <a:headEnd type="none" w="med" len="med"/>
+                      <a:tailEnd type="none" w="med" len="med"/>
+                    </a:lnB>
+                    <a:solidFill>
+                      <a:srgbClr val="F1EDE4"/>
+                    </a:solidFill>
+                  </a:tcPr>
+                </a:tc>
+              </a:tr>
+              <a:tr h="402336">
+                <a:tc>
+                  <a:txBody>
+                    <a:bodyPr/>
+                    <a:lstStyle/>
+                    <a:p>
+                      <a:pPr indent="0" marL="0">
+                        <a:buNone/>
+                      </a:pPr>
+                      <a:r>
+                        <a:rPr lang="en-US" sz="1050" dirty="0">
+                          <a:solidFill>
+                            <a:srgbClr val="1B2426"/>
+                          </a:solidFill>
+                          <a:latin typeface="맑은 고딕" pitchFamily="34" charset="0"/>
+                          <a:ea typeface="맑은 고딕" pitchFamily="34" charset="-122"/>
+                          <a:cs typeface="맑은 고딕" pitchFamily="34" charset="-120"/>
+                        </a:rPr>
+                        <a:t>졸업까지 총액</a:t>
+                      </a:r>
+                      <a:endParaRPr lang="en-US" sz="1050" dirty="0">
+                        <a:latin typeface="맑은 고딕" charset="0"/>
+                        <a:ea typeface="맑은 고딕" charset="0"/>
+                        <a:cs typeface="맑은 고딕" charset="0"/>
+                      </a:endParaRPr>
+                    </a:p>
+                  </a:txBody>
+                  <a:tcPr marL="88900" marR="88900" marT="50800" marB="50800" anchor="ctr">
+                    <a:lnL w="6350" cap="flat" cmpd="sng" algn="ctr">
+                      <a:solidFill>
+                        <a:srgbClr val="DCD6C9"/>
+                      </a:solidFill>
+                      <a:prstDash val="solid"/>
+                      <a:round/>
+                      <a:headEnd type="none" w="med" len="med"/>
+                      <a:tailEnd type="none" w="med" len="med"/>
+                    </a:lnL>
+                    <a:lnR w="6350" cap="flat" cmpd="sng" algn="ctr">
+                      <a:solidFill>
+                        <a:srgbClr val="DCD6C9"/>
+                      </a:solidFill>
+                      <a:prstDash val="solid"/>
+                      <a:round/>
+                      <a:headEnd type="none" w="med" len="med"/>
+                      <a:tailEnd type="none" w="med" len="med"/>
+                    </a:lnR>
+                    <a:lnT w="6350" cap="flat" cmpd="sng" algn="ctr">
+                      <a:solidFill>
+                        <a:srgbClr val="DCD6C9"/>
+                      </a:solidFill>
+                      <a:prstDash val="solid"/>
+                      <a:round/>
+                      <a:headEnd type="none" w="med" len="med"/>
+                      <a:tailEnd type="none" w="med" len="med"/>
+                    </a:lnT>
+                    <a:lnB w="6350" cap="flat" cmpd="sng" algn="ctr">
+                      <a:solidFill>
+                        <a:srgbClr val="DCD6C9"/>
+                      </a:solidFill>
+                      <a:prstDash val="solid"/>
+                      <a:round/>
+                      <a:headEnd type="none" w="med" len="med"/>
+                      <a:tailEnd type="none" w="med" len="med"/>
+                    </a:lnB>
+                    <a:solidFill>
+                      <a:srgbClr val="FFFFFF"/>
+                    </a:solidFill>
+                  </a:tcPr>
+                </a:tc>
+                <a:tc>
+                  <a:txBody>
+                    <a:bodyPr/>
+                    <a:lstStyle/>
+                    <a:p>
+                      <a:pPr indent="0" marL="0">
+                        <a:buNone/>
+                      </a:pPr>
+                      <a:r>
+                        <a:rPr lang="en-US" sz="1050" dirty="0">
+                          <a:solidFill>
+                            <a:srgbClr val="1B2426"/>
+                          </a:solidFill>
+                          <a:latin typeface="맑은 고딕" pitchFamily="34" charset="0"/>
+                          <a:ea typeface="맑은 고딕" pitchFamily="34" charset="-122"/>
+                          <a:cs typeface="맑은 고딕" pitchFamily="34" charset="-120"/>
+                        </a:rPr>
+                        <a:t>1억 350만~1억 1,490만</a:t>
+                      </a:r>
+                      <a:endParaRPr lang="en-US" sz="1050" dirty="0">
+                        <a:latin typeface="맑은 고딕" charset="0"/>
+                        <a:ea typeface="맑은 고딕" charset="0"/>
+                        <a:cs typeface="맑은 고딕" charset="0"/>
+                      </a:endParaRPr>
+                    </a:p>
+                  </a:txBody>
+                  <a:tcPr marL="88900" marR="88900" marT="50800" marB="50800" anchor="ctr">
+                    <a:lnL w="6350" cap="flat" cmpd="sng" algn="ctr">
+                      <a:solidFill>
+                        <a:srgbClr val="DCD6C9"/>
+                      </a:solidFill>
+                      <a:prstDash val="solid"/>
+                      <a:round/>
+                      <a:headEnd type="none" w="med" len="med"/>
+                      <a:tailEnd type="none" w="med" len="med"/>
+                    </a:lnL>
+                    <a:lnR w="6350" cap="flat" cmpd="sng" algn="ctr">
+                      <a:solidFill>
+                        <a:srgbClr val="DCD6C9"/>
+                      </a:solidFill>
+                      <a:prstDash val="solid"/>
+                      <a:round/>
+                      <a:headEnd type="none" w="med" len="med"/>
+                      <a:tailEnd type="none" w="med" len="med"/>
+                    </a:lnR>
+                    <a:lnT w="6350" cap="flat" cmpd="sng" algn="ctr">
+                      <a:solidFill>
+                        <a:srgbClr val="DCD6C9"/>
+                      </a:solidFill>
+                      <a:prstDash val="solid"/>
+                      <a:round/>
+                      <a:headEnd type="none" w="med" len="med"/>
+                      <a:tailEnd type="none" w="med" len="med"/>
+                    </a:lnT>
+                    <a:lnB w="6350" cap="flat" cmpd="sng" algn="ctr">
+                      <a:solidFill>
+                        <a:srgbClr val="DCD6C9"/>
+                      </a:solidFill>
+                      <a:prstDash val="solid"/>
+                      <a:round/>
+                      <a:headEnd type="none" w="med" len="med"/>
+                      <a:tailEnd type="none" w="med" len="med"/>
+                    </a:lnB>
+                    <a:solidFill>
+                      <a:srgbClr val="FFFFFF"/>
+                    </a:solidFill>
+                  </a:tcPr>
+                </a:tc>
+                <a:tc>
+                  <a:txBody>
+                    <a:bodyPr/>
+                    <a:lstStyle/>
+                    <a:p>
+                      <a:pPr indent="0" marL="0">
+                        <a:buNone/>
+                      </a:pPr>
+                      <a:r>
+                        <a:rPr lang="en-US" sz="1050" dirty="0">
+                          <a:solidFill>
+                            <a:srgbClr val="1B2426"/>
+                          </a:solidFill>
+                          <a:latin typeface="맑은 고딕" pitchFamily="34" charset="0"/>
+                          <a:ea typeface="맑은 고딕" pitchFamily="34" charset="-122"/>
+                          <a:cs typeface="맑은 고딕" pitchFamily="34" charset="-120"/>
+                        </a:rPr>
+                        <a:t>약 1억 398만</a:t>
+                      </a:r>
+                      <a:endParaRPr lang="en-US" sz="1050" dirty="0">
+                        <a:latin typeface="맑은 고딕" charset="0"/>
+                        <a:ea typeface="맑은 고딕" charset="0"/>
+                        <a:cs typeface="맑은 고딕" charset="0"/>
+                      </a:endParaRPr>
+                    </a:p>
+                  </a:txBody>
+                  <a:tcPr marL="88900" marR="88900" marT="50800" marB="50800" anchor="ctr">
+                    <a:lnL w="6350" cap="flat" cmpd="sng" algn="ctr">
+                      <a:solidFill>
+                        <a:srgbClr val="DCD6C9"/>
+                      </a:solidFill>
+                      <a:prstDash val="solid"/>
+                      <a:round/>
+                      <a:headEnd type="none" w="med" len="med"/>
+                      <a:tailEnd type="none" w="med" len="med"/>
+                    </a:lnL>
+                    <a:lnR w="6350" cap="flat" cmpd="sng" algn="ctr">
+                      <a:solidFill>
+                        <a:srgbClr val="DCD6C9"/>
+                      </a:solidFill>
+                      <a:prstDash val="solid"/>
+                      <a:round/>
+                      <a:headEnd type="none" w="med" len="med"/>
+                      <a:tailEnd type="none" w="med" len="med"/>
+                    </a:lnR>
+                    <a:lnT w="6350" cap="flat" cmpd="sng" algn="ctr">
+                      <a:solidFill>
+                        <a:srgbClr val="DCD6C9"/>
+                      </a:solidFill>
+                      <a:prstDash val="solid"/>
+                      <a:round/>
+                      <a:headEnd type="none" w="med" len="med"/>
+                      <a:tailEnd type="none" w="med" len="med"/>
+                    </a:lnT>
+                    <a:lnB w="6350" cap="flat" cmpd="sng" algn="ctr">
+                      <a:solidFill>
+                        <a:srgbClr val="DCD6C9"/>
+                      </a:solidFill>
+                      <a:prstDash val="solid"/>
+                      <a:round/>
+                      <a:headEnd type="none" w="med" len="med"/>
+                      <a:tailEnd type="none" w="med" len="med"/>
+                    </a:lnB>
+                    <a:solidFill>
+                      <a:srgbClr val="FFFFFF"/>
+                    </a:solidFill>
+                  </a:tcPr>
+                </a:tc>
+                <a:tc>
+                  <a:txBody>
+                    <a:bodyPr/>
+                    <a:lstStyle/>
+                    <a:p>
+                      <a:pPr indent="0" marL="0">
+                        <a:buNone/>
+                      </a:pPr>
+                      <a:r>
+                        <a:rPr lang="en-US" sz="1050" dirty="0">
+                          <a:solidFill>
+                            <a:srgbClr val="1B2426"/>
+                          </a:solidFill>
+                          <a:latin typeface="맑은 고딕" pitchFamily="34" charset="0"/>
+                          <a:ea typeface="맑은 고딕" pitchFamily="34" charset="-122"/>
+                          <a:cs typeface="맑은 고딕" pitchFamily="34" charset="-120"/>
+                        </a:rPr>
+                        <a:t>약 1억 3,702만</a:t>
+                      </a:r>
+                      <a:endParaRPr lang="en-US" sz="1050" dirty="0">
+                        <a:latin typeface="맑은 고딕" charset="0"/>
+                        <a:ea typeface="맑은 고딕" charset="0"/>
+                        <a:cs typeface="맑은 고딕" charset="0"/>
+                      </a:endParaRPr>
+                    </a:p>
+                  </a:txBody>
+                  <a:tcPr marL="88900" marR="88900" marT="50800" marB="50800" anchor="ctr">
+                    <a:lnL w="6350" cap="flat" cmpd="sng" algn="ctr">
+                      <a:solidFill>
+                        <a:srgbClr val="DCD6C9"/>
+                      </a:solidFill>
+                      <a:prstDash val="solid"/>
+                      <a:round/>
+                      <a:headEnd type="none" w="med" len="med"/>
+                      <a:tailEnd type="none" w="med" len="med"/>
+                    </a:lnL>
+                    <a:lnR w="6350" cap="flat" cmpd="sng" algn="ctr">
+                      <a:solidFill>
+                        <a:srgbClr val="DCD6C9"/>
+                      </a:solidFill>
+                      <a:prstDash val="solid"/>
+                      <a:round/>
+                      <a:headEnd type="none" w="med" len="med"/>
+                      <a:tailEnd type="none" w="med" len="med"/>
+                    </a:lnR>
+                    <a:lnT w="6350" cap="flat" cmpd="sng" algn="ctr">
+                      <a:solidFill>
+                        <a:srgbClr val="DCD6C9"/>
+                      </a:solidFill>
+                      <a:prstDash val="solid"/>
+                      <a:round/>
+                      <a:headEnd type="none" w="med" len="med"/>
+                      <a:tailEnd type="none" w="med" len="med"/>
+                    </a:lnT>
+                    <a:lnB w="6350" cap="flat" cmpd="sng" algn="ctr">
+                      <a:solidFill>
+                        <a:srgbClr val="DCD6C9"/>
+                      </a:solidFill>
+                      <a:prstDash val="solid"/>
+                      <a:round/>
+                      <a:headEnd type="none" w="med" len="med"/>
+                      <a:tailEnd type="none" w="med" len="med"/>
+                    </a:lnB>
+                    <a:solidFill>
+                      <a:srgbClr val="FFFFFF"/>
+                    </a:solidFill>
+                  </a:tcPr>
+                </a:tc>
+                <a:tc>
+                  <a:txBody>
+                    <a:bodyPr/>
+                    <a:lstStyle/>
+                    <a:p>
+                      <a:pPr indent="0" marL="0">
+                        <a:buNone/>
+                      </a:pPr>
+                      <a:r>
+                        <a:rPr lang="en-US" sz="1050" dirty="0">
                           <a:solidFill>
                             <a:srgbClr val="1B2426"/>
                           </a:solidFill>
@@ -24193,7 +25402,7 @@
                         </a:rPr>
                         <a:t>약 1억 8,444만</a:t>
                       </a:r>
-                      <a:endParaRPr lang="en-US" sz="1150" dirty="0">
+                      <a:endParaRPr lang="en-US" sz="1050" dirty="0">
                         <a:latin typeface="맑은 고딕" charset="0"/>
                         <a:ea typeface="맑은 고딕" charset="0"/>
                         <a:cs typeface="맑은 고딕" charset="0"/>
@@ -24238,7 +25447,75 @@
                       <a:tailEnd type="none" w="med" len="med"/>
                     </a:lnB>
                     <a:solidFill>
-                      <a:srgbClr val="F1EDE4"/>
+                      <a:srgbClr val="FFFFFF"/>
+                    </a:solidFill>
+                  </a:tcPr>
+                </a:tc>
+                <a:tc>
+                  <a:txBody>
+                    <a:bodyPr/>
+                    <a:lstStyle/>
+                    <a:p>
+                      <a:pPr indent="0" marL="0">
+                        <a:buNone/>
+                      </a:pPr>
+                      <a:r>
+                        <a:rPr lang="en-US" sz="1050" dirty="0">
+                          <a:solidFill>
+                            <a:srgbClr val="1B2426"/>
+                          </a:solidFill>
+                          <a:latin typeface="맑은 고딕" pitchFamily="34" charset="0"/>
+                          <a:ea typeface="맑은 고딕" pitchFamily="34" charset="-122"/>
+                          <a:cs typeface="맑은 고딕" pitchFamily="34" charset="-120"/>
+                        </a:rPr>
+                        <a:t>약 1억 8,773만</a:t>
+                      </a:r>
+                      <a:endParaRPr lang="en-US" sz="1050" dirty="0">
+                        <a:latin typeface="맑은 고딕" charset="0"/>
+                        <a:ea typeface="맑은 고딕" charset="0"/>
+                        <a:cs typeface="맑은 고딕" charset="0"/>
+                      </a:endParaRPr>
+                    </a:p>
+                  </a:txBody>
+                  <a:tcPr marL="88900" marR="88900" marT="50800" marB="50800" anchor="ctr">
+                    <a:lnL w="6350" cap="flat" cmpd="sng" algn="ctr">
+                      <a:solidFill>
+                        <a:srgbClr val="DCD6C9"/>
+                      </a:solidFill>
+                      <a:prstDash val="solid"/>
+                      <a:round/>
+                      <a:headEnd type="none" w="med" len="med"/>
+                      <a:tailEnd type="none" w="med" len="med"/>
+                    </a:lnL>
+                    <a:lnR w="6350" cap="flat" cmpd="sng" algn="ctr">
+                      <a:solidFill>
+                        <a:srgbClr val="DCD6C9"/>
+                      </a:solidFill>
+                      <a:prstDash val="solid"/>
+                      <a:round/>
+                      <a:headEnd type="none" w="med" len="med"/>
+                      <a:tailEnd type="none" w="med" len="med"/>
+                    </a:lnR>
+                    <a:lnT w="6350" cap="flat" cmpd="sng" algn="ctr">
+                      <a:solidFill>
+                        <a:srgbClr val="DCD6C9"/>
+                      </a:solidFill>
+                      <a:prstDash val="solid"/>
+                      <a:round/>
+                      <a:headEnd type="none" w="med" len="med"/>
+                      <a:tailEnd type="none" w="med" len="med"/>
+                    </a:lnT>
+                    <a:lnB w="6350" cap="flat" cmpd="sng" algn="ctr">
+                      <a:solidFill>
+                        <a:srgbClr val="DCD6C9"/>
+                      </a:solidFill>
+                      <a:prstDash val="solid"/>
+                      <a:round/>
+                      <a:headEnd type="none" w="med" len="med"/>
+                      <a:tailEnd type="none" w="med" len="med"/>
+                    </a:lnB>
+                    <a:solidFill>
+                      <a:srgbClr val="FFFFFF"/>
                     </a:solidFill>
                   </a:tcPr>
                 </a:tc>
@@ -24255,12 +25532,12 @@
         </p:nvSpPr>
         <p:spPr>
           <a:xfrm>
-            <a:off x="640080" y="5577840"/>
-            <a:ext cx="10911535" cy="457200"/>
+            <a:off x="640080" y="5888736"/>
+            <a:ext cx="10911535" cy="402336"/>
           </a:xfrm>
           <a:prstGeom prst="roundRect">
             <a:avLst>
-              <a:gd name="adj" fmla="val 12000"/>
+              <a:gd name="adj" fmla="val 13636"/>
             </a:avLst>
           </a:prstGeom>
           <a:solidFill>
@@ -24277,8 +25554,8 @@
         </p:nvSpPr>
         <p:spPr>
           <a:xfrm>
-            <a:off x="896112" y="5577840"/>
-            <a:ext cx="10399471" cy="457200"/>
+            <a:off x="896112" y="5888736"/>
+            <a:ext cx="10399471" cy="402336"/>
           </a:xfrm>
           <a:prstGeom prst="rect">
             <a:avLst/>
@@ -24297,7 +25574,7 @@
               <a:buNone/>
             </a:pPr>
             <a:r>
-              <a:rPr lang="en-US" sz="1250" b="1" dirty="0">
+              <a:rPr lang="en-US" sz="1050" b="1" dirty="0">
                 <a:solidFill>
                   <a:srgbClr val="0C2E2C"/>
                 </a:solidFill>
@@ -24305,9 +25582,9 @@
                 <a:ea typeface="맑은 고딕" pitchFamily="34" charset="-122"/>
                 <a:cs typeface="맑은 고딕" pitchFamily="34" charset="-120"/>
               </a:rPr>
-              <a:t>입학비는 공동체 입회 시 1회만 납부합니다 — 3년이든 5년이든 같습니다. 이전 공동체 입학금은 최대 200만 원까지 인정됩니다.</a:t>
+              <a:t>입학비는 공동체 입회 시 1회만 납부합니다 — 3년이든 5년이든 같습니다 (이전 공동체 입학금 최대 200만 원 인정).   1년차가 2년차보다 비싸 보이는 이유는 입학비 500만 원이 1년차에만 들어가기 때문입니다.</a:t>
             </a:r>
-            <a:endParaRPr lang="en-US" sz="1250" dirty="0"/>
+            <a:endParaRPr lang="en-US" sz="1050" dirty="0"/>
           </a:p>
         </p:txBody>
       </p:sp>
@@ -24347,7 +25624,7 @@
                 <a:ea typeface="맑은 고딕" pitchFamily="34" charset="-122"/>
                 <a:cs typeface="맑은 고딕" pitchFamily="34" charset="-120"/>
               </a:rPr>
-              <a:t>※ 6% 서비스세와 생활비는 별도입니다. 파운데이션 연도와 학부 연도의 학비가 크게 달라 분리해 표기했습니다.</a:t>
+              <a:t>※ 6% 서비스세와 생활비는 별도입니다. 파운데이션 연도와 학부 연도의 학비가 크게 달라 분리해 표기했습니다 · 환율 RM 1 ≈ 339원.</a:t>
             </a:r>
             <a:endParaRPr lang="en-US" sz="900" dirty="0"/>
           </a:p>

--- a/design/malaysia-study-live/IM말레이시아_입학안내문_2027_완성본.pptx
+++ b/design/malaysia-study-live/IM말레이시아_입학안내문_2027_완성본.pptx
@@ -21405,7 +21405,7 @@
           </p:nvPr>
         </p:nvGraphicFramePr>
         <p:xfrm>
-          <a:off x="640080" y="1792224"/>
+          <a:off x="640080" y="1773936"/>
           <a:ext cx="10911535" cy="914400"/>
         </p:xfrm>
         <a:graphic>
@@ -21413,14 +21413,15 @@
             <a:tbl>
               <a:tblPr/>
               <a:tblGrid>
-                <a:gridCol w="2240280"/>
-                <a:gridCol w="1737360"/>
-                <a:gridCol w="1737360"/>
-                <a:gridCol w="1737360"/>
-                <a:gridCol w="1737360"/>
-                <a:gridCol w="1721815"/>
+                <a:gridCol w="2011680"/>
+                <a:gridCol w="1483340"/>
+                <a:gridCol w="1483340"/>
+                <a:gridCol w="1483340"/>
+                <a:gridCol w="1483340"/>
+                <a:gridCol w="1483340"/>
+                <a:gridCol w="1483340"/>
               </a:tblGrid>
-              <a:tr h="402336">
+              <a:tr h="365760">
                 <a:tc>
                   <a:txBody>
                     <a:bodyPr/>
@@ -21430,7 +21431,7 @@
                         <a:buNone/>
                       </a:pPr>
                       <a:r>
-                        <a:rPr lang="en-US" sz="1050" b="1" dirty="0">
+                        <a:rPr lang="en-US" sz="1000" b="1" dirty="0">
                           <a:solidFill>
                             <a:srgbClr val="FFFFFF"/>
                           </a:solidFill>
@@ -21440,7 +21441,7 @@
                         </a:rPr>
                         <a:t>항목</a:t>
                       </a:r>
-                      <a:endParaRPr lang="en-US" sz="1050" dirty="0">
+                      <a:endParaRPr lang="en-US" sz="1000" dirty="0">
                         <a:latin typeface="맑은 고딕" charset="0"/>
                         <a:ea typeface="맑은 고딕" charset="0"/>
                         <a:cs typeface="맑은 고딕" charset="0"/>
@@ -21498,7 +21499,7 @@
                         <a:buNone/>
                       </a:pPr>
                       <a:r>
-                        <a:rPr lang="en-US" sz="1050" b="1" dirty="0">
+                        <a:rPr lang="en-US" sz="1000" b="1" dirty="0">
                           <a:solidFill>
                             <a:srgbClr val="FFFFFF"/>
                           </a:solidFill>
@@ -21506,9 +21507,30 @@
                           <a:ea typeface="맑은 고딕" pitchFamily="34" charset="-122"/>
                           <a:cs typeface="맑은 고딕" pitchFamily="34" charset="-120"/>
                         </a:rPr>
-                        <a:t>선웨이 경영 4년</a:t>
+                        <a:t>선웨이</a:t>
                       </a:r>
-                      <a:endParaRPr lang="en-US" sz="1050" dirty="0">
+                      <a:endParaRPr lang="en-US" sz="1000" dirty="0">
+                        <a:latin typeface="맑은 고딕" charset="0"/>
+                        <a:ea typeface="맑은 고딕" charset="0"/>
+                        <a:cs typeface="맑은 고딕" charset="0"/>
+                      </a:endParaRPr>
+                    </a:p>
+                    <a:p>
+                      <a:pPr indent="0" marL="0">
+                        <a:buNone/>
+                      </a:pPr>
+                      <a:r>
+                        <a:rPr lang="en-US" sz="1000" b="1" dirty="0">
+                          <a:solidFill>
+                            <a:srgbClr val="FFFFFF"/>
+                          </a:solidFill>
+                          <a:latin typeface="맑은 고딕" pitchFamily="34" charset="0"/>
+                          <a:ea typeface="맑은 고딕" pitchFamily="34" charset="-122"/>
+                          <a:cs typeface="맑은 고딕" pitchFamily="34" charset="-120"/>
+                        </a:rPr>
+                        <a:t>경영 4년</a:t>
+                      </a:r>
+                      <a:endParaRPr lang="en-US" sz="1000" dirty="0">
                         <a:latin typeface="맑은 고딕" charset="0"/>
                         <a:ea typeface="맑은 고딕" charset="0"/>
                         <a:cs typeface="맑은 고딕" charset="0"/>
@@ -21566,7 +21588,7 @@
                         <a:buNone/>
                       </a:pPr>
                       <a:r>
-                        <a:rPr lang="en-US" sz="1050" b="1" dirty="0">
+                        <a:rPr lang="en-US" sz="1000" b="1" dirty="0">
                           <a:solidFill>
                             <a:srgbClr val="FFFFFF"/>
                           </a:solidFill>
@@ -21574,9 +21596,30 @@
                           <a:ea typeface="맑은 고딕" pitchFamily="34" charset="-122"/>
                           <a:cs typeface="맑은 고딕" pitchFamily="34" charset="-120"/>
                         </a:rPr>
-                        <a:t>모나쉬 DHES 3년</a:t>
+                        <a:t>모나쉬</a:t>
                       </a:r>
-                      <a:endParaRPr lang="en-US" sz="1050" dirty="0">
+                      <a:endParaRPr lang="en-US" sz="1000" dirty="0">
+                        <a:latin typeface="맑은 고딕" charset="0"/>
+                        <a:ea typeface="맑은 고딕" charset="0"/>
+                        <a:cs typeface="맑은 고딕" charset="0"/>
+                      </a:endParaRPr>
+                    </a:p>
+                    <a:p>
+                      <a:pPr indent="0" marL="0">
+                        <a:buNone/>
+                      </a:pPr>
+                      <a:r>
+                        <a:rPr lang="en-US" sz="1000" b="1" dirty="0">
+                          <a:solidFill>
+                            <a:srgbClr val="FFFFFF"/>
+                          </a:solidFill>
+                          <a:latin typeface="맑은 고딕" pitchFamily="34" charset="0"/>
+                          <a:ea typeface="맑은 고딕" pitchFamily="34" charset="-122"/>
+                          <a:cs typeface="맑은 고딕" pitchFamily="34" charset="-120"/>
+                        </a:rPr>
+                        <a:t>DHES 3년</a:t>
+                      </a:r>
+                      <a:endParaRPr lang="en-US" sz="1000" dirty="0">
                         <a:latin typeface="맑은 고딕" charset="0"/>
                         <a:ea typeface="맑은 고딕" charset="0"/>
                         <a:cs typeface="맑은 고딕" charset="0"/>
@@ -21634,7 +21677,7 @@
                         <a:buNone/>
                       </a:pPr>
                       <a:r>
-                        <a:rPr lang="en-US" sz="1050" b="1" dirty="0">
+                        <a:rPr lang="en-US" sz="1000" b="1" dirty="0">
                           <a:solidFill>
                             <a:srgbClr val="FFFFFF"/>
                           </a:solidFill>
@@ -21642,9 +21685,30 @@
                           <a:ea typeface="맑은 고딕" pitchFamily="34" charset="-122"/>
                           <a:cs typeface="맑은 고딕" pitchFamily="34" charset="-120"/>
                         </a:rPr>
-                        <a:t>노팅엄 문과 4년</a:t>
+                        <a:t>모나쉬</a:t>
                       </a:r>
-                      <a:endParaRPr lang="en-US" sz="1050" dirty="0">
+                      <a:endParaRPr lang="en-US" sz="1000" dirty="0">
+                        <a:latin typeface="맑은 고딕" charset="0"/>
+                        <a:ea typeface="맑은 고딕" charset="0"/>
+                        <a:cs typeface="맑은 고딕" charset="0"/>
+                      </a:endParaRPr>
+                    </a:p>
+                    <a:p>
+                      <a:pPr indent="0" marL="0">
+                        <a:buNone/>
+                      </a:pPr>
+                      <a:r>
+                        <a:rPr lang="en-US" sz="1000" b="1" dirty="0">
+                          <a:solidFill>
+                            <a:srgbClr val="FFFFFF"/>
+                          </a:solidFill>
+                          <a:latin typeface="맑은 고딕" pitchFamily="34" charset="0"/>
+                          <a:ea typeface="맑은 고딕" pitchFamily="34" charset="-122"/>
+                          <a:cs typeface="맑은 고딕" pitchFamily="34" charset="-120"/>
+                        </a:rPr>
+                        <a:t>MUFY + 학부 4년</a:t>
+                      </a:r>
+                      <a:endParaRPr lang="en-US" sz="1000" dirty="0">
                         <a:latin typeface="맑은 고딕" charset="0"/>
                         <a:ea typeface="맑은 고딕" charset="0"/>
                         <a:cs typeface="맑은 고딕" charset="0"/>
@@ -21702,7 +21766,7 @@
                         <a:buNone/>
                       </a:pPr>
                       <a:r>
-                        <a:rPr lang="en-US" sz="1050" b="1" dirty="0">
+                        <a:rPr lang="en-US" sz="1000" b="1" dirty="0">
                           <a:solidFill>
                             <a:srgbClr val="FFFFFF"/>
                           </a:solidFill>
@@ -21710,9 +21774,30 @@
                           <a:ea typeface="맑은 고딕" pitchFamily="34" charset="-122"/>
                           <a:cs typeface="맑은 고딕" pitchFamily="34" charset="-120"/>
                         </a:rPr>
-                        <a:t>모나쉬 MUFY+공학 5년</a:t>
+                        <a:t>노팅엄</a:t>
                       </a:r>
-                      <a:endParaRPr lang="en-US" sz="1050" dirty="0">
+                      <a:endParaRPr lang="en-US" sz="1000" dirty="0">
+                        <a:latin typeface="맑은 고딕" charset="0"/>
+                        <a:ea typeface="맑은 고딕" charset="0"/>
+                        <a:cs typeface="맑은 고딕" charset="0"/>
+                      </a:endParaRPr>
+                    </a:p>
+                    <a:p>
+                      <a:pPr indent="0" marL="0">
+                        <a:buNone/>
+                      </a:pPr>
+                      <a:r>
+                        <a:rPr lang="en-US" sz="1000" b="1" dirty="0">
+                          <a:solidFill>
+                            <a:srgbClr val="FFFFFF"/>
+                          </a:solidFill>
+                          <a:latin typeface="맑은 고딕" pitchFamily="34" charset="0"/>
+                          <a:ea typeface="맑은 고딕" pitchFamily="34" charset="-122"/>
+                          <a:cs typeface="맑은 고딕" pitchFamily="34" charset="-120"/>
+                        </a:rPr>
+                        <a:t>문과 4년</a:t>
+                      </a:r>
+                      <a:endParaRPr lang="en-US" sz="1000" dirty="0">
                         <a:latin typeface="맑은 고딕" charset="0"/>
                         <a:ea typeface="맑은 고딕" charset="0"/>
                         <a:cs typeface="맑은 고딕" charset="0"/>
@@ -21770,7 +21855,7 @@
                         <a:buNone/>
                       </a:pPr>
                       <a:r>
-                        <a:rPr lang="en-US" sz="1050" b="1" dirty="0">
+                        <a:rPr lang="en-US" sz="1000" b="1" dirty="0">
                           <a:solidFill>
                             <a:srgbClr val="FFFFFF"/>
                           </a:solidFill>
@@ -21778,9 +21863,30 @@
                           <a:ea typeface="맑은 고딕" pitchFamily="34" charset="-122"/>
                           <a:cs typeface="맑은 고딕" pitchFamily="34" charset="-120"/>
                         </a:rPr>
-                        <a:t>노팅엄 MEng 공학 5년</a:t>
+                        <a:t>모나쉬</a:t>
                       </a:r>
-                      <a:endParaRPr lang="en-US" sz="1050" dirty="0">
+                      <a:endParaRPr lang="en-US" sz="1000" dirty="0">
+                        <a:latin typeface="맑은 고딕" charset="0"/>
+                        <a:ea typeface="맑은 고딕" charset="0"/>
+                        <a:cs typeface="맑은 고딕" charset="0"/>
+                      </a:endParaRPr>
+                    </a:p>
+                    <a:p>
+                      <a:pPr indent="0" marL="0">
+                        <a:buNone/>
+                      </a:pPr>
+                      <a:r>
+                        <a:rPr lang="en-US" sz="1000" b="1" dirty="0">
+                          <a:solidFill>
+                            <a:srgbClr val="FFFFFF"/>
+                          </a:solidFill>
+                          <a:latin typeface="맑은 고딕" pitchFamily="34" charset="0"/>
+                          <a:ea typeface="맑은 고딕" pitchFamily="34" charset="-122"/>
+                          <a:cs typeface="맑은 고딕" pitchFamily="34" charset="-120"/>
+                        </a:rPr>
+                        <a:t>MUFY + 공학 5년</a:t>
+                      </a:r>
+                      <a:endParaRPr lang="en-US" sz="1000" dirty="0">
                         <a:latin typeface="맑은 고딕" charset="0"/>
                         <a:ea typeface="맑은 고딕" charset="0"/>
                         <a:cs typeface="맑은 고딕" charset="0"/>
@@ -21829,8 +21935,6 @@
                     </a:solidFill>
                   </a:tcPr>
                 </a:tc>
-              </a:tr>
-              <a:tr h="402336">
                 <a:tc>
                   <a:txBody>
                     <a:bodyPr/>
@@ -21840,7 +21944,98 @@
                         <a:buNone/>
                       </a:pPr>
                       <a:r>
-                        <a:rPr lang="en-US" sz="1050" dirty="0">
+                        <a:rPr lang="en-US" sz="1000" b="1" dirty="0">
+                          <a:solidFill>
+                            <a:srgbClr val="FFFFFF"/>
+                          </a:solidFill>
+                          <a:latin typeface="맑은 고딕" pitchFamily="34" charset="0"/>
+                          <a:ea typeface="맑은 고딕" pitchFamily="34" charset="-122"/>
+                          <a:cs typeface="맑은 고딕" pitchFamily="34" charset="-120"/>
+                        </a:rPr>
+                        <a:t>노팅엄</a:t>
+                      </a:r>
+                      <a:endParaRPr lang="en-US" sz="1000" dirty="0">
+                        <a:latin typeface="맑은 고딕" charset="0"/>
+                        <a:ea typeface="맑은 고딕" charset="0"/>
+                        <a:cs typeface="맑은 고딕" charset="0"/>
+                      </a:endParaRPr>
+                    </a:p>
+                    <a:p>
+                      <a:pPr indent="0" marL="0">
+                        <a:buNone/>
+                      </a:pPr>
+                      <a:r>
+                        <a:rPr lang="en-US" sz="1000" b="1" dirty="0">
+                          <a:solidFill>
+                            <a:srgbClr val="FFFFFF"/>
+                          </a:solidFill>
+                          <a:latin typeface="맑은 고딕" pitchFamily="34" charset="0"/>
+                          <a:ea typeface="맑은 고딕" pitchFamily="34" charset="-122"/>
+                          <a:cs typeface="맑은 고딕" pitchFamily="34" charset="-120"/>
+                        </a:rPr>
+                        <a:t>MEng 공학 5년</a:t>
+                      </a:r>
+                      <a:endParaRPr lang="en-US" sz="1000" dirty="0">
+                        <a:latin typeface="맑은 고딕" charset="0"/>
+                        <a:ea typeface="맑은 고딕" charset="0"/>
+                        <a:cs typeface="맑은 고딕" charset="0"/>
+                      </a:endParaRPr>
+                    </a:p>
+                  </a:txBody>
+                  <a:tcPr marL="88900" marR="88900" marT="50800" marB="50800" anchor="ctr">
+                    <a:lnL w="6350" cap="flat" cmpd="sng" algn="ctr">
+                      <a:solidFill>
+                        <a:srgbClr val="DCD6C9"/>
+                      </a:solidFill>
+                      <a:prstDash val="solid"/>
+                      <a:round/>
+                      <a:headEnd type="none" w="med" len="med"/>
+                      <a:tailEnd type="none" w="med" len="med"/>
+                    </a:lnL>
+                    <a:lnR w="6350" cap="flat" cmpd="sng" algn="ctr">
+                      <a:solidFill>
+                        <a:srgbClr val="DCD6C9"/>
+                      </a:solidFill>
+                      <a:prstDash val="solid"/>
+                      <a:round/>
+                      <a:headEnd type="none" w="med" len="med"/>
+                      <a:tailEnd type="none" w="med" len="med"/>
+                    </a:lnR>
+                    <a:lnT w="6350" cap="flat" cmpd="sng" algn="ctr">
+                      <a:solidFill>
+                        <a:srgbClr val="DCD6C9"/>
+                      </a:solidFill>
+                      <a:prstDash val="solid"/>
+                      <a:round/>
+                      <a:headEnd type="none" w="med" len="med"/>
+                      <a:tailEnd type="none" w="med" len="med"/>
+                    </a:lnT>
+                    <a:lnB w="6350" cap="flat" cmpd="sng" algn="ctr">
+                      <a:solidFill>
+                        <a:srgbClr val="DCD6C9"/>
+                      </a:solidFill>
+                      <a:prstDash val="solid"/>
+                      <a:round/>
+                      <a:headEnd type="none" w="med" len="med"/>
+                      <a:tailEnd type="none" w="med" len="med"/>
+                    </a:lnB>
+                    <a:solidFill>
+                      <a:srgbClr val="134744"/>
+                    </a:solidFill>
+                  </a:tcPr>
+                </a:tc>
+              </a:tr>
+              <a:tr h="365760">
+                <a:tc>
+                  <a:txBody>
+                    <a:bodyPr/>
+                    <a:lstStyle/>
+                    <a:p>
+                      <a:pPr indent="0" marL="0">
+                        <a:buNone/>
+                      </a:pPr>
+                      <a:r>
+                        <a:rPr lang="en-US" sz="1000" dirty="0">
                           <a:solidFill>
                             <a:srgbClr val="1B2426"/>
                           </a:solidFill>
@@ -21850,7 +22045,7 @@
                         </a:rPr>
                         <a:t>1년차 학비 (파운데이션)</a:t>
                       </a:r>
-                      <a:endParaRPr lang="en-US" sz="1050" dirty="0">
+                      <a:endParaRPr lang="en-US" sz="1000" dirty="0">
                         <a:latin typeface="맑은 고딕" charset="0"/>
                         <a:ea typeface="맑은 고딕" charset="0"/>
                         <a:cs typeface="맑은 고딕" charset="0"/>
@@ -21908,7 +22103,7 @@
                         <a:buNone/>
                       </a:pPr>
                       <a:r>
-                        <a:rPr lang="en-US" sz="1050" dirty="0">
+                        <a:rPr lang="en-US" sz="1000" dirty="0">
                           <a:solidFill>
                             <a:srgbClr val="1B2426"/>
                           </a:solidFill>
@@ -21916,9 +22111,9 @@
                           <a:ea typeface="맑은 고딕" pitchFamily="34" charset="-122"/>
                           <a:cs typeface="맑은 고딕" pitchFamily="34" charset="-120"/>
                         </a:rPr>
-                        <a:t>약 800만</a:t>
+                        <a:t>800만</a:t>
                       </a:r>
-                      <a:endParaRPr lang="en-US" sz="1050" dirty="0">
+                      <a:endParaRPr lang="en-US" sz="1000" dirty="0">
                         <a:latin typeface="맑은 고딕" charset="0"/>
                         <a:ea typeface="맑은 고딕" charset="0"/>
                         <a:cs typeface="맑은 고딕" charset="0"/>
@@ -21976,7 +22171,7 @@
                         <a:buNone/>
                       </a:pPr>
                       <a:r>
-                        <a:rPr lang="en-US" sz="1050" dirty="0">
+                        <a:rPr lang="en-US" sz="1000" dirty="0">
                           <a:solidFill>
                             <a:srgbClr val="1B2426"/>
                           </a:solidFill>
@@ -21984,9 +22179,9 @@
                           <a:ea typeface="맑은 고딕" pitchFamily="34" charset="-122"/>
                           <a:cs typeface="맑은 고딕" pitchFamily="34" charset="-120"/>
                         </a:rPr>
-                        <a:t>DHES 약 1,676만</a:t>
+                        <a:t>1,676만</a:t>
                       </a:r>
-                      <a:endParaRPr lang="en-US" sz="1050" dirty="0">
+                      <a:endParaRPr lang="en-US" sz="1000" dirty="0">
                         <a:latin typeface="맑은 고딕" charset="0"/>
                         <a:ea typeface="맑은 고딕" charset="0"/>
                         <a:cs typeface="맑은 고딕" charset="0"/>
@@ -22044,7 +22239,7 @@
                         <a:buNone/>
                       </a:pPr>
                       <a:r>
-                        <a:rPr lang="en-US" sz="1050" dirty="0">
+                        <a:rPr lang="en-US" sz="1000" dirty="0">
                           <a:solidFill>
                             <a:srgbClr val="1B2426"/>
                           </a:solidFill>
@@ -22052,9 +22247,9 @@
                           <a:ea typeface="맑은 고딕" pitchFamily="34" charset="-122"/>
                           <a:cs typeface="맑은 고딕" pitchFamily="34" charset="-120"/>
                         </a:rPr>
-                        <a:t>약 1,288만</a:t>
+                        <a:t>800만</a:t>
                       </a:r>
-                      <a:endParaRPr lang="en-US" sz="1050" dirty="0">
+                      <a:endParaRPr lang="en-US" sz="1000" dirty="0">
                         <a:latin typeface="맑은 고딕" charset="0"/>
                         <a:ea typeface="맑은 고딕" charset="0"/>
                         <a:cs typeface="맑은 고딕" charset="0"/>
@@ -22112,7 +22307,7 @@
                         <a:buNone/>
                       </a:pPr>
                       <a:r>
-                        <a:rPr lang="en-US" sz="1050" dirty="0">
+                        <a:rPr lang="en-US" sz="1000" dirty="0">
                           <a:solidFill>
                             <a:srgbClr val="1B2426"/>
                           </a:solidFill>
@@ -22120,9 +22315,9 @@
                           <a:ea typeface="맑은 고딕" pitchFamily="34" charset="-122"/>
                           <a:cs typeface="맑은 고딕" pitchFamily="34" charset="-120"/>
                         </a:rPr>
-                        <a:t>MUFY 약 800만</a:t>
+                        <a:t>1,288만</a:t>
                       </a:r>
-                      <a:endParaRPr lang="en-US" sz="1050" dirty="0">
+                      <a:endParaRPr lang="en-US" sz="1000" dirty="0">
                         <a:latin typeface="맑은 고딕" charset="0"/>
                         <a:ea typeface="맑은 고딕" charset="0"/>
                         <a:cs typeface="맑은 고딕" charset="0"/>
@@ -22180,7 +22375,7 @@
                         <a:buNone/>
                       </a:pPr>
                       <a:r>
-                        <a:rPr lang="en-US" sz="1050" dirty="0">
+                        <a:rPr lang="en-US" sz="1000" dirty="0">
                           <a:solidFill>
                             <a:srgbClr val="1B2426"/>
                           </a:solidFill>
@@ -22188,9 +22383,9 @@
                           <a:ea typeface="맑은 고딕" pitchFamily="34" charset="-122"/>
                           <a:cs typeface="맑은 고딕" pitchFamily="34" charset="-120"/>
                         </a:rPr>
-                        <a:t>약 1,288만</a:t>
+                        <a:t>800만</a:t>
                       </a:r>
-                      <a:endParaRPr lang="en-US" sz="1050" dirty="0">
+                      <a:endParaRPr lang="en-US" sz="1000" dirty="0">
                         <a:latin typeface="맑은 고딕" charset="0"/>
                         <a:ea typeface="맑은 고딕" charset="0"/>
                         <a:cs typeface="맑은 고딕" charset="0"/>
@@ -22239,8 +22434,6 @@
                     </a:solidFill>
                   </a:tcPr>
                 </a:tc>
-              </a:tr>
-              <a:tr h="402336">
                 <a:tc>
                   <a:txBody>
                     <a:bodyPr/>
@@ -22250,7 +22443,7 @@
                         <a:buNone/>
                       </a:pPr>
                       <a:r>
-                        <a:rPr lang="en-US" sz="1050" dirty="0">
+                        <a:rPr lang="en-US" sz="1000" dirty="0">
                           <a:solidFill>
                             <a:srgbClr val="1B2426"/>
                           </a:solidFill>
@@ -22258,9 +22451,79 @@
                           <a:ea typeface="맑은 고딕" pitchFamily="34" charset="-122"/>
                           <a:cs typeface="맑은 고딕" pitchFamily="34" charset="-120"/>
                         </a:rPr>
-                        <a:t>2년차 이후 학비 (학부)</a:t>
+                        <a:t>1,288만</a:t>
                       </a:r>
-                      <a:endParaRPr lang="en-US" sz="1050" dirty="0">
+                      <a:endParaRPr lang="en-US" sz="1000" dirty="0">
+                        <a:latin typeface="맑은 고딕" charset="0"/>
+                        <a:ea typeface="맑은 고딕" charset="0"/>
+                        <a:cs typeface="맑은 고딕" charset="0"/>
+                      </a:endParaRPr>
+                    </a:p>
+                  </a:txBody>
+                  <a:tcPr marL="88900" marR="88900" marT="50800" marB="50800" anchor="ctr">
+                    <a:lnL w="6350" cap="flat" cmpd="sng" algn="ctr">
+                      <a:solidFill>
+                        <a:srgbClr val="DCD6C9"/>
+                      </a:solidFill>
+                      <a:prstDash val="solid"/>
+                      <a:round/>
+                      <a:headEnd type="none" w="med" len="med"/>
+                      <a:tailEnd type="none" w="med" len="med"/>
+                    </a:lnL>
+                    <a:lnR w="6350" cap="flat" cmpd="sng" algn="ctr">
+                      <a:solidFill>
+                        <a:srgbClr val="DCD6C9"/>
+                      </a:solidFill>
+                      <a:prstDash val="solid"/>
+                      <a:round/>
+                      <a:headEnd type="none" w="med" len="med"/>
+                      <a:tailEnd type="none" w="med" len="med"/>
+                    </a:lnR>
+                    <a:lnT w="6350" cap="flat" cmpd="sng" algn="ctr">
+                      <a:solidFill>
+                        <a:srgbClr val="DCD6C9"/>
+                      </a:solidFill>
+                      <a:prstDash val="solid"/>
+                      <a:round/>
+                      <a:headEnd type="none" w="med" len="med"/>
+                      <a:tailEnd type="none" w="med" len="med"/>
+                    </a:lnT>
+                    <a:lnB w="6350" cap="flat" cmpd="sng" algn="ctr">
+                      <a:solidFill>
+                        <a:srgbClr val="DCD6C9"/>
+                      </a:solidFill>
+                      <a:prstDash val="solid"/>
+                      <a:round/>
+                      <a:headEnd type="none" w="med" len="med"/>
+                      <a:tailEnd type="none" w="med" len="med"/>
+                    </a:lnB>
+                    <a:solidFill>
+                      <a:srgbClr val="FFFFFF"/>
+                    </a:solidFill>
+                  </a:tcPr>
+                </a:tc>
+              </a:tr>
+              <a:tr h="365760">
+                <a:tc>
+                  <a:txBody>
+                    <a:bodyPr/>
+                    <a:lstStyle/>
+                    <a:p>
+                      <a:pPr indent="0" marL="0">
+                        <a:buNone/>
+                      </a:pPr>
+                      <a:r>
+                        <a:rPr lang="en-US" sz="1000" dirty="0">
+                          <a:solidFill>
+                            <a:srgbClr val="1B2426"/>
+                          </a:solidFill>
+                          <a:latin typeface="맑은 고딕" pitchFamily="34" charset="0"/>
+                          <a:ea typeface="맑은 고딕" pitchFamily="34" charset="-122"/>
+                          <a:cs typeface="맑은 고딕" pitchFamily="34" charset="-120"/>
+                        </a:rPr>
+                        <a:t>2년차 이후 학비 (학부, 연)</a:t>
+                      </a:r>
+                      <a:endParaRPr lang="en-US" sz="1000" dirty="0">
                         <a:latin typeface="맑은 고딕" charset="0"/>
                         <a:ea typeface="맑은 고딕" charset="0"/>
                         <a:cs typeface="맑은 고딕" charset="0"/>
@@ -22318,7 +22581,7 @@
                         <a:buNone/>
                       </a:pPr>
                       <a:r>
-                        <a:rPr lang="en-US" sz="1050" dirty="0">
+                        <a:rPr lang="en-US" sz="1000" dirty="0">
                           <a:solidFill>
                             <a:srgbClr val="1B2426"/>
                           </a:solidFill>
@@ -22326,9 +22589,9 @@
                           <a:ea typeface="맑은 고딕" pitchFamily="34" charset="-122"/>
                           <a:cs typeface="맑은 고딕" pitchFamily="34" charset="-120"/>
                         </a:rPr>
-                        <a:t>약 910만~1,290만</a:t>
+                        <a:t>910 ~ 1,290만</a:t>
                       </a:r>
-                      <a:endParaRPr lang="en-US" sz="1050" dirty="0">
+                      <a:endParaRPr lang="en-US" sz="1000" dirty="0">
                         <a:latin typeface="맑은 고딕" charset="0"/>
                         <a:ea typeface="맑은 고딕" charset="0"/>
                         <a:cs typeface="맑은 고딕" charset="0"/>
@@ -22386,7 +22649,7 @@
                         <a:buNone/>
                       </a:pPr>
                       <a:r>
-                        <a:rPr lang="en-US" sz="1050" dirty="0">
+                        <a:rPr lang="en-US" sz="1000" dirty="0">
                           <a:solidFill>
                             <a:srgbClr val="1B2426"/>
                           </a:solidFill>
@@ -22394,9 +22657,9 @@
                           <a:ea typeface="맑은 고딕" pitchFamily="34" charset="-122"/>
                           <a:cs typeface="맑은 고딕" pitchFamily="34" charset="-120"/>
                         </a:rPr>
-                        <a:t>약 1,741만</a:t>
+                        <a:t>1,741만</a:t>
                       </a:r>
-                      <a:endParaRPr lang="en-US" sz="1050" dirty="0">
+                      <a:endParaRPr lang="en-US" sz="1000" dirty="0">
                         <a:latin typeface="맑은 고딕" charset="0"/>
                         <a:ea typeface="맑은 고딕" charset="0"/>
                         <a:cs typeface="맑은 고딕" charset="0"/>
@@ -22454,7 +22717,7 @@
                         <a:buNone/>
                       </a:pPr>
                       <a:r>
-                        <a:rPr lang="en-US" sz="1050" dirty="0">
+                        <a:rPr lang="en-US" sz="1000" dirty="0">
                           <a:solidFill>
                             <a:srgbClr val="1B2426"/>
                           </a:solidFill>
@@ -22462,9 +22725,9 @@
                           <a:ea typeface="맑은 고딕" pitchFamily="34" charset="-122"/>
                           <a:cs typeface="맑은 고딕" pitchFamily="34" charset="-120"/>
                         </a:rPr>
-                        <a:t>약 1,865만</a:t>
+                        <a:t>1,741만</a:t>
                       </a:r>
-                      <a:endParaRPr lang="en-US" sz="1050" dirty="0">
+                      <a:endParaRPr lang="en-US" sz="1000" dirty="0">
                         <a:latin typeface="맑은 고딕" charset="0"/>
                         <a:ea typeface="맑은 고딕" charset="0"/>
                         <a:cs typeface="맑은 고딕" charset="0"/>
@@ -22522,7 +22785,7 @@
                         <a:buNone/>
                       </a:pPr>
                       <a:r>
-                        <a:rPr lang="en-US" sz="1050" dirty="0">
+                        <a:rPr lang="en-US" sz="1000" dirty="0">
                           <a:solidFill>
                             <a:srgbClr val="1B2426"/>
                           </a:solidFill>
@@ -22530,9 +22793,9 @@
                           <a:ea typeface="맑은 고딕" pitchFamily="34" charset="-122"/>
                           <a:cs typeface="맑은 고딕" pitchFamily="34" charset="-120"/>
                         </a:rPr>
-                        <a:t>약 2,311만</a:t>
+                        <a:t>1,865만</a:t>
                       </a:r>
-                      <a:endParaRPr lang="en-US" sz="1050" dirty="0">
+                      <a:endParaRPr lang="en-US" sz="1000" dirty="0">
                         <a:latin typeface="맑은 고딕" charset="0"/>
                         <a:ea typeface="맑은 고딕" charset="0"/>
                         <a:cs typeface="맑은 고딕" charset="0"/>
@@ -22590,7 +22853,7 @@
                         <a:buNone/>
                       </a:pPr>
                       <a:r>
-                        <a:rPr lang="en-US" sz="1050" dirty="0">
+                        <a:rPr lang="en-US" sz="1000" dirty="0">
                           <a:solidFill>
                             <a:srgbClr val="1B2426"/>
                           </a:solidFill>
@@ -22598,9 +22861,9 @@
                           <a:ea typeface="맑은 고딕" pitchFamily="34" charset="-122"/>
                           <a:cs typeface="맑은 고딕" pitchFamily="34" charset="-120"/>
                         </a:rPr>
-                        <a:t>약 2,271만</a:t>
+                        <a:t>2,311만</a:t>
                       </a:r>
-                      <a:endParaRPr lang="en-US" sz="1050" dirty="0">
+                      <a:endParaRPr lang="en-US" sz="1000" dirty="0">
                         <a:latin typeface="맑은 고딕" charset="0"/>
                         <a:ea typeface="맑은 고딕" charset="0"/>
                         <a:cs typeface="맑은 고딕" charset="0"/>
@@ -22649,8 +22912,6 @@
                     </a:solidFill>
                   </a:tcPr>
                 </a:tc>
-              </a:tr>
-              <a:tr h="402336">
                 <a:tc>
                   <a:txBody>
                     <a:bodyPr/>
@@ -22660,7 +22921,7 @@
                         <a:buNone/>
                       </a:pPr>
                       <a:r>
-                        <a:rPr lang="en-US" sz="1050" dirty="0">
+                        <a:rPr lang="en-US" sz="1000" dirty="0">
                           <a:solidFill>
                             <a:srgbClr val="1B2426"/>
                           </a:solidFill>
@@ -22668,9 +22929,79 @@
                           <a:ea typeface="맑은 고딕" pitchFamily="34" charset="-122"/>
                           <a:cs typeface="맑은 고딕" pitchFamily="34" charset="-120"/>
                         </a:rPr>
-                        <a:t>학생비자 갱신</a:t>
+                        <a:t>2,271만</a:t>
                       </a:r>
-                      <a:endParaRPr lang="en-US" sz="1050" dirty="0">
+                      <a:endParaRPr lang="en-US" sz="1000" dirty="0">
+                        <a:latin typeface="맑은 고딕" charset="0"/>
+                        <a:ea typeface="맑은 고딕" charset="0"/>
+                        <a:cs typeface="맑은 고딕" charset="0"/>
+                      </a:endParaRPr>
+                    </a:p>
+                  </a:txBody>
+                  <a:tcPr marL="88900" marR="88900" marT="50800" marB="50800" anchor="ctr">
+                    <a:lnL w="6350" cap="flat" cmpd="sng" algn="ctr">
+                      <a:solidFill>
+                        <a:srgbClr val="DCD6C9"/>
+                      </a:solidFill>
+                      <a:prstDash val="solid"/>
+                      <a:round/>
+                      <a:headEnd type="none" w="med" len="med"/>
+                      <a:tailEnd type="none" w="med" len="med"/>
+                    </a:lnL>
+                    <a:lnR w="6350" cap="flat" cmpd="sng" algn="ctr">
+                      <a:solidFill>
+                        <a:srgbClr val="DCD6C9"/>
+                      </a:solidFill>
+                      <a:prstDash val="solid"/>
+                      <a:round/>
+                      <a:headEnd type="none" w="med" len="med"/>
+                      <a:tailEnd type="none" w="med" len="med"/>
+                    </a:lnR>
+                    <a:lnT w="6350" cap="flat" cmpd="sng" algn="ctr">
+                      <a:solidFill>
+                        <a:srgbClr val="DCD6C9"/>
+                      </a:solidFill>
+                      <a:prstDash val="solid"/>
+                      <a:round/>
+                      <a:headEnd type="none" w="med" len="med"/>
+                      <a:tailEnd type="none" w="med" len="med"/>
+                    </a:lnT>
+                    <a:lnB w="6350" cap="flat" cmpd="sng" algn="ctr">
+                      <a:solidFill>
+                        <a:srgbClr val="DCD6C9"/>
+                      </a:solidFill>
+                      <a:prstDash val="solid"/>
+                      <a:round/>
+                      <a:headEnd type="none" w="med" len="med"/>
+                      <a:tailEnd type="none" w="med" len="med"/>
+                    </a:lnB>
+                    <a:solidFill>
+                      <a:srgbClr val="F1EDE4"/>
+                    </a:solidFill>
+                  </a:tcPr>
+                </a:tc>
+              </a:tr>
+              <a:tr h="365760">
+                <a:tc>
+                  <a:txBody>
+                    <a:bodyPr/>
+                    <a:lstStyle/>
+                    <a:p>
+                      <a:pPr indent="0" marL="0">
+                        <a:buNone/>
+                      </a:pPr>
+                      <a:r>
+                        <a:rPr lang="en-US" sz="1000" dirty="0">
+                          <a:solidFill>
+                            <a:srgbClr val="1B2426"/>
+                          </a:solidFill>
+                          <a:latin typeface="맑은 고딕" pitchFamily="34" charset="0"/>
+                          <a:ea typeface="맑은 고딕" pitchFamily="34" charset="-122"/>
+                          <a:cs typeface="맑은 고딕" pitchFamily="34" charset="-120"/>
+                        </a:rPr>
+                        <a:t>학생비자 갱신 (연)</a:t>
+                      </a:r>
+                      <a:endParaRPr lang="en-US" sz="1000" dirty="0">
                         <a:latin typeface="맑은 고딕" charset="0"/>
                         <a:ea typeface="맑은 고딕" charset="0"/>
                         <a:cs typeface="맑은 고딕" charset="0"/>
@@ -22728,7 +23059,7 @@
                         <a:buNone/>
                       </a:pPr>
                       <a:r>
-                        <a:rPr lang="en-US" sz="1050" dirty="0">
+                        <a:rPr lang="en-US" sz="1000" dirty="0">
                           <a:solidFill>
                             <a:srgbClr val="1B2426"/>
                           </a:solidFill>
@@ -22736,9 +23067,9 @@
                           <a:ea typeface="맑은 고딕" pitchFamily="34" charset="-122"/>
                           <a:cs typeface="맑은 고딕" pitchFamily="34" charset="-120"/>
                         </a:rPr>
-                        <a:t>약 140만 / 년</a:t>
+                        <a:t>140만</a:t>
                       </a:r>
-                      <a:endParaRPr lang="en-US" sz="1050" dirty="0">
+                      <a:endParaRPr lang="en-US" sz="1000" dirty="0">
                         <a:latin typeface="맑은 고딕" charset="0"/>
                         <a:ea typeface="맑은 고딕" charset="0"/>
                         <a:cs typeface="맑은 고딕" charset="0"/>
@@ -22796,7 +23127,7 @@
                         <a:buNone/>
                       </a:pPr>
                       <a:r>
-                        <a:rPr lang="en-US" sz="1050" dirty="0">
+                        <a:rPr lang="en-US" sz="1000" dirty="0">
                           <a:solidFill>
                             <a:srgbClr val="1B2426"/>
                           </a:solidFill>
@@ -22804,9 +23135,9 @@
                           <a:ea typeface="맑은 고딕" pitchFamily="34" charset="-122"/>
                           <a:cs typeface="맑은 고딕" pitchFamily="34" charset="-120"/>
                         </a:rPr>
-                        <a:t>약 140만 / 년</a:t>
+                        <a:t>140만</a:t>
                       </a:r>
-                      <a:endParaRPr lang="en-US" sz="1050" dirty="0">
+                      <a:endParaRPr lang="en-US" sz="1000" dirty="0">
                         <a:latin typeface="맑은 고딕" charset="0"/>
                         <a:ea typeface="맑은 고딕" charset="0"/>
                         <a:cs typeface="맑은 고딕" charset="0"/>
@@ -22864,7 +23195,7 @@
                         <a:buNone/>
                       </a:pPr>
                       <a:r>
-                        <a:rPr lang="en-US" sz="1050" dirty="0">
+                        <a:rPr lang="en-US" sz="1000" dirty="0">
                           <a:solidFill>
                             <a:srgbClr val="1B2426"/>
                           </a:solidFill>
@@ -22872,9 +23203,9 @@
                           <a:ea typeface="맑은 고딕" pitchFamily="34" charset="-122"/>
                           <a:cs typeface="맑은 고딕" pitchFamily="34" charset="-120"/>
                         </a:rPr>
-                        <a:t>약 140만 / 년</a:t>
+                        <a:t>140만</a:t>
                       </a:r>
-                      <a:endParaRPr lang="en-US" sz="1050" dirty="0">
+                      <a:endParaRPr lang="en-US" sz="1000" dirty="0">
                         <a:latin typeface="맑은 고딕" charset="0"/>
                         <a:ea typeface="맑은 고딕" charset="0"/>
                         <a:cs typeface="맑은 고딕" charset="0"/>
@@ -22932,7 +23263,7 @@
                         <a:buNone/>
                       </a:pPr>
                       <a:r>
-                        <a:rPr lang="en-US" sz="1050" dirty="0">
+                        <a:rPr lang="en-US" sz="1000" dirty="0">
                           <a:solidFill>
                             <a:srgbClr val="1B2426"/>
                           </a:solidFill>
@@ -22940,9 +23271,9 @@
                           <a:ea typeface="맑은 고딕" pitchFamily="34" charset="-122"/>
                           <a:cs typeface="맑은 고딕" pitchFamily="34" charset="-120"/>
                         </a:rPr>
-                        <a:t>약 140만 / 년</a:t>
+                        <a:t>140만</a:t>
                       </a:r>
-                      <a:endParaRPr lang="en-US" sz="1050" dirty="0">
+                      <a:endParaRPr lang="en-US" sz="1000" dirty="0">
                         <a:latin typeface="맑은 고딕" charset="0"/>
                         <a:ea typeface="맑은 고딕" charset="0"/>
                         <a:cs typeface="맑은 고딕" charset="0"/>
@@ -23000,7 +23331,7 @@
                         <a:buNone/>
                       </a:pPr>
                       <a:r>
-                        <a:rPr lang="en-US" sz="1050" dirty="0">
+                        <a:rPr lang="en-US" sz="1000" dirty="0">
                           <a:solidFill>
                             <a:srgbClr val="1B2426"/>
                           </a:solidFill>
@@ -23008,9 +23339,9 @@
                           <a:ea typeface="맑은 고딕" pitchFamily="34" charset="-122"/>
                           <a:cs typeface="맑은 고딕" pitchFamily="34" charset="-120"/>
                         </a:rPr>
-                        <a:t>약 140만 / 년</a:t>
+                        <a:t>140만</a:t>
                       </a:r>
-                      <a:endParaRPr lang="en-US" sz="1050" dirty="0">
+                      <a:endParaRPr lang="en-US" sz="1000" dirty="0">
                         <a:latin typeface="맑은 고딕" charset="0"/>
                         <a:ea typeface="맑은 고딕" charset="0"/>
                         <a:cs typeface="맑은 고딕" charset="0"/>
@@ -23059,8 +23390,6 @@
                     </a:solidFill>
                   </a:tcPr>
                 </a:tc>
-              </a:tr>
-              <a:tr h="402336">
                 <a:tc>
                   <a:txBody>
                     <a:bodyPr/>
@@ -23070,7 +23399,7 @@
                         <a:buNone/>
                       </a:pPr>
                       <a:r>
-                        <a:rPr lang="en-US" sz="1050" dirty="0">
+                        <a:rPr lang="en-US" sz="1000" dirty="0">
                           <a:solidFill>
                             <a:srgbClr val="1B2426"/>
                           </a:solidFill>
@@ -23078,9 +23407,79 @@
                           <a:ea typeface="맑은 고딕" pitchFamily="34" charset="-122"/>
                           <a:cs typeface="맑은 고딕" pitchFamily="34" charset="-120"/>
                         </a:rPr>
-                        <a:t>IM 공동체 운영비</a:t>
+                        <a:t>140만</a:t>
                       </a:r>
-                      <a:endParaRPr lang="en-US" sz="1050" dirty="0">
+                      <a:endParaRPr lang="en-US" sz="1000" dirty="0">
+                        <a:latin typeface="맑은 고딕" charset="0"/>
+                        <a:ea typeface="맑은 고딕" charset="0"/>
+                        <a:cs typeface="맑은 고딕" charset="0"/>
+                      </a:endParaRPr>
+                    </a:p>
+                  </a:txBody>
+                  <a:tcPr marL="88900" marR="88900" marT="50800" marB="50800" anchor="ctr">
+                    <a:lnL w="6350" cap="flat" cmpd="sng" algn="ctr">
+                      <a:solidFill>
+                        <a:srgbClr val="DCD6C9"/>
+                      </a:solidFill>
+                      <a:prstDash val="solid"/>
+                      <a:round/>
+                      <a:headEnd type="none" w="med" len="med"/>
+                      <a:tailEnd type="none" w="med" len="med"/>
+                    </a:lnL>
+                    <a:lnR w="6350" cap="flat" cmpd="sng" algn="ctr">
+                      <a:solidFill>
+                        <a:srgbClr val="DCD6C9"/>
+                      </a:solidFill>
+                      <a:prstDash val="solid"/>
+                      <a:round/>
+                      <a:headEnd type="none" w="med" len="med"/>
+                      <a:tailEnd type="none" w="med" len="med"/>
+                    </a:lnR>
+                    <a:lnT w="6350" cap="flat" cmpd="sng" algn="ctr">
+                      <a:solidFill>
+                        <a:srgbClr val="DCD6C9"/>
+                      </a:solidFill>
+                      <a:prstDash val="solid"/>
+                      <a:round/>
+                      <a:headEnd type="none" w="med" len="med"/>
+                      <a:tailEnd type="none" w="med" len="med"/>
+                    </a:lnT>
+                    <a:lnB w="6350" cap="flat" cmpd="sng" algn="ctr">
+                      <a:solidFill>
+                        <a:srgbClr val="DCD6C9"/>
+                      </a:solidFill>
+                      <a:prstDash val="solid"/>
+                      <a:round/>
+                      <a:headEnd type="none" w="med" len="med"/>
+                      <a:tailEnd type="none" w="med" len="med"/>
+                    </a:lnB>
+                    <a:solidFill>
+                      <a:srgbClr val="FFFFFF"/>
+                    </a:solidFill>
+                  </a:tcPr>
+                </a:tc>
+              </a:tr>
+              <a:tr h="365760">
+                <a:tc>
+                  <a:txBody>
+                    <a:bodyPr/>
+                    <a:lstStyle/>
+                    <a:p>
+                      <a:pPr indent="0" marL="0">
+                        <a:buNone/>
+                      </a:pPr>
+                      <a:r>
+                        <a:rPr lang="en-US" sz="1000" dirty="0">
+                          <a:solidFill>
+                            <a:srgbClr val="1B2426"/>
+                          </a:solidFill>
+                          <a:latin typeface="맑은 고딕" pitchFamily="34" charset="0"/>
+                          <a:ea typeface="맑은 고딕" pitchFamily="34" charset="-122"/>
+                          <a:cs typeface="맑은 고딕" pitchFamily="34" charset="-120"/>
+                        </a:rPr>
+                        <a:t>IM 공동체 운영비 (연)</a:t>
+                      </a:r>
+                      <a:endParaRPr lang="en-US" sz="1000" dirty="0">
                         <a:latin typeface="맑은 고딕" charset="0"/>
                         <a:ea typeface="맑은 고딕" charset="0"/>
                         <a:cs typeface="맑은 고딕" charset="0"/>
@@ -23138,7 +23537,7 @@
                         <a:buNone/>
                       </a:pPr>
                       <a:r>
-                        <a:rPr lang="en-US" sz="1050" dirty="0">
+                        <a:rPr lang="en-US" sz="1000" dirty="0">
                           <a:solidFill>
                             <a:srgbClr val="1B2426"/>
                           </a:solidFill>
@@ -23146,9 +23545,9 @@
                           <a:ea typeface="맑은 고딕" pitchFamily="34" charset="-122"/>
                           <a:cs typeface="맑은 고딕" pitchFamily="34" charset="-120"/>
                         </a:rPr>
-                        <a:t>1,440만 / 년</a:t>
+                        <a:t>1,440만</a:t>
                       </a:r>
-                      <a:endParaRPr lang="en-US" sz="1050" dirty="0">
+                      <a:endParaRPr lang="en-US" sz="1000" dirty="0">
                         <a:latin typeface="맑은 고딕" charset="0"/>
                         <a:ea typeface="맑은 고딕" charset="0"/>
                         <a:cs typeface="맑은 고딕" charset="0"/>
@@ -23206,7 +23605,7 @@
                         <a:buNone/>
                       </a:pPr>
                       <a:r>
-                        <a:rPr lang="en-US" sz="1050" dirty="0">
+                        <a:rPr lang="en-US" sz="1000" dirty="0">
                           <a:solidFill>
                             <a:srgbClr val="1B2426"/>
                           </a:solidFill>
@@ -23214,9 +23613,9 @@
                           <a:ea typeface="맑은 고딕" pitchFamily="34" charset="-122"/>
                           <a:cs typeface="맑은 고딕" pitchFamily="34" charset="-120"/>
                         </a:rPr>
-                        <a:t>1,440만 / 년</a:t>
+                        <a:t>1,440만</a:t>
                       </a:r>
-                      <a:endParaRPr lang="en-US" sz="1050" dirty="0">
+                      <a:endParaRPr lang="en-US" sz="1000" dirty="0">
                         <a:latin typeface="맑은 고딕" charset="0"/>
                         <a:ea typeface="맑은 고딕" charset="0"/>
                         <a:cs typeface="맑은 고딕" charset="0"/>
@@ -23274,7 +23673,7 @@
                         <a:buNone/>
                       </a:pPr>
                       <a:r>
-                        <a:rPr lang="en-US" sz="1050" dirty="0">
+                        <a:rPr lang="en-US" sz="1000" dirty="0">
                           <a:solidFill>
                             <a:srgbClr val="1B2426"/>
                           </a:solidFill>
@@ -23282,9 +23681,9 @@
                           <a:ea typeface="맑은 고딕" pitchFamily="34" charset="-122"/>
                           <a:cs typeface="맑은 고딕" pitchFamily="34" charset="-120"/>
                         </a:rPr>
-                        <a:t>1,440만 / 년</a:t>
+                        <a:t>1,440만</a:t>
                       </a:r>
-                      <a:endParaRPr lang="en-US" sz="1050" dirty="0">
+                      <a:endParaRPr lang="en-US" sz="1000" dirty="0">
                         <a:latin typeface="맑은 고딕" charset="0"/>
                         <a:ea typeface="맑은 고딕" charset="0"/>
                         <a:cs typeface="맑은 고딕" charset="0"/>
@@ -23342,7 +23741,7 @@
                         <a:buNone/>
                       </a:pPr>
                       <a:r>
-                        <a:rPr lang="en-US" sz="1050" dirty="0">
+                        <a:rPr lang="en-US" sz="1000" dirty="0">
                           <a:solidFill>
                             <a:srgbClr val="1B2426"/>
                           </a:solidFill>
@@ -23350,9 +23749,9 @@
                           <a:ea typeface="맑은 고딕" pitchFamily="34" charset="-122"/>
                           <a:cs typeface="맑은 고딕" pitchFamily="34" charset="-120"/>
                         </a:rPr>
-                        <a:t>1,440만 / 년</a:t>
+                        <a:t>1,440만</a:t>
                       </a:r>
-                      <a:endParaRPr lang="en-US" sz="1050" dirty="0">
+                      <a:endParaRPr lang="en-US" sz="1000" dirty="0">
                         <a:latin typeface="맑은 고딕" charset="0"/>
                         <a:ea typeface="맑은 고딕" charset="0"/>
                         <a:cs typeface="맑은 고딕" charset="0"/>
@@ -23410,7 +23809,7 @@
                         <a:buNone/>
                       </a:pPr>
                       <a:r>
-                        <a:rPr lang="en-US" sz="1050" dirty="0">
+                        <a:rPr lang="en-US" sz="1000" dirty="0">
                           <a:solidFill>
                             <a:srgbClr val="1B2426"/>
                           </a:solidFill>
@@ -23418,9 +23817,9 @@
                           <a:ea typeface="맑은 고딕" pitchFamily="34" charset="-122"/>
                           <a:cs typeface="맑은 고딕" pitchFamily="34" charset="-120"/>
                         </a:rPr>
-                        <a:t>1,440만 / 년</a:t>
+                        <a:t>1,440만</a:t>
                       </a:r>
-                      <a:endParaRPr lang="en-US" sz="1050" dirty="0">
+                      <a:endParaRPr lang="en-US" sz="1000" dirty="0">
                         <a:latin typeface="맑은 고딕" charset="0"/>
                         <a:ea typeface="맑은 고딕" charset="0"/>
                         <a:cs typeface="맑은 고딕" charset="0"/>
@@ -23469,8 +23868,6 @@
                     </a:solidFill>
                   </a:tcPr>
                 </a:tc>
-              </a:tr>
-              <a:tr h="402336">
                 <a:tc>
                   <a:txBody>
                     <a:bodyPr/>
@@ -23480,7 +23877,77 @@
                         <a:buNone/>
                       </a:pPr>
                       <a:r>
-                        <a:rPr lang="en-US" sz="1050" dirty="0">
+                        <a:rPr lang="en-US" sz="1000" dirty="0">
+                          <a:solidFill>
+                            <a:srgbClr val="1B2426"/>
+                          </a:solidFill>
+                          <a:latin typeface="맑은 고딕" pitchFamily="34" charset="0"/>
+                          <a:ea typeface="맑은 고딕" pitchFamily="34" charset="-122"/>
+                          <a:cs typeface="맑은 고딕" pitchFamily="34" charset="-120"/>
+                        </a:rPr>
+                        <a:t>1,440만</a:t>
+                      </a:r>
+                      <a:endParaRPr lang="en-US" sz="1000" dirty="0">
+                        <a:latin typeface="맑은 고딕" charset="0"/>
+                        <a:ea typeface="맑은 고딕" charset="0"/>
+                        <a:cs typeface="맑은 고딕" charset="0"/>
+                      </a:endParaRPr>
+                    </a:p>
+                  </a:txBody>
+                  <a:tcPr marL="88900" marR="88900" marT="50800" marB="50800" anchor="ctr">
+                    <a:lnL w="6350" cap="flat" cmpd="sng" algn="ctr">
+                      <a:solidFill>
+                        <a:srgbClr val="DCD6C9"/>
+                      </a:solidFill>
+                      <a:prstDash val="solid"/>
+                      <a:round/>
+                      <a:headEnd type="none" w="med" len="med"/>
+                      <a:tailEnd type="none" w="med" len="med"/>
+                    </a:lnL>
+                    <a:lnR w="6350" cap="flat" cmpd="sng" algn="ctr">
+                      <a:solidFill>
+                        <a:srgbClr val="DCD6C9"/>
+                      </a:solidFill>
+                      <a:prstDash val="solid"/>
+                      <a:round/>
+                      <a:headEnd type="none" w="med" len="med"/>
+                      <a:tailEnd type="none" w="med" len="med"/>
+                    </a:lnR>
+                    <a:lnT w="6350" cap="flat" cmpd="sng" algn="ctr">
+                      <a:solidFill>
+                        <a:srgbClr val="DCD6C9"/>
+                      </a:solidFill>
+                      <a:prstDash val="solid"/>
+                      <a:round/>
+                      <a:headEnd type="none" w="med" len="med"/>
+                      <a:tailEnd type="none" w="med" len="med"/>
+                    </a:lnT>
+                    <a:lnB w="6350" cap="flat" cmpd="sng" algn="ctr">
+                      <a:solidFill>
+                        <a:srgbClr val="DCD6C9"/>
+                      </a:solidFill>
+                      <a:prstDash val="solid"/>
+                      <a:round/>
+                      <a:headEnd type="none" w="med" len="med"/>
+                      <a:tailEnd type="none" w="med" len="med"/>
+                    </a:lnB>
+                    <a:solidFill>
+                      <a:srgbClr val="F1EDE4"/>
+                    </a:solidFill>
+                  </a:tcPr>
+                </a:tc>
+              </a:tr>
+              <a:tr h="365760">
+                <a:tc>
+                  <a:txBody>
+                    <a:bodyPr/>
+                    <a:lstStyle/>
+                    <a:p>
+                      <a:pPr indent="0" marL="0">
+                        <a:buNone/>
+                      </a:pPr>
+                      <a:r>
+                        <a:rPr lang="en-US" sz="1000" dirty="0">
                           <a:solidFill>
                             <a:srgbClr val="1B2426"/>
                           </a:solidFill>
@@ -23490,7 +23957,7 @@
                         </a:rPr>
                         <a:t>입학비 — 입회 시 1회</a:t>
                       </a:r>
-                      <a:endParaRPr lang="en-US" sz="1050" dirty="0">
+                      <a:endParaRPr lang="en-US" sz="1000" dirty="0">
                         <a:latin typeface="맑은 고딕" charset="0"/>
                         <a:ea typeface="맑은 고딕" charset="0"/>
                         <a:cs typeface="맑은 고딕" charset="0"/>
@@ -23548,7 +24015,7 @@
                         <a:buNone/>
                       </a:pPr>
                       <a:r>
-                        <a:rPr lang="en-US" sz="1050" dirty="0">
+                        <a:rPr lang="en-US" sz="1000" dirty="0">
                           <a:solidFill>
                             <a:srgbClr val="1B2426"/>
                           </a:solidFill>
@@ -23558,7 +24025,7 @@
                         </a:rPr>
                         <a:t>500만</a:t>
                       </a:r>
-                      <a:endParaRPr lang="en-US" sz="1050" dirty="0">
+                      <a:endParaRPr lang="en-US" sz="1000" dirty="0">
                         <a:latin typeface="맑은 고딕" charset="0"/>
                         <a:ea typeface="맑은 고딕" charset="0"/>
                         <a:cs typeface="맑은 고딕" charset="0"/>
@@ -23616,7 +24083,7 @@
                         <a:buNone/>
                       </a:pPr>
                       <a:r>
-                        <a:rPr lang="en-US" sz="1050" dirty="0">
+                        <a:rPr lang="en-US" sz="1000" dirty="0">
                           <a:solidFill>
                             <a:srgbClr val="1B2426"/>
                           </a:solidFill>
@@ -23626,7 +24093,7 @@
                         </a:rPr>
                         <a:t>500만</a:t>
                       </a:r>
-                      <a:endParaRPr lang="en-US" sz="1050" dirty="0">
+                      <a:endParaRPr lang="en-US" sz="1000" dirty="0">
                         <a:latin typeface="맑은 고딕" charset="0"/>
                         <a:ea typeface="맑은 고딕" charset="0"/>
                         <a:cs typeface="맑은 고딕" charset="0"/>
@@ -23684,7 +24151,7 @@
                         <a:buNone/>
                       </a:pPr>
                       <a:r>
-                        <a:rPr lang="en-US" sz="1050" dirty="0">
+                        <a:rPr lang="en-US" sz="1000" dirty="0">
                           <a:solidFill>
                             <a:srgbClr val="1B2426"/>
                           </a:solidFill>
@@ -23694,7 +24161,7 @@
                         </a:rPr>
                         <a:t>500만</a:t>
                       </a:r>
-                      <a:endParaRPr lang="en-US" sz="1050" dirty="0">
+                      <a:endParaRPr lang="en-US" sz="1000" dirty="0">
                         <a:latin typeface="맑은 고딕" charset="0"/>
                         <a:ea typeface="맑은 고딕" charset="0"/>
                         <a:cs typeface="맑은 고딕" charset="0"/>
@@ -23752,7 +24219,7 @@
                         <a:buNone/>
                       </a:pPr>
                       <a:r>
-                        <a:rPr lang="en-US" sz="1050" dirty="0">
+                        <a:rPr lang="en-US" sz="1000" dirty="0">
                           <a:solidFill>
                             <a:srgbClr val="1B2426"/>
                           </a:solidFill>
@@ -23762,7 +24229,7 @@
                         </a:rPr>
                         <a:t>500만</a:t>
                       </a:r>
-                      <a:endParaRPr lang="en-US" sz="1050" dirty="0">
+                      <a:endParaRPr lang="en-US" sz="1000" dirty="0">
                         <a:latin typeface="맑은 고딕" charset="0"/>
                         <a:ea typeface="맑은 고딕" charset="0"/>
                         <a:cs typeface="맑은 고딕" charset="0"/>
@@ -23820,7 +24287,7 @@
                         <a:buNone/>
                       </a:pPr>
                       <a:r>
-                        <a:rPr lang="en-US" sz="1050" dirty="0">
+                        <a:rPr lang="en-US" sz="1000" dirty="0">
                           <a:solidFill>
                             <a:srgbClr val="1B2426"/>
                           </a:solidFill>
@@ -23830,7 +24297,7 @@
                         </a:rPr>
                         <a:t>500만</a:t>
                       </a:r>
-                      <a:endParaRPr lang="en-US" sz="1050" dirty="0">
+                      <a:endParaRPr lang="en-US" sz="1000" dirty="0">
                         <a:latin typeface="맑은 고딕" charset="0"/>
                         <a:ea typeface="맑은 고딕" charset="0"/>
                         <a:cs typeface="맑은 고딕" charset="0"/>
@@ -23879,8 +24346,6 @@
                     </a:solidFill>
                   </a:tcPr>
                 </a:tc>
-              </a:tr>
-              <a:tr h="402336">
                 <a:tc>
                   <a:txBody>
                     <a:bodyPr/>
@@ -23890,7 +24355,77 @@
                         <a:buNone/>
                       </a:pPr>
                       <a:r>
-                        <a:rPr lang="en-US" sz="1050" dirty="0">
+                        <a:rPr lang="en-US" sz="1000" dirty="0">
+                          <a:solidFill>
+                            <a:srgbClr val="1B2426"/>
+                          </a:solidFill>
+                          <a:latin typeface="맑은 고딕" pitchFamily="34" charset="0"/>
+                          <a:ea typeface="맑은 고딕" pitchFamily="34" charset="-122"/>
+                          <a:cs typeface="맑은 고딕" pitchFamily="34" charset="-120"/>
+                        </a:rPr>
+                        <a:t>500만</a:t>
+                      </a:r>
+                      <a:endParaRPr lang="en-US" sz="1000" dirty="0">
+                        <a:latin typeface="맑은 고딕" charset="0"/>
+                        <a:ea typeface="맑은 고딕" charset="0"/>
+                        <a:cs typeface="맑은 고딕" charset="0"/>
+                      </a:endParaRPr>
+                    </a:p>
+                  </a:txBody>
+                  <a:tcPr marL="88900" marR="88900" marT="50800" marB="50800" anchor="ctr">
+                    <a:lnL w="6350" cap="flat" cmpd="sng" algn="ctr">
+                      <a:solidFill>
+                        <a:srgbClr val="DCD6C9"/>
+                      </a:solidFill>
+                      <a:prstDash val="solid"/>
+                      <a:round/>
+                      <a:headEnd type="none" w="med" len="med"/>
+                      <a:tailEnd type="none" w="med" len="med"/>
+                    </a:lnL>
+                    <a:lnR w="6350" cap="flat" cmpd="sng" algn="ctr">
+                      <a:solidFill>
+                        <a:srgbClr val="DCD6C9"/>
+                      </a:solidFill>
+                      <a:prstDash val="solid"/>
+                      <a:round/>
+                      <a:headEnd type="none" w="med" len="med"/>
+                      <a:tailEnd type="none" w="med" len="med"/>
+                    </a:lnR>
+                    <a:lnT w="6350" cap="flat" cmpd="sng" algn="ctr">
+                      <a:solidFill>
+                        <a:srgbClr val="DCD6C9"/>
+                      </a:solidFill>
+                      <a:prstDash val="solid"/>
+                      <a:round/>
+                      <a:headEnd type="none" w="med" len="med"/>
+                      <a:tailEnd type="none" w="med" len="med"/>
+                    </a:lnT>
+                    <a:lnB w="6350" cap="flat" cmpd="sng" algn="ctr">
+                      <a:solidFill>
+                        <a:srgbClr val="DCD6C9"/>
+                      </a:solidFill>
+                      <a:prstDash val="solid"/>
+                      <a:round/>
+                      <a:headEnd type="none" w="med" len="med"/>
+                      <a:tailEnd type="none" w="med" len="med"/>
+                    </a:lnB>
+                    <a:solidFill>
+                      <a:srgbClr val="FFFFFF"/>
+                    </a:solidFill>
+                  </a:tcPr>
+                </a:tc>
+              </a:tr>
+              <a:tr h="365760">
+                <a:tc>
+                  <a:txBody>
+                    <a:bodyPr/>
+                    <a:lstStyle/>
+                    <a:p>
+                      <a:pPr indent="0" marL="0">
+                        <a:buNone/>
+                      </a:pPr>
+                      <a:r>
+                        <a:rPr lang="en-US" sz="1000" dirty="0">
                           <a:solidFill>
                             <a:srgbClr val="1B2426"/>
                           </a:solidFill>
@@ -23900,7 +24435,7 @@
                         </a:rPr>
                         <a:t>1년차 소계 (입학비 제외)</a:t>
                       </a:r>
-                      <a:endParaRPr lang="en-US" sz="1050" dirty="0">
+                      <a:endParaRPr lang="en-US" sz="1000" dirty="0">
                         <a:latin typeface="맑은 고딕" charset="0"/>
                         <a:ea typeface="맑은 고딕" charset="0"/>
                         <a:cs typeface="맑은 고딕" charset="0"/>
@@ -23958,7 +24493,7 @@
                         <a:buNone/>
                       </a:pPr>
                       <a:r>
-                        <a:rPr lang="en-US" sz="1050" dirty="0">
+                        <a:rPr lang="en-US" sz="1000" dirty="0">
                           <a:solidFill>
                             <a:srgbClr val="1B2426"/>
                           </a:solidFill>
@@ -23966,9 +24501,9 @@
                           <a:ea typeface="맑은 고딕" pitchFamily="34" charset="-122"/>
                           <a:cs typeface="맑은 고딕" pitchFamily="34" charset="-120"/>
                         </a:rPr>
-                        <a:t>약 2,380만</a:t>
+                        <a:t>2,380만</a:t>
                       </a:r>
-                      <a:endParaRPr lang="en-US" sz="1050" dirty="0">
+                      <a:endParaRPr lang="en-US" sz="1000" dirty="0">
                         <a:latin typeface="맑은 고딕" charset="0"/>
                         <a:ea typeface="맑은 고딕" charset="0"/>
                         <a:cs typeface="맑은 고딕" charset="0"/>
@@ -24026,7 +24561,7 @@
                         <a:buNone/>
                       </a:pPr>
                       <a:r>
-                        <a:rPr lang="en-US" sz="1050" dirty="0">
+                        <a:rPr lang="en-US" sz="1000" dirty="0">
                           <a:solidFill>
                             <a:srgbClr val="1B2426"/>
                           </a:solidFill>
@@ -24034,9 +24569,9 @@
                           <a:ea typeface="맑은 고딕" pitchFamily="34" charset="-122"/>
                           <a:cs typeface="맑은 고딕" pitchFamily="34" charset="-120"/>
                         </a:rPr>
-                        <a:t>약 3,256만</a:t>
+                        <a:t>3,256만</a:t>
                       </a:r>
-                      <a:endParaRPr lang="en-US" sz="1050" dirty="0">
+                      <a:endParaRPr lang="en-US" sz="1000" dirty="0">
                         <a:latin typeface="맑은 고딕" charset="0"/>
                         <a:ea typeface="맑은 고딕" charset="0"/>
                         <a:cs typeface="맑은 고딕" charset="0"/>
@@ -24094,7 +24629,7 @@
                         <a:buNone/>
                       </a:pPr>
                       <a:r>
-                        <a:rPr lang="en-US" sz="1050" dirty="0">
+                        <a:rPr lang="en-US" sz="1000" dirty="0">
                           <a:solidFill>
                             <a:srgbClr val="1B2426"/>
                           </a:solidFill>
@@ -24102,9 +24637,9 @@
                           <a:ea typeface="맑은 고딕" pitchFamily="34" charset="-122"/>
                           <a:cs typeface="맑은 고딕" pitchFamily="34" charset="-120"/>
                         </a:rPr>
-                        <a:t>약 2,868만</a:t>
+                        <a:t>2,380만</a:t>
                       </a:r>
-                      <a:endParaRPr lang="en-US" sz="1050" dirty="0">
+                      <a:endParaRPr lang="en-US" sz="1000" dirty="0">
                         <a:latin typeface="맑은 고딕" charset="0"/>
                         <a:ea typeface="맑은 고딕" charset="0"/>
                         <a:cs typeface="맑은 고딕" charset="0"/>
@@ -24162,7 +24697,7 @@
                         <a:buNone/>
                       </a:pPr>
                       <a:r>
-                        <a:rPr lang="en-US" sz="1050" dirty="0">
+                        <a:rPr lang="en-US" sz="1000" dirty="0">
                           <a:solidFill>
                             <a:srgbClr val="1B2426"/>
                           </a:solidFill>
@@ -24170,9 +24705,9 @@
                           <a:ea typeface="맑은 고딕" pitchFamily="34" charset="-122"/>
                           <a:cs typeface="맑은 고딕" pitchFamily="34" charset="-120"/>
                         </a:rPr>
-                        <a:t>약 2,380만</a:t>
+                        <a:t>2,868만</a:t>
                       </a:r>
-                      <a:endParaRPr lang="en-US" sz="1050" dirty="0">
+                      <a:endParaRPr lang="en-US" sz="1000" dirty="0">
                         <a:latin typeface="맑은 고딕" charset="0"/>
                         <a:ea typeface="맑은 고딕" charset="0"/>
                         <a:cs typeface="맑은 고딕" charset="0"/>
@@ -24230,7 +24765,7 @@
                         <a:buNone/>
                       </a:pPr>
                       <a:r>
-                        <a:rPr lang="en-US" sz="1050" dirty="0">
+                        <a:rPr lang="en-US" sz="1000" dirty="0">
                           <a:solidFill>
                             <a:srgbClr val="1B2426"/>
                           </a:solidFill>
@@ -24238,9 +24773,9 @@
                           <a:ea typeface="맑은 고딕" pitchFamily="34" charset="-122"/>
                           <a:cs typeface="맑은 고딕" pitchFamily="34" charset="-120"/>
                         </a:rPr>
-                        <a:t>약 2,868만</a:t>
+                        <a:t>2,380만</a:t>
                       </a:r>
-                      <a:endParaRPr lang="en-US" sz="1050" dirty="0">
+                      <a:endParaRPr lang="en-US" sz="1000" dirty="0">
                         <a:latin typeface="맑은 고딕" charset="0"/>
                         <a:ea typeface="맑은 고딕" charset="0"/>
                         <a:cs typeface="맑은 고딕" charset="0"/>
@@ -24289,8 +24824,6 @@
                     </a:solidFill>
                   </a:tcPr>
                 </a:tc>
-              </a:tr>
-              <a:tr h="402336">
                 <a:tc>
                   <a:txBody>
                     <a:bodyPr/>
@@ -24300,7 +24833,77 @@
                         <a:buNone/>
                       </a:pPr>
                       <a:r>
-                        <a:rPr lang="en-US" sz="1050" dirty="0">
+                        <a:rPr lang="en-US" sz="1000" dirty="0">
+                          <a:solidFill>
+                            <a:srgbClr val="1B2426"/>
+                          </a:solidFill>
+                          <a:latin typeface="맑은 고딕" pitchFamily="34" charset="0"/>
+                          <a:ea typeface="맑은 고딕" pitchFamily="34" charset="-122"/>
+                          <a:cs typeface="맑은 고딕" pitchFamily="34" charset="-120"/>
+                        </a:rPr>
+                        <a:t>2,868만</a:t>
+                      </a:r>
+                      <a:endParaRPr lang="en-US" sz="1000" dirty="0">
+                        <a:latin typeface="맑은 고딕" charset="0"/>
+                        <a:ea typeface="맑은 고딕" charset="0"/>
+                        <a:cs typeface="맑은 고딕" charset="0"/>
+                      </a:endParaRPr>
+                    </a:p>
+                  </a:txBody>
+                  <a:tcPr marL="88900" marR="88900" marT="50800" marB="50800" anchor="ctr">
+                    <a:lnL w="6350" cap="flat" cmpd="sng" algn="ctr">
+                      <a:solidFill>
+                        <a:srgbClr val="DCD6C9"/>
+                      </a:solidFill>
+                      <a:prstDash val="solid"/>
+                      <a:round/>
+                      <a:headEnd type="none" w="med" len="med"/>
+                      <a:tailEnd type="none" w="med" len="med"/>
+                    </a:lnL>
+                    <a:lnR w="6350" cap="flat" cmpd="sng" algn="ctr">
+                      <a:solidFill>
+                        <a:srgbClr val="DCD6C9"/>
+                      </a:solidFill>
+                      <a:prstDash val="solid"/>
+                      <a:round/>
+                      <a:headEnd type="none" w="med" len="med"/>
+                      <a:tailEnd type="none" w="med" len="med"/>
+                    </a:lnR>
+                    <a:lnT w="6350" cap="flat" cmpd="sng" algn="ctr">
+                      <a:solidFill>
+                        <a:srgbClr val="DCD6C9"/>
+                      </a:solidFill>
+                      <a:prstDash val="solid"/>
+                      <a:round/>
+                      <a:headEnd type="none" w="med" len="med"/>
+                      <a:tailEnd type="none" w="med" len="med"/>
+                    </a:lnT>
+                    <a:lnB w="6350" cap="flat" cmpd="sng" algn="ctr">
+                      <a:solidFill>
+                        <a:srgbClr val="DCD6C9"/>
+                      </a:solidFill>
+                      <a:prstDash val="solid"/>
+                      <a:round/>
+                      <a:headEnd type="none" w="med" len="med"/>
+                      <a:tailEnd type="none" w="med" len="med"/>
+                    </a:lnB>
+                    <a:solidFill>
+                      <a:srgbClr val="F1EDE4"/>
+                    </a:solidFill>
+                  </a:tcPr>
+                </a:tc>
+              </a:tr>
+              <a:tr h="365760">
+                <a:tc>
+                  <a:txBody>
+                    <a:bodyPr/>
+                    <a:lstStyle/>
+                    <a:p>
+                      <a:pPr indent="0" marL="0">
+                        <a:buNone/>
+                      </a:pPr>
+                      <a:r>
+                        <a:rPr lang="en-US" sz="1000" dirty="0">
                           <a:solidFill>
                             <a:srgbClr val="1B2426"/>
                           </a:solidFill>
@@ -24310,7 +24913,7 @@
                         </a:rPr>
                         <a:t>1년차 소계 (입학비 포함)</a:t>
                       </a:r>
-                      <a:endParaRPr lang="en-US" sz="1050" dirty="0">
+                      <a:endParaRPr lang="en-US" sz="1000" dirty="0">
                         <a:latin typeface="맑은 고딕" charset="0"/>
                         <a:ea typeface="맑은 고딕" charset="0"/>
                         <a:cs typeface="맑은 고딕" charset="0"/>
@@ -24368,7 +24971,7 @@
                         <a:buNone/>
                       </a:pPr>
                       <a:r>
-                        <a:rPr lang="en-US" sz="1050" dirty="0">
+                        <a:rPr lang="en-US" sz="1000" dirty="0">
                           <a:solidFill>
                             <a:srgbClr val="1B2426"/>
                           </a:solidFill>
@@ -24376,9 +24979,9 @@
                           <a:ea typeface="맑은 고딕" pitchFamily="34" charset="-122"/>
                           <a:cs typeface="맑은 고딕" pitchFamily="34" charset="-120"/>
                         </a:rPr>
-                        <a:t>약 2,880만</a:t>
+                        <a:t>2,880만</a:t>
                       </a:r>
-                      <a:endParaRPr lang="en-US" sz="1050" dirty="0">
+                      <a:endParaRPr lang="en-US" sz="1000" dirty="0">
                         <a:latin typeface="맑은 고딕" charset="0"/>
                         <a:ea typeface="맑은 고딕" charset="0"/>
                         <a:cs typeface="맑은 고딕" charset="0"/>
@@ -24436,7 +25039,7 @@
                         <a:buNone/>
                       </a:pPr>
                       <a:r>
-                        <a:rPr lang="en-US" sz="1050" dirty="0">
+                        <a:rPr lang="en-US" sz="1000" dirty="0">
                           <a:solidFill>
                             <a:srgbClr val="1B2426"/>
                           </a:solidFill>
@@ -24444,9 +25047,9 @@
                           <a:ea typeface="맑은 고딕" pitchFamily="34" charset="-122"/>
                           <a:cs typeface="맑은 고딕" pitchFamily="34" charset="-120"/>
                         </a:rPr>
-                        <a:t>약 3,756만</a:t>
+                        <a:t>3,756만</a:t>
                       </a:r>
-                      <a:endParaRPr lang="en-US" sz="1050" dirty="0">
+                      <a:endParaRPr lang="en-US" sz="1000" dirty="0">
                         <a:latin typeface="맑은 고딕" charset="0"/>
                         <a:ea typeface="맑은 고딕" charset="0"/>
                         <a:cs typeface="맑은 고딕" charset="0"/>
@@ -24504,7 +25107,7 @@
                         <a:buNone/>
                       </a:pPr>
                       <a:r>
-                        <a:rPr lang="en-US" sz="1050" dirty="0">
+                        <a:rPr lang="en-US" sz="1000" dirty="0">
                           <a:solidFill>
                             <a:srgbClr val="1B2426"/>
                           </a:solidFill>
@@ -24512,9 +25115,9 @@
                           <a:ea typeface="맑은 고딕" pitchFamily="34" charset="-122"/>
                           <a:cs typeface="맑은 고딕" pitchFamily="34" charset="-120"/>
                         </a:rPr>
-                        <a:t>약 3,368만</a:t>
+                        <a:t>2,880만</a:t>
                       </a:r>
-                      <a:endParaRPr lang="en-US" sz="1050" dirty="0">
+                      <a:endParaRPr lang="en-US" sz="1000" dirty="0">
                         <a:latin typeface="맑은 고딕" charset="0"/>
                         <a:ea typeface="맑은 고딕" charset="0"/>
                         <a:cs typeface="맑은 고딕" charset="0"/>
@@ -24572,7 +25175,7 @@
                         <a:buNone/>
                       </a:pPr>
                       <a:r>
-                        <a:rPr lang="en-US" sz="1050" dirty="0">
+                        <a:rPr lang="en-US" sz="1000" dirty="0">
                           <a:solidFill>
                             <a:srgbClr val="1B2426"/>
                           </a:solidFill>
@@ -24580,9 +25183,9 @@
                           <a:ea typeface="맑은 고딕" pitchFamily="34" charset="-122"/>
                           <a:cs typeface="맑은 고딕" pitchFamily="34" charset="-120"/>
                         </a:rPr>
-                        <a:t>약 2,880만</a:t>
+                        <a:t>3,368만</a:t>
                       </a:r>
-                      <a:endParaRPr lang="en-US" sz="1050" dirty="0">
+                      <a:endParaRPr lang="en-US" sz="1000" dirty="0">
                         <a:latin typeface="맑은 고딕" charset="0"/>
                         <a:ea typeface="맑은 고딕" charset="0"/>
                         <a:cs typeface="맑은 고딕" charset="0"/>
@@ -24640,7 +25243,7 @@
                         <a:buNone/>
                       </a:pPr>
                       <a:r>
-                        <a:rPr lang="en-US" sz="1050" dirty="0">
+                        <a:rPr lang="en-US" sz="1000" dirty="0">
                           <a:solidFill>
                             <a:srgbClr val="1B2426"/>
                           </a:solidFill>
@@ -24648,9 +25251,9 @@
                           <a:ea typeface="맑은 고딕" pitchFamily="34" charset="-122"/>
                           <a:cs typeface="맑은 고딕" pitchFamily="34" charset="-120"/>
                         </a:rPr>
-                        <a:t>약 3,368만</a:t>
+                        <a:t>2,880만</a:t>
                       </a:r>
-                      <a:endParaRPr lang="en-US" sz="1050" dirty="0">
+                      <a:endParaRPr lang="en-US" sz="1000" dirty="0">
                         <a:latin typeface="맑은 고딕" charset="0"/>
                         <a:ea typeface="맑은 고딕" charset="0"/>
                         <a:cs typeface="맑은 고딕" charset="0"/>
@@ -24699,8 +25302,6 @@
                     </a:solidFill>
                   </a:tcPr>
                 </a:tc>
-              </a:tr>
-              <a:tr h="402336">
                 <a:tc>
                   <a:txBody>
                     <a:bodyPr/>
@@ -24710,7 +25311,77 @@
                         <a:buNone/>
                       </a:pPr>
                       <a:r>
-                        <a:rPr lang="en-US" sz="1050" dirty="0">
+                        <a:rPr lang="en-US" sz="1000" dirty="0">
+                          <a:solidFill>
+                            <a:srgbClr val="1B2426"/>
+                          </a:solidFill>
+                          <a:latin typeface="맑은 고딕" pitchFamily="34" charset="0"/>
+                          <a:ea typeface="맑은 고딕" pitchFamily="34" charset="-122"/>
+                          <a:cs typeface="맑은 고딕" pitchFamily="34" charset="-120"/>
+                        </a:rPr>
+                        <a:t>3,368만</a:t>
+                      </a:r>
+                      <a:endParaRPr lang="en-US" sz="1000" dirty="0">
+                        <a:latin typeface="맑은 고딕" charset="0"/>
+                        <a:ea typeface="맑은 고딕" charset="0"/>
+                        <a:cs typeface="맑은 고딕" charset="0"/>
+                      </a:endParaRPr>
+                    </a:p>
+                  </a:txBody>
+                  <a:tcPr marL="88900" marR="88900" marT="50800" marB="50800" anchor="ctr">
+                    <a:lnL w="6350" cap="flat" cmpd="sng" algn="ctr">
+                      <a:solidFill>
+                        <a:srgbClr val="DCD6C9"/>
+                      </a:solidFill>
+                      <a:prstDash val="solid"/>
+                      <a:round/>
+                      <a:headEnd type="none" w="med" len="med"/>
+                      <a:tailEnd type="none" w="med" len="med"/>
+                    </a:lnL>
+                    <a:lnR w="6350" cap="flat" cmpd="sng" algn="ctr">
+                      <a:solidFill>
+                        <a:srgbClr val="DCD6C9"/>
+                      </a:solidFill>
+                      <a:prstDash val="solid"/>
+                      <a:round/>
+                      <a:headEnd type="none" w="med" len="med"/>
+                      <a:tailEnd type="none" w="med" len="med"/>
+                    </a:lnR>
+                    <a:lnT w="6350" cap="flat" cmpd="sng" algn="ctr">
+                      <a:solidFill>
+                        <a:srgbClr val="DCD6C9"/>
+                      </a:solidFill>
+                      <a:prstDash val="solid"/>
+                      <a:round/>
+                      <a:headEnd type="none" w="med" len="med"/>
+                      <a:tailEnd type="none" w="med" len="med"/>
+                    </a:lnT>
+                    <a:lnB w="6350" cap="flat" cmpd="sng" algn="ctr">
+                      <a:solidFill>
+                        <a:srgbClr val="DCD6C9"/>
+                      </a:solidFill>
+                      <a:prstDash val="solid"/>
+                      <a:round/>
+                      <a:headEnd type="none" w="med" len="med"/>
+                      <a:tailEnd type="none" w="med" len="med"/>
+                    </a:lnB>
+                    <a:solidFill>
+                      <a:srgbClr val="FFFFFF"/>
+                    </a:solidFill>
+                  </a:tcPr>
+                </a:tc>
+              </a:tr>
+              <a:tr h="365760">
+                <a:tc>
+                  <a:txBody>
+                    <a:bodyPr/>
+                    <a:lstStyle/>
+                    <a:p>
+                      <a:pPr indent="0" marL="0">
+                        <a:buNone/>
+                      </a:pPr>
+                      <a:r>
+                        <a:rPr lang="en-US" sz="1000" dirty="0">
                           <a:solidFill>
                             <a:srgbClr val="1B2426"/>
                           </a:solidFill>
@@ -24720,7 +25391,7 @@
                         </a:rPr>
                         <a:t>2년차 이후 (연)</a:t>
                       </a:r>
-                      <a:endParaRPr lang="en-US" sz="1050" dirty="0">
+                      <a:endParaRPr lang="en-US" sz="1000" dirty="0">
                         <a:latin typeface="맑은 고딕" charset="0"/>
                         <a:ea typeface="맑은 고딕" charset="0"/>
                         <a:cs typeface="맑은 고딕" charset="0"/>
@@ -24778,7 +25449,7 @@
                         <a:buNone/>
                       </a:pPr>
                       <a:r>
-                        <a:rPr lang="en-US" sz="1050" dirty="0">
+                        <a:rPr lang="en-US" sz="1000" dirty="0">
                           <a:solidFill>
                             <a:srgbClr val="1B2426"/>
                           </a:solidFill>
@@ -24786,9 +25457,9 @@
                           <a:ea typeface="맑은 고딕" pitchFamily="34" charset="-122"/>
                           <a:cs typeface="맑은 고딕" pitchFamily="34" charset="-120"/>
                         </a:rPr>
-                        <a:t>2,490만~2,870만</a:t>
+                        <a:t>2,490 ~ 2,870만</a:t>
                       </a:r>
-                      <a:endParaRPr lang="en-US" sz="1050" dirty="0">
+                      <a:endParaRPr lang="en-US" sz="1000" dirty="0">
                         <a:latin typeface="맑은 고딕" charset="0"/>
                         <a:ea typeface="맑은 고딕" charset="0"/>
                         <a:cs typeface="맑은 고딕" charset="0"/>
@@ -24846,7 +25517,7 @@
                         <a:buNone/>
                       </a:pPr>
                       <a:r>
-                        <a:rPr lang="en-US" sz="1050" dirty="0">
+                        <a:rPr lang="en-US" sz="1000" dirty="0">
                           <a:solidFill>
                             <a:srgbClr val="1B2426"/>
                           </a:solidFill>
@@ -24854,9 +25525,9 @@
                           <a:ea typeface="맑은 고딕" pitchFamily="34" charset="-122"/>
                           <a:cs typeface="맑은 고딕" pitchFamily="34" charset="-120"/>
                         </a:rPr>
-                        <a:t>약 3,321만</a:t>
+                        <a:t>3,321만</a:t>
                       </a:r>
-                      <a:endParaRPr lang="en-US" sz="1050" dirty="0">
+                      <a:endParaRPr lang="en-US" sz="1000" dirty="0">
                         <a:latin typeface="맑은 고딕" charset="0"/>
                         <a:ea typeface="맑은 고딕" charset="0"/>
                         <a:cs typeface="맑은 고딕" charset="0"/>
@@ -24914,7 +25585,7 @@
                         <a:buNone/>
                       </a:pPr>
                       <a:r>
-                        <a:rPr lang="en-US" sz="1050" dirty="0">
+                        <a:rPr lang="en-US" sz="1000" dirty="0">
                           <a:solidFill>
                             <a:srgbClr val="1B2426"/>
                           </a:solidFill>
@@ -24922,9 +25593,9 @@
                           <a:ea typeface="맑은 고딕" pitchFamily="34" charset="-122"/>
                           <a:cs typeface="맑은 고딕" pitchFamily="34" charset="-120"/>
                         </a:rPr>
-                        <a:t>약 3,445만</a:t>
+                        <a:t>3,321만</a:t>
                       </a:r>
-                      <a:endParaRPr lang="en-US" sz="1050" dirty="0">
+                      <a:endParaRPr lang="en-US" sz="1000" dirty="0">
                         <a:latin typeface="맑은 고딕" charset="0"/>
                         <a:ea typeface="맑은 고딕" charset="0"/>
                         <a:cs typeface="맑은 고딕" charset="0"/>
@@ -24982,7 +25653,7 @@
                         <a:buNone/>
                       </a:pPr>
                       <a:r>
-                        <a:rPr lang="en-US" sz="1050" dirty="0">
+                        <a:rPr lang="en-US" sz="1000" dirty="0">
                           <a:solidFill>
                             <a:srgbClr val="1B2426"/>
                           </a:solidFill>
@@ -24990,9 +25661,9 @@
                           <a:ea typeface="맑은 고딕" pitchFamily="34" charset="-122"/>
                           <a:cs typeface="맑은 고딕" pitchFamily="34" charset="-120"/>
                         </a:rPr>
-                        <a:t>약 3,891만</a:t>
+                        <a:t>3,445만</a:t>
                       </a:r>
-                      <a:endParaRPr lang="en-US" sz="1050" dirty="0">
+                      <a:endParaRPr lang="en-US" sz="1000" dirty="0">
                         <a:latin typeface="맑은 고딕" charset="0"/>
                         <a:ea typeface="맑은 고딕" charset="0"/>
                         <a:cs typeface="맑은 고딕" charset="0"/>
@@ -25050,7 +25721,7 @@
                         <a:buNone/>
                       </a:pPr>
                       <a:r>
-                        <a:rPr lang="en-US" sz="1050" dirty="0">
+                        <a:rPr lang="en-US" sz="1000" dirty="0">
                           <a:solidFill>
                             <a:srgbClr val="1B2426"/>
                           </a:solidFill>
@@ -25058,9 +25729,9 @@
                           <a:ea typeface="맑은 고딕" pitchFamily="34" charset="-122"/>
                           <a:cs typeface="맑은 고딕" pitchFamily="34" charset="-120"/>
                         </a:rPr>
-                        <a:t>약 3,851만</a:t>
+                        <a:t>3,891만</a:t>
                       </a:r>
-                      <a:endParaRPr lang="en-US" sz="1050" dirty="0">
+                      <a:endParaRPr lang="en-US" sz="1000" dirty="0">
                         <a:latin typeface="맑은 고딕" charset="0"/>
                         <a:ea typeface="맑은 고딕" charset="0"/>
                         <a:cs typeface="맑은 고딕" charset="0"/>
@@ -25109,8 +25780,6 @@
                     </a:solidFill>
                   </a:tcPr>
                 </a:tc>
-              </a:tr>
-              <a:tr h="402336">
                 <a:tc>
                   <a:txBody>
                     <a:bodyPr/>
@@ -25120,7 +25789,77 @@
                         <a:buNone/>
                       </a:pPr>
                       <a:r>
-                        <a:rPr lang="en-US" sz="1050" dirty="0">
+                        <a:rPr lang="en-US" sz="1000" dirty="0">
+                          <a:solidFill>
+                            <a:srgbClr val="1B2426"/>
+                          </a:solidFill>
+                          <a:latin typeface="맑은 고딕" pitchFamily="34" charset="0"/>
+                          <a:ea typeface="맑은 고딕" pitchFamily="34" charset="-122"/>
+                          <a:cs typeface="맑은 고딕" pitchFamily="34" charset="-120"/>
+                        </a:rPr>
+                        <a:t>3,851만</a:t>
+                      </a:r>
+                      <a:endParaRPr lang="en-US" sz="1000" dirty="0">
+                        <a:latin typeface="맑은 고딕" charset="0"/>
+                        <a:ea typeface="맑은 고딕" charset="0"/>
+                        <a:cs typeface="맑은 고딕" charset="0"/>
+                      </a:endParaRPr>
+                    </a:p>
+                  </a:txBody>
+                  <a:tcPr marL="88900" marR="88900" marT="50800" marB="50800" anchor="ctr">
+                    <a:lnL w="6350" cap="flat" cmpd="sng" algn="ctr">
+                      <a:solidFill>
+                        <a:srgbClr val="DCD6C9"/>
+                      </a:solidFill>
+                      <a:prstDash val="solid"/>
+                      <a:round/>
+                      <a:headEnd type="none" w="med" len="med"/>
+                      <a:tailEnd type="none" w="med" len="med"/>
+                    </a:lnL>
+                    <a:lnR w="6350" cap="flat" cmpd="sng" algn="ctr">
+                      <a:solidFill>
+                        <a:srgbClr val="DCD6C9"/>
+                      </a:solidFill>
+                      <a:prstDash val="solid"/>
+                      <a:round/>
+                      <a:headEnd type="none" w="med" len="med"/>
+                      <a:tailEnd type="none" w="med" len="med"/>
+                    </a:lnR>
+                    <a:lnT w="6350" cap="flat" cmpd="sng" algn="ctr">
+                      <a:solidFill>
+                        <a:srgbClr val="DCD6C9"/>
+                      </a:solidFill>
+                      <a:prstDash val="solid"/>
+                      <a:round/>
+                      <a:headEnd type="none" w="med" len="med"/>
+                      <a:tailEnd type="none" w="med" len="med"/>
+                    </a:lnT>
+                    <a:lnB w="6350" cap="flat" cmpd="sng" algn="ctr">
+                      <a:solidFill>
+                        <a:srgbClr val="DCD6C9"/>
+                      </a:solidFill>
+                      <a:prstDash val="solid"/>
+                      <a:round/>
+                      <a:headEnd type="none" w="med" len="med"/>
+                      <a:tailEnd type="none" w="med" len="med"/>
+                    </a:lnB>
+                    <a:solidFill>
+                      <a:srgbClr val="F1EDE4"/>
+                    </a:solidFill>
+                  </a:tcPr>
+                </a:tc>
+              </a:tr>
+              <a:tr h="365760">
+                <a:tc>
+                  <a:txBody>
+                    <a:bodyPr/>
+                    <a:lstStyle/>
+                    <a:p>
+                      <a:pPr indent="0" marL="0">
+                        <a:buNone/>
+                      </a:pPr>
+                      <a:r>
+                        <a:rPr lang="en-US" sz="1000" dirty="0">
                           <a:solidFill>
                             <a:srgbClr val="1B2426"/>
                           </a:solidFill>
@@ -25130,7 +25869,7 @@
                         </a:rPr>
                         <a:t>졸업까지 총액</a:t>
                       </a:r>
-                      <a:endParaRPr lang="en-US" sz="1050" dirty="0">
+                      <a:endParaRPr lang="en-US" sz="1000" dirty="0">
                         <a:latin typeface="맑은 고딕" charset="0"/>
                         <a:ea typeface="맑은 고딕" charset="0"/>
                         <a:cs typeface="맑은 고딕" charset="0"/>
@@ -25188,7 +25927,7 @@
                         <a:buNone/>
                       </a:pPr>
                       <a:r>
-                        <a:rPr lang="en-US" sz="1050" dirty="0">
+                        <a:rPr lang="en-US" sz="1000" dirty="0">
                           <a:solidFill>
                             <a:srgbClr val="1B2426"/>
                           </a:solidFill>
@@ -25196,9 +25935,30 @@
                           <a:ea typeface="맑은 고딕" pitchFamily="34" charset="-122"/>
                           <a:cs typeface="맑은 고딕" pitchFamily="34" charset="-120"/>
                         </a:rPr>
-                        <a:t>1억 350만~1억 1,490만</a:t>
+                        <a:t>1억 350만</a:t>
                       </a:r>
-                      <a:endParaRPr lang="en-US" sz="1050" dirty="0">
+                      <a:endParaRPr lang="en-US" sz="1000" dirty="0">
+                        <a:latin typeface="맑은 고딕" charset="0"/>
+                        <a:ea typeface="맑은 고딕" charset="0"/>
+                        <a:cs typeface="맑은 고딕" charset="0"/>
+                      </a:endParaRPr>
+                    </a:p>
+                    <a:p>
+                      <a:pPr indent="0" marL="0">
+                        <a:buNone/>
+                      </a:pPr>
+                      <a:r>
+                        <a:rPr lang="en-US" sz="1000" dirty="0">
+                          <a:solidFill>
+                            <a:srgbClr val="1B2426"/>
+                          </a:solidFill>
+                          <a:latin typeface="맑은 고딕" pitchFamily="34" charset="0"/>
+                          <a:ea typeface="맑은 고딕" pitchFamily="34" charset="-122"/>
+                          <a:cs typeface="맑은 고딕" pitchFamily="34" charset="-120"/>
+                        </a:rPr>
+                        <a:t>~ 1억 1,490만</a:t>
+                      </a:r>
+                      <a:endParaRPr lang="en-US" sz="1000" dirty="0">
                         <a:latin typeface="맑은 고딕" charset="0"/>
                         <a:ea typeface="맑은 고딕" charset="0"/>
                         <a:cs typeface="맑은 고딕" charset="0"/>
@@ -25256,7 +26016,7 @@
                         <a:buNone/>
                       </a:pPr>
                       <a:r>
-                        <a:rPr lang="en-US" sz="1050" dirty="0">
+                        <a:rPr lang="en-US" sz="1000" dirty="0">
                           <a:solidFill>
                             <a:srgbClr val="1B2426"/>
                           </a:solidFill>
@@ -25264,9 +26024,9 @@
                           <a:ea typeface="맑은 고딕" pitchFamily="34" charset="-122"/>
                           <a:cs typeface="맑은 고딕" pitchFamily="34" charset="-120"/>
                         </a:rPr>
-                        <a:t>약 1억 398만</a:t>
+                        <a:t>1억 398만</a:t>
                       </a:r>
-                      <a:endParaRPr lang="en-US" sz="1050" dirty="0">
+                      <a:endParaRPr lang="en-US" sz="1000" dirty="0">
                         <a:latin typeface="맑은 고딕" charset="0"/>
                         <a:ea typeface="맑은 고딕" charset="0"/>
                         <a:cs typeface="맑은 고딕" charset="0"/>
@@ -25324,7 +26084,7 @@
                         <a:buNone/>
                       </a:pPr>
                       <a:r>
-                        <a:rPr lang="en-US" sz="1050" dirty="0">
+                        <a:rPr lang="en-US" sz="1000" dirty="0">
                           <a:solidFill>
                             <a:srgbClr val="1B2426"/>
                           </a:solidFill>
@@ -25332,9 +26092,9 @@
                           <a:ea typeface="맑은 고딕" pitchFamily="34" charset="-122"/>
                           <a:cs typeface="맑은 고딕" pitchFamily="34" charset="-120"/>
                         </a:rPr>
-                        <a:t>약 1억 3,702만</a:t>
+                        <a:t>1억 2,843만</a:t>
                       </a:r>
-                      <a:endParaRPr lang="en-US" sz="1050" dirty="0">
+                      <a:endParaRPr lang="en-US" sz="1000" dirty="0">
                         <a:latin typeface="맑은 고딕" charset="0"/>
                         <a:ea typeface="맑은 고딕" charset="0"/>
                         <a:cs typeface="맑은 고딕" charset="0"/>
@@ -25392,7 +26152,7 @@
                         <a:buNone/>
                       </a:pPr>
                       <a:r>
-                        <a:rPr lang="en-US" sz="1050" dirty="0">
+                        <a:rPr lang="en-US" sz="1000" dirty="0">
                           <a:solidFill>
                             <a:srgbClr val="1B2426"/>
                           </a:solidFill>
@@ -25400,9 +26160,9 @@
                           <a:ea typeface="맑은 고딕" pitchFamily="34" charset="-122"/>
                           <a:cs typeface="맑은 고딕" pitchFamily="34" charset="-120"/>
                         </a:rPr>
-                        <a:t>약 1억 8,444만</a:t>
+                        <a:t>1억 3,702만</a:t>
                       </a:r>
-                      <a:endParaRPr lang="en-US" sz="1050" dirty="0">
+                      <a:endParaRPr lang="en-US" sz="1000" dirty="0">
                         <a:latin typeface="맑은 고딕" charset="0"/>
                         <a:ea typeface="맑은 고딕" charset="0"/>
                         <a:cs typeface="맑은 고딕" charset="0"/>
@@ -25460,7 +26220,7 @@
                         <a:buNone/>
                       </a:pPr>
                       <a:r>
-                        <a:rPr lang="en-US" sz="1050" dirty="0">
+                        <a:rPr lang="en-US" sz="1000" dirty="0">
                           <a:solidFill>
                             <a:srgbClr val="1B2426"/>
                           </a:solidFill>
@@ -25468,9 +26228,77 @@
                           <a:ea typeface="맑은 고딕" pitchFamily="34" charset="-122"/>
                           <a:cs typeface="맑은 고딕" pitchFamily="34" charset="-120"/>
                         </a:rPr>
-                        <a:t>약 1억 8,773만</a:t>
+                        <a:t>1억 8,444만</a:t>
                       </a:r>
-                      <a:endParaRPr lang="en-US" sz="1050" dirty="0">
+                      <a:endParaRPr lang="en-US" sz="1000" dirty="0">
+                        <a:latin typeface="맑은 고딕" charset="0"/>
+                        <a:ea typeface="맑은 고딕" charset="0"/>
+                        <a:cs typeface="맑은 고딕" charset="0"/>
+                      </a:endParaRPr>
+                    </a:p>
+                  </a:txBody>
+                  <a:tcPr marL="88900" marR="88900" marT="50800" marB="50800" anchor="ctr">
+                    <a:lnL w="6350" cap="flat" cmpd="sng" algn="ctr">
+                      <a:solidFill>
+                        <a:srgbClr val="DCD6C9"/>
+                      </a:solidFill>
+                      <a:prstDash val="solid"/>
+                      <a:round/>
+                      <a:headEnd type="none" w="med" len="med"/>
+                      <a:tailEnd type="none" w="med" len="med"/>
+                    </a:lnL>
+                    <a:lnR w="6350" cap="flat" cmpd="sng" algn="ctr">
+                      <a:solidFill>
+                        <a:srgbClr val="DCD6C9"/>
+                      </a:solidFill>
+                      <a:prstDash val="solid"/>
+                      <a:round/>
+                      <a:headEnd type="none" w="med" len="med"/>
+                      <a:tailEnd type="none" w="med" len="med"/>
+                    </a:lnR>
+                    <a:lnT w="6350" cap="flat" cmpd="sng" algn="ctr">
+                      <a:solidFill>
+                        <a:srgbClr val="DCD6C9"/>
+                      </a:solidFill>
+                      <a:prstDash val="solid"/>
+                      <a:round/>
+                      <a:headEnd type="none" w="med" len="med"/>
+                      <a:tailEnd type="none" w="med" len="med"/>
+                    </a:lnT>
+                    <a:lnB w="6350" cap="flat" cmpd="sng" algn="ctr">
+                      <a:solidFill>
+                        <a:srgbClr val="DCD6C9"/>
+                      </a:solidFill>
+                      <a:prstDash val="solid"/>
+                      <a:round/>
+                      <a:headEnd type="none" w="med" len="med"/>
+                      <a:tailEnd type="none" w="med" len="med"/>
+                    </a:lnB>
+                    <a:solidFill>
+                      <a:srgbClr val="FFFFFF"/>
+                    </a:solidFill>
+                  </a:tcPr>
+                </a:tc>
+                <a:tc>
+                  <a:txBody>
+                    <a:bodyPr/>
+                    <a:lstStyle/>
+                    <a:p>
+                      <a:pPr indent="0" marL="0">
+                        <a:buNone/>
+                      </a:pPr>
+                      <a:r>
+                        <a:rPr lang="en-US" sz="1000" dirty="0">
+                          <a:solidFill>
+                            <a:srgbClr val="1B2426"/>
+                          </a:solidFill>
+                          <a:latin typeface="맑은 고딕" pitchFamily="34" charset="0"/>
+                          <a:ea typeface="맑은 고딕" pitchFamily="34" charset="-122"/>
+                          <a:cs typeface="맑은 고딕" pitchFamily="34" charset="-120"/>
+                        </a:rPr>
+                        <a:t>1억 8,773만</a:t>
+                      </a:r>
+                      <a:endParaRPr lang="en-US" sz="1000" dirty="0">
                         <a:latin typeface="맑은 고딕" charset="0"/>
                         <a:ea typeface="맑은 고딕" charset="0"/>
                         <a:cs typeface="맑은 고딕" charset="0"/>
@@ -25532,12 +26360,12 @@
         </p:nvSpPr>
         <p:spPr>
           <a:xfrm>
-            <a:off x="640080" y="5888736"/>
-            <a:ext cx="10911535" cy="402336"/>
+            <a:off x="640080" y="5760720"/>
+            <a:ext cx="10911535" cy="566928"/>
           </a:xfrm>
           <a:prstGeom prst="roundRect">
             <a:avLst>
-              <a:gd name="adj" fmla="val 13636"/>
+              <a:gd name="adj" fmla="val 9677"/>
             </a:avLst>
           </a:prstGeom>
           <a:solidFill>
@@ -25554,8 +26382,8 @@
         </p:nvSpPr>
         <p:spPr>
           <a:xfrm>
-            <a:off x="896112" y="5888736"/>
-            <a:ext cx="10399471" cy="402336"/>
+            <a:off x="896112" y="5815584"/>
+            <a:ext cx="10399471" cy="219456"/>
           </a:xfrm>
           <a:prstGeom prst="rect">
             <a:avLst/>
@@ -25564,7 +26392,7 @@
           <a:ln/>
         </p:spPr>
         <p:txBody>
-          <a:bodyPr wrap="square" lIns="0" tIns="0" rIns="0" bIns="0" rtlCol="0" anchor="ctr"/>
+          <a:bodyPr wrap="square" lIns="0" tIns="0" rIns="0" bIns="0" rtlCol="0" anchor="t"/>
           <a:lstStyle/>
           <a:p>
             <a:pPr algn="l" indent="0" marL="0">
@@ -25574,7 +26402,7 @@
               <a:buNone/>
             </a:pPr>
             <a:r>
-              <a:rPr lang="en-US" sz="1050" b="1" dirty="0">
+              <a:rPr lang="en-US" sz="1100" b="1" dirty="0">
                 <a:solidFill>
                   <a:srgbClr val="0C2E2C"/>
                 </a:solidFill>
@@ -25582,7 +26410,49 @@
                 <a:ea typeface="맑은 고딕" pitchFamily="34" charset="-122"/>
                 <a:cs typeface="맑은 고딕" pitchFamily="34" charset="-120"/>
               </a:rPr>
-              <a:t>입학비는 공동체 입회 시 1회만 납부합니다 — 3년이든 5년이든 같습니다 (이전 공동체 입학금 최대 200만 원 인정).   1년차가 2년차보다 비싸 보이는 이유는 입학비 500만 원이 1년차에만 들어가기 때문입니다.</a:t>
+              <a:t>입학비는 공동체 입회 시 1회만 납부합니다 — 3년이든 5년이든 같습니다 (이전 공동체 입학금 최대 200만 원 인정).</a:t>
+            </a:r>
+            <a:endParaRPr lang="en-US" sz="1100" dirty="0"/>
+          </a:p>
+        </p:txBody>
+      </p:sp>
+      <p:sp>
+        <p:nvSpPr>
+          <p:cNvPr id="10" name="Text 7"/>
+          <p:cNvSpPr txBox="1"/>
+          <p:nvPr/>
+        </p:nvSpPr>
+        <p:spPr>
+          <a:xfrm>
+            <a:off x="896112" y="6053328"/>
+            <a:ext cx="10399471" cy="219456"/>
+          </a:xfrm>
+          <a:prstGeom prst="rect">
+            <a:avLst/>
+          </a:prstGeom>
+          <a:noFill/>
+          <a:ln/>
+        </p:spPr>
+        <p:txBody>
+          <a:bodyPr wrap="square" lIns="0" tIns="0" rIns="0" bIns="0" rtlCol="0" anchor="t"/>
+          <a:lstStyle/>
+          <a:p>
+            <a:pPr algn="l" indent="0" marL="0">
+              <a:lnSpc>
+                <a:spcPct val="122000"/>
+              </a:lnSpc>
+              <a:buNone/>
+            </a:pPr>
+            <a:r>
+              <a:rPr lang="en-US" sz="1050" dirty="0">
+                <a:solidFill>
+                  <a:srgbClr val="1B2426"/>
+                </a:solidFill>
+                <a:latin typeface="맑은 고딕" pitchFamily="34" charset="0"/>
+                <a:ea typeface="맑은 고딕" pitchFamily="34" charset="-122"/>
+                <a:cs typeface="맑은 고딕" pitchFamily="34" charset="-120"/>
+              </a:rPr>
+              <a:t>1년차는 학비가 싼 파운데이션, 2년차부터는 학비가 비싼 학부입니다. 입학비 500만 원을 더해도 파운데이션 1년이 학부 1년보다 쌀 수 있습니다.</a:t>
             </a:r>
             <a:endParaRPr lang="en-US" sz="1050" dirty="0"/>
           </a:p>
@@ -25590,7 +26460,7 @@
       </p:sp>
       <p:sp>
         <p:nvSpPr>
-          <p:cNvPr id="10" name="Text 7"/>
+          <p:cNvPr id="11" name="Text 8"/>
           <p:cNvSpPr txBox="1"/>
           <p:nvPr/>
         </p:nvSpPr>
